--- a/สไลด์สอน_ซูโดกุ_ป5.pptx
+++ b/สไลด์สอน_ซูโดกุ_ป5.pptx
@@ -4,21 +4,23 @@
   <p:sldMasterIdLst>
     <p:sldMasterId id="2147483648" r:id="rId1"/>
   </p:sldMasterIdLst>
+  <p:notesMasterIdLst>
+    <p:notesMasterId r:id="rId14"/>
+  </p:notesMasterIdLst>
   <p:sldIdLst>
     <p:sldId id="256" r:id="rId2"/>
     <p:sldId id="257" r:id="rId3"/>
     <p:sldId id="258" r:id="rId4"/>
     <p:sldId id="259" r:id="rId5"/>
-    <p:sldId id="260" r:id="rId6"/>
-    <p:sldId id="261" r:id="rId7"/>
-    <p:sldId id="262" r:id="rId8"/>
-    <p:sldId id="263" r:id="rId9"/>
-    <p:sldId id="264" r:id="rId10"/>
-    <p:sldId id="265" r:id="rId11"/>
+    <p:sldId id="266" r:id="rId6"/>
+    <p:sldId id="260" r:id="rId7"/>
+    <p:sldId id="261" r:id="rId8"/>
+    <p:sldId id="262" r:id="rId9"/>
+    <p:sldId id="263" r:id="rId10"/>
+    <p:sldId id="264" r:id="rId11"/>
+    <p:sldId id="267" r:id="rId12"/>
+    <p:sldId id="265" r:id="rId13"/>
   </p:sldIdLst>
-  <p:notesMasterIdLst>
-    <p:notesMasterId r:id="rId12"/>
-  </p:notesMasterIdLst>
   <p:sldSz cx="12192000" cy="6858000"/>
   <p:notesSz cx="6858000" cy="12192000"/>
   <p:defaultTextStyle>
@@ -113,6 +115,11 @@
       </a:defRPr>
     </a:lvl9pPr>
   </p:defaultTextStyle>
+  <p:extLst>
+    <p:ext uri="{EFAFB233-063F-42B5-8137-9DF3F51BA10A}">
+      <p15:sldGuideLst xmlns:p15="http://schemas.microsoft.com/office/powerpoint/2012/main"/>
+    </p:ext>
+  </p:extLst>
 </p:presentation>
 </file>
 
@@ -138,234 +145,10 @@
           <a:chExt cx="0" cy="0"/>
         </a:xfrm>
       </p:grpSpPr>
-      <p:sp>
-        <p:nvSpPr>
-          <p:cNvPr id="2" name="Header Placeholder 1"/>
-          <p:cNvSpPr>
-            <a:spLocks noGrp="1"/>
-          </p:cNvSpPr>
-          <p:nvPr>
-            <p:ph type="hdr" sz="quarter"/>
-          </p:nvPr>
-        </p:nvSpPr>
-        <p:spPr>
-          <a:xfrm>
-            <a:off x="0" y="0"/>
-            <a:ext cx="2971800" cy="458788"/>
-          </a:xfrm>
-          <a:prstGeom prst="rect">
-            <a:avLst/>
-          </a:prstGeom>
-        </p:spPr>
-        <p:txBody>
-          <a:bodyPr vert="horz" lIns="91440" tIns="45720" rIns="91440" bIns="45720" rtlCol="0"/>
-          <a:lstStyle>
-            <a:lvl1pPr algn="l">
-              <a:defRPr sz="1200"/>
-            </a:lvl1pPr>
-          </a:lstStyle>
-          <a:p>
-            <a:endParaRPr lang="en-US"/>
-          </a:p>
-        </p:txBody>
-      </p:sp>
-      <p:sp>
-        <p:nvSpPr>
-          <p:cNvPr id="3" name="Date Placeholder 2"/>
-          <p:cNvSpPr>
-            <a:spLocks noGrp="1"/>
-          </p:cNvSpPr>
-          <p:nvPr>
-            <p:ph type="dt" idx="1"/>
-          </p:nvPr>
-        </p:nvSpPr>
-        <p:spPr>
-          <a:xfrm>
-            <a:off x="3884613" y="0"/>
-            <a:ext cx="2971800" cy="458788"/>
-          </a:xfrm>
-          <a:prstGeom prst="rect">
-            <a:avLst/>
-          </a:prstGeom>
-        </p:spPr>
-        <p:txBody>
-          <a:bodyPr vert="horz" lIns="91440" tIns="45720" rIns="91440" bIns="45720" rtlCol="0"/>
-          <a:lstStyle>
-            <a:lvl1pPr algn="r">
-              <a:defRPr sz="1200"/>
-            </a:lvl1pPr>
-          </a:lstStyle>
-          <a:p>
-            <a:fld id="{5282F153-3F37-0F45-9E97-73ACFA13230C}" type="datetimeFigureOut">
-              <a:rPr lang="en-US"/>
-              <a:t>7/23/19</a:t>
-            </a:fld>
-            <a:endParaRPr lang="en-US"/>
-          </a:p>
-        </p:txBody>
-      </p:sp>
-      <p:sp>
-        <p:nvSpPr>
-          <p:cNvPr id="4" name="Slide Image Placeholder 3"/>
-          <p:cNvSpPr>
-            <a:spLocks noGrp="1" noRot="1" noChangeAspect="1"/>
-          </p:cNvSpPr>
-          <p:nvPr>
-            <p:ph type="sldImg" idx="2"/>
-          </p:nvPr>
-        </p:nvSpPr>
-        <p:spPr>
-          <a:xfrm>
-            <a:off x="685800" y="1143000"/>
-            <a:ext cx="5486400" cy="3086100"/>
-          </a:xfrm>
-          <a:prstGeom prst="rect">
-            <a:avLst/>
-          </a:prstGeom>
-          <a:noFill/>
-          <a:ln w="12700">
-            <a:solidFill>
-              <a:prstClr val="black"/>
-            </a:solidFill>
-          </a:ln>
-        </p:spPr>
-        <p:txBody>
-          <a:bodyPr vert="horz" lIns="91440" tIns="45720" rIns="91440" bIns="45720" rtlCol="0" anchor="ctr"/>
-          <a:lstStyle/>
-          <a:p>
-            <a:endParaRPr lang="en-US"/>
-          </a:p>
-        </p:txBody>
-      </p:sp>
-      <p:sp>
-        <p:nvSpPr>
-          <p:cNvPr id="5" name="Notes Placeholder 4"/>
-          <p:cNvSpPr>
-            <a:spLocks noGrp="1"/>
-          </p:cNvSpPr>
-          <p:nvPr>
-            <p:ph type="body" sz="quarter" idx="3"/>
-          </p:nvPr>
-        </p:nvSpPr>
-        <p:spPr>
-          <a:xfrm>
-            <a:off x="685800" y="4400550"/>
-            <a:ext cx="5486400" cy="3600450"/>
-          </a:xfrm>
-          <a:prstGeom prst="rect">
-            <a:avLst/>
-          </a:prstGeom>
-        </p:spPr>
-        <p:txBody>
-          <a:bodyPr vert="horz" lIns="91440" tIns="45720" rIns="91440" bIns="45720" rtlCol="0"/>
-          <a:lstStyle/>
-          <a:p>
-            <a:pPr lvl="0"/>
-            <a:r>
-              <a:rPr lang="en-US"/>
-              <a:t>Click to edit Master text styles</a:t>
-            </a:r>
-          </a:p>
-          <a:p>
-            <a:pPr lvl="1"/>
-            <a:r>
-              <a:rPr lang="en-US"/>
-              <a:t>Second level</a:t>
-            </a:r>
-          </a:p>
-          <a:p>
-            <a:pPr lvl="2"/>
-            <a:r>
-              <a:rPr lang="en-US"/>
-              <a:t>Third level</a:t>
-            </a:r>
-          </a:p>
-          <a:p>
-            <a:pPr lvl="3"/>
-            <a:r>
-              <a:rPr lang="en-US"/>
-              <a:t>Fourth level</a:t>
-            </a:r>
-          </a:p>
-          <a:p>
-            <a:pPr lvl="4"/>
-            <a:r>
-              <a:rPr lang="en-US"/>
-              <a:t>Fifth level</a:t>
-            </a:r>
-          </a:p>
-        </p:txBody>
-      </p:sp>
-      <p:sp>
-        <p:nvSpPr>
-          <p:cNvPr id="6" name="Footer Placeholder 5"/>
-          <p:cNvSpPr>
-            <a:spLocks noGrp="1"/>
-          </p:cNvSpPr>
-          <p:nvPr>
-            <p:ph type="ftr" sz="quarter" idx="4"/>
-          </p:nvPr>
-        </p:nvSpPr>
-        <p:spPr>
-          <a:xfrm>
-            <a:off x="0" y="8685213"/>
-            <a:ext cx="2971800" cy="458787"/>
-          </a:xfrm>
-          <a:prstGeom prst="rect">
-            <a:avLst/>
-          </a:prstGeom>
-        </p:spPr>
-        <p:txBody>
-          <a:bodyPr vert="horz" lIns="91440" tIns="45720" rIns="91440" bIns="45720" rtlCol="0" anchor="b"/>
-          <a:lstStyle>
-            <a:lvl1pPr algn="l">
-              <a:defRPr sz="1200"/>
-            </a:lvl1pPr>
-          </a:lstStyle>
-          <a:p>
-            <a:endParaRPr lang="en-US"/>
-          </a:p>
-        </p:txBody>
-      </p:sp>
-      <p:sp>
-        <p:nvSpPr>
-          <p:cNvPr id="7" name="Slide Number Placeholder 6"/>
-          <p:cNvSpPr>
-            <a:spLocks noGrp="1"/>
-          </p:cNvSpPr>
-          <p:nvPr>
-            <p:ph type="sldNum" sz="quarter" idx="5"/>
-          </p:nvPr>
-        </p:nvSpPr>
-        <p:spPr>
-          <a:xfrm>
-            <a:off x="3884613" y="8685213"/>
-            <a:ext cx="2971800" cy="458787"/>
-          </a:xfrm>
-          <a:prstGeom prst="rect">
-            <a:avLst/>
-          </a:prstGeom>
-        </p:spPr>
-        <p:txBody>
-          <a:bodyPr vert="horz" lIns="91440" tIns="45720" rIns="91440" bIns="45720" rtlCol="0" anchor="b"/>
-          <a:lstStyle>
-            <a:lvl1pPr algn="r">
-              <a:defRPr sz="1200"/>
-            </a:lvl1pPr>
-          </a:lstStyle>
-          <a:p>
-            <a:fld id="{CE5E9CC1-C706-0F49-92D6-E571CC5EEA8F}" type="slidenum">
-              <a:rPr lang="en-US"/>
-              <a:t>‹#›</a:t>
-            </a:fld>
-            <a:endParaRPr lang="en-US"/>
-          </a:p>
-        </p:txBody>
-      </p:sp>
     </p:spTree>
     <p:extLst>
       <p:ext uri="{BB962C8B-B14F-4D97-AF65-F5344CB8AC3E}">
-        <p14:creationId xmlns:p14="http://schemas.microsoft.com/office/powerpoint/2010/main" val="1024086991"/>
+        <p14:creationId xmlns:p14="http://schemas.microsoft.com/office/powerpoint/2010/main" val="608919916"/>
       </p:ext>
     </p:extLst>
   </p:cSld>
@@ -513,7 +296,6 @@
               <a:rPr lang="en-US" dirty="0"/>
               <a:t>เปิดคาบด้วยพลังงานเชิงบวก แนะนำเรื่องและเชื่อมโยงว่าวันนี้จะได้เล่นเกมซูโดกุเพื่อฝึกการใช้เหตุผลเชิงตรรกะ</a:t>
             </a:r>
-            <a:endParaRPr lang="en-US" dirty="0"/>
           </a:p>
         </p:txBody>
       </p:sp>
@@ -599,9 +381,8 @@
           <a:p>
             <a:r>
               <a:rPr lang="en-US" dirty="0"/>
-              <a:t>ย้ำมโนทัศน์หลักและให้เด็กเห็นว่าตรรกะใช้ได้ทุกเรื่องรอบตัว</a:t>
+              <a:t>ให้เด็กทุกคนพิมพ์คำตอบของตนเอง เป็นหลักฐานวัด K รายบุคคล</a:t>
             </a:r>
-            <a:endParaRPr lang="en-US" dirty="0"/>
           </a:p>
         </p:txBody>
       </p:sp>
@@ -623,6 +404,204 @@
             <a:fld id="{F7021451-1387-4CA6-816F-3879F97B5CBC}" type="slidenum">
               <a:rPr lang="en-US"/>
               <a:t>10</a:t>
+            </a:fld>
+            <a:endParaRPr lang="en-US"/>
+          </a:p>
+        </p:txBody>
+      </p:sp>
+    </p:spTree>
+    <p:extLst>
+      <p:ext uri="{BB962C8B-B14F-4D97-AF65-F5344CB8AC3E}">
+        <p14:creationId xmlns:p14="http://schemas.microsoft.com/office/powerpoint/2010/main" val="1024086991"/>
+      </p:ext>
+    </p:extLst>
+  </p:cSld>
+  <p:clrMapOvr>
+    <a:masterClrMapping/>
+  </p:clrMapOvr>
+</p:notes>
+</file>
+
+<file path=ppt/notesSlides/notesSlide11.xml><?xml version="1.0" encoding="utf-8"?>
+<p:notes xmlns:a="http://schemas.openxmlformats.org/drawingml/2006/main" xmlns:r="http://schemas.openxmlformats.org/officeDocument/2006/relationships" xmlns:p="http://schemas.openxmlformats.org/presentationml/2006/main">
+  <p:cSld>
+    <p:spTree>
+      <p:nvGrpSpPr>
+        <p:cNvPr id="1" name="">
+          <a:extLst>
+            <a:ext uri="{FF2B5EF4-FFF2-40B4-BE49-F238E27FC236}">
+              <a16:creationId xmlns:a16="http://schemas.microsoft.com/office/drawing/2014/main" id="{B0FBB8C1-3B0D-865A-CAD1-6E6E05915E39}"/>
+            </a:ext>
+          </a:extLst>
+        </p:cNvPr>
+        <p:cNvGrpSpPr/>
+        <p:nvPr/>
+      </p:nvGrpSpPr>
+      <p:grpSpPr>
+        <a:xfrm>
+          <a:off x="0" y="0"/>
+          <a:ext cx="0" cy="0"/>
+          <a:chOff x="0" y="0"/>
+          <a:chExt cx="0" cy="0"/>
+        </a:xfrm>
+      </p:grpSpPr>
+      <p:sp>
+        <p:nvSpPr>
+          <p:cNvPr id="2" name="Slide Image Placeholder 1">
+            <a:extLst>
+              <a:ext uri="{FF2B5EF4-FFF2-40B4-BE49-F238E27FC236}">
+                <a16:creationId xmlns:a16="http://schemas.microsoft.com/office/drawing/2014/main" id="{C14A9B83-1F1E-6EE1-1B58-FD2C65DB95B1}"/>
+              </a:ext>
+            </a:extLst>
+          </p:cNvPr>
+          <p:cNvSpPr>
+            <a:spLocks noGrp="1" noRot="1" noChangeAspect="1"/>
+          </p:cNvSpPr>
+          <p:nvPr>
+            <p:ph type="sldImg"/>
+          </p:nvPr>
+        </p:nvSpPr>
+        <p:spPr/>
+      </p:sp>
+      <p:sp>
+        <p:nvSpPr>
+          <p:cNvPr id="3" name="Notes Placeholder 2">
+            <a:extLst>
+              <a:ext uri="{FF2B5EF4-FFF2-40B4-BE49-F238E27FC236}">
+                <a16:creationId xmlns:a16="http://schemas.microsoft.com/office/drawing/2014/main" id="{FE41C1F6-DD4A-97FE-E1E6-0E6ACB4A9C31}"/>
+              </a:ext>
+            </a:extLst>
+          </p:cNvPr>
+          <p:cNvSpPr>
+            <a:spLocks noGrp="1"/>
+          </p:cNvSpPr>
+          <p:nvPr>
+            <p:ph type="body" idx="1"/>
+          </p:nvPr>
+        </p:nvSpPr>
+        <p:spPr/>
+        <p:txBody>
+          <a:bodyPr/>
+          <a:lstStyle/>
+          <a:p>
+            <a:r>
+              <a:rPr lang="en-US" dirty="0"/>
+              <a:t>ให้เด็กทุกคนพิมพ์คำตอบของตนเอง เป็นหลักฐานวัด K รายบุคคล</a:t>
+            </a:r>
+          </a:p>
+        </p:txBody>
+      </p:sp>
+      <p:sp>
+        <p:nvSpPr>
+          <p:cNvPr id="4" name="Slide Number Placeholder 3">
+            <a:extLst>
+              <a:ext uri="{FF2B5EF4-FFF2-40B4-BE49-F238E27FC236}">
+                <a16:creationId xmlns:a16="http://schemas.microsoft.com/office/drawing/2014/main" id="{B315E45A-3D1F-2565-BFBD-7EB3AE259141}"/>
+              </a:ext>
+            </a:extLst>
+          </p:cNvPr>
+          <p:cNvSpPr>
+            <a:spLocks noGrp="1"/>
+          </p:cNvSpPr>
+          <p:nvPr>
+            <p:ph type="sldNum" sz="quarter" idx="10"/>
+          </p:nvPr>
+        </p:nvSpPr>
+        <p:spPr/>
+        <p:txBody>
+          <a:bodyPr/>
+          <a:lstStyle/>
+          <a:p>
+            <a:fld id="{F7021451-1387-4CA6-816F-3879F97B5CBC}" type="slidenum">
+              <a:rPr lang="en-US"/>
+              <a:t>11</a:t>
+            </a:fld>
+            <a:endParaRPr lang="en-US"/>
+          </a:p>
+        </p:txBody>
+      </p:sp>
+    </p:spTree>
+    <p:extLst>
+      <p:ext uri="{BB962C8B-B14F-4D97-AF65-F5344CB8AC3E}">
+        <p14:creationId xmlns:p14="http://schemas.microsoft.com/office/powerpoint/2010/main" val="3327060936"/>
+      </p:ext>
+    </p:extLst>
+  </p:cSld>
+  <p:clrMapOvr>
+    <a:masterClrMapping/>
+  </p:clrMapOvr>
+</p:notes>
+</file>
+
+<file path=ppt/notesSlides/notesSlide12.xml><?xml version="1.0" encoding="utf-8"?>
+<p:notes xmlns:a="http://schemas.openxmlformats.org/drawingml/2006/main" xmlns:r="http://schemas.openxmlformats.org/officeDocument/2006/relationships" xmlns:p="http://schemas.openxmlformats.org/presentationml/2006/main">
+  <p:cSld>
+    <p:spTree>
+      <p:nvGrpSpPr>
+        <p:cNvPr id="1" name=""/>
+        <p:cNvGrpSpPr/>
+        <p:nvPr/>
+      </p:nvGrpSpPr>
+      <p:grpSpPr>
+        <a:xfrm>
+          <a:off x="0" y="0"/>
+          <a:ext cx="0" cy="0"/>
+          <a:chOff x="0" y="0"/>
+          <a:chExt cx="0" cy="0"/>
+        </a:xfrm>
+      </p:grpSpPr>
+      <p:sp>
+        <p:nvSpPr>
+          <p:cNvPr id="2" name="Slide Image Placeholder 1"/>
+          <p:cNvSpPr>
+            <a:spLocks noGrp="1" noRot="1" noChangeAspect="1"/>
+          </p:cNvSpPr>
+          <p:nvPr>
+            <p:ph type="sldImg"/>
+          </p:nvPr>
+        </p:nvSpPr>
+        <p:spPr/>
+      </p:sp>
+      <p:sp>
+        <p:nvSpPr>
+          <p:cNvPr id="3" name="Notes Placeholder 2"/>
+          <p:cNvSpPr>
+            <a:spLocks noGrp="1"/>
+          </p:cNvSpPr>
+          <p:nvPr>
+            <p:ph type="body" idx="1"/>
+          </p:nvPr>
+        </p:nvSpPr>
+        <p:spPr/>
+        <p:txBody>
+          <a:bodyPr/>
+          <a:lstStyle/>
+          <a:p>
+            <a:r>
+              <a:rPr lang="en-US" dirty="0"/>
+              <a:t>ย้ำมโนทัศน์หลักและให้เด็กเห็นว่าตรรกะใช้ได้ทุกเรื่องรอบตัว</a:t>
+            </a:r>
+          </a:p>
+        </p:txBody>
+      </p:sp>
+      <p:sp>
+        <p:nvSpPr>
+          <p:cNvPr id="4" name="Slide Number Placeholder 3"/>
+          <p:cNvSpPr>
+            <a:spLocks noGrp="1"/>
+          </p:cNvSpPr>
+          <p:nvPr>
+            <p:ph type="sldNum" sz="quarter" idx="10"/>
+          </p:nvPr>
+        </p:nvSpPr>
+        <p:spPr/>
+        <p:txBody>
+          <a:bodyPr/>
+          <a:lstStyle/>
+          <a:p>
+            <a:fld id="{F7021451-1387-4CA6-816F-3879F97B5CBC}" type="slidenum">
+              <a:rPr lang="en-US"/>
+              <a:t>12</a:t>
             </a:fld>
             <a:endParaRPr lang="en-US"/>
           </a:p>
@@ -689,7 +668,6 @@
               <a:rPr lang="en-US" dirty="0"/>
               <a:t>แจ้งจุดประสงค์ทั้ง 3 ด้าน เน้นว่าปลายทางคือแก้ปริศนาได้เองอย่างมีเหตุผล</a:t>
             </a:r>
-            <a:endParaRPr lang="en-US" dirty="0"/>
           </a:p>
         </p:txBody>
       </p:sp>
@@ -775,9 +753,8 @@
           <a:p>
             <a:r>
               <a:rPr lang="en-US" dirty="0"/>
-              <a:t>ให้เด็กช่วยกันตัดตัวเลือกทีละเงื่อนไข ค่อย ๆ เฉลย 100 แล้วสรุปคำว่า 'ใช้เหตุผลเชิงตรรกะ'</a:t>
+              <a:t>ให้เด็กช่วยกันตัดตัวเลือกทีละเงื่อนไข: A เฉลย 25 (÷5→ลงท้าย0/5, 21-40, คี่→25/35, ผลบวก7→25) จากนั้นลอง B เฉลยสามเหลี่ยมด้านเท่า แล้วสรุปคำว่า 'ใช้เหตุผลเชิงตรรกะ'</a:t>
             </a:r>
-            <a:endParaRPr lang="en-US" dirty="0"/>
           </a:p>
         </p:txBody>
       </p:sp>
@@ -865,7 +842,6 @@
               <a:rPr lang="en-US" dirty="0"/>
               <a:t>เชื่อมจากเกมทายเลข ไปสู่กติกาซูโดกุที่ต้องใช้เหตุผลเชิงพื้นที่/รูปแบบ</a:t>
             </a:r>
-            <a:endParaRPr lang="en-US" dirty="0"/>
           </a:p>
         </p:txBody>
       </p:sp>
@@ -910,7 +886,13 @@
   <p:cSld>
     <p:spTree>
       <p:nvGrpSpPr>
-        <p:cNvPr id="1" name=""/>
+        <p:cNvPr id="1" name="">
+          <a:extLst>
+            <a:ext uri="{FF2B5EF4-FFF2-40B4-BE49-F238E27FC236}">
+              <a16:creationId xmlns:a16="http://schemas.microsoft.com/office/drawing/2014/main" id="{12760F3B-9CE2-69CC-8893-B8936AD406EF}"/>
+            </a:ext>
+          </a:extLst>
+        </p:cNvPr>
         <p:cNvGrpSpPr/>
         <p:nvPr/>
       </p:nvGrpSpPr>
@@ -924,7 +906,13 @@
       </p:grpSpPr>
       <p:sp>
         <p:nvSpPr>
-          <p:cNvPr id="2" name="Slide Image Placeholder 1"/>
+          <p:cNvPr id="2" name="Slide Image Placeholder 1">
+            <a:extLst>
+              <a:ext uri="{FF2B5EF4-FFF2-40B4-BE49-F238E27FC236}">
+                <a16:creationId xmlns:a16="http://schemas.microsoft.com/office/drawing/2014/main" id="{2B4C8825-FBC0-1DD0-F524-0AB70F76A344}"/>
+              </a:ext>
+            </a:extLst>
+          </p:cNvPr>
           <p:cNvSpPr>
             <a:spLocks noGrp="1" noRot="1" noChangeAspect="1"/>
           </p:cNvSpPr>
@@ -936,7 +924,13 @@
       </p:sp>
       <p:sp>
         <p:nvSpPr>
-          <p:cNvPr id="3" name="Notes Placeholder 2"/>
+          <p:cNvPr id="3" name="Notes Placeholder 2">
+            <a:extLst>
+              <a:ext uri="{FF2B5EF4-FFF2-40B4-BE49-F238E27FC236}">
+                <a16:creationId xmlns:a16="http://schemas.microsoft.com/office/drawing/2014/main" id="{01ED2C0E-4420-B424-4632-6F6144A16B2A}"/>
+              </a:ext>
+            </a:extLst>
+          </p:cNvPr>
           <p:cNvSpPr>
             <a:spLocks noGrp="1"/>
           </p:cNvSpPr>
@@ -951,15 +945,20 @@
           <a:p>
             <a:r>
               <a:rPr lang="en-US" dirty="0"/>
-              <a:t>ชี้ให้เห็นทั้ง 3 เงื่อนไข ระบบ FlowQuest จะไฮไลต์แดงเมื่อเติมซ้ำในเงื่อนไขใดเงื่อนไขหนึ่ง</a:t>
+              <a:t>เชื่อมจากเกมทายเลข ไปสู่กติกาซูโดกุที่ต้องใช้เหตุผลเชิงพื้นที่/รูปแบบ</a:t>
             </a:r>
-            <a:endParaRPr lang="en-US" dirty="0"/>
           </a:p>
         </p:txBody>
       </p:sp>
       <p:sp>
         <p:nvSpPr>
-          <p:cNvPr id="4" name="Slide Number Placeholder 3"/>
+          <p:cNvPr id="4" name="Slide Number Placeholder 3">
+            <a:extLst>
+              <a:ext uri="{FF2B5EF4-FFF2-40B4-BE49-F238E27FC236}">
+                <a16:creationId xmlns:a16="http://schemas.microsoft.com/office/drawing/2014/main" id="{7C6EC8B1-43EA-71B5-0A68-10BB176157CF}"/>
+              </a:ext>
+            </a:extLst>
+          </p:cNvPr>
           <p:cNvSpPr>
             <a:spLocks noGrp="1"/>
           </p:cNvSpPr>
@@ -983,7 +982,7 @@
     </p:spTree>
     <p:extLst>
       <p:ext uri="{BB962C8B-B14F-4D97-AF65-F5344CB8AC3E}">
-        <p14:creationId xmlns:p14="http://schemas.microsoft.com/office/powerpoint/2010/main" val="1024086991"/>
+        <p14:creationId xmlns:p14="http://schemas.microsoft.com/office/powerpoint/2010/main" val="2783777977"/>
       </p:ext>
     </p:extLst>
   </p:cSld>
@@ -1039,9 +1038,8 @@
           <a:p>
             <a:r>
               <a:rPr lang="en-US" dirty="0"/>
-              <a:t>ให้เด็กสังเกตว่าแถวบนเหลือช่องเดียว จึงเติมได้ทันทีอย่างมั่นใจ ต่างจากการเดาช่องที่มีตัวเลือกเยอะ</a:t>
+              <a:t>ชี้ให้เห็นทั้ง 3 เงื่อนไข ระบบ FlowQuest จะไฮไลต์แดงเมื่อเติมซ้ำในเงื่อนไขใดเงื่อนไขหนึ่ง</a:t>
             </a:r>
-            <a:endParaRPr lang="en-US" dirty="0"/>
           </a:p>
         </p:txBody>
       </p:sp>
@@ -1127,9 +1125,8 @@
           <a:p>
             <a:r>
               <a:rPr lang="en-US" dirty="0"/>
-              <a:t>อธิบายขั้นตอนสั้น ๆ แล้วปล่อยให้เด็กสำรวจกติกาด้วยตนเองผ่าน Instant Feedback</a:t>
+              <a:t>ให้เด็กสังเกตว่าแถวบนเหลือช่องเดียว จึงเติมได้ทันทีอย่างมั่นใจ ต่างจากการเดาช่องที่มีตัวเลือกเยอะ</a:t>
             </a:r>
-            <a:endParaRPr lang="en-US" dirty="0"/>
           </a:p>
         </p:txBody>
       </p:sp>
@@ -1215,9 +1212,8 @@
           <a:p>
             <a:r>
               <a:rPr lang="en-US" dirty="0"/>
-              <a:t>ครูเดินซักถามรายคน ใช้ช่วงนี้ประเมิน P2 (การให้เหตุผล + การแก้จุดบกพร่อง)</a:t>
+              <a:t>อธิบายขั้นตอนสั้น ๆ แล้วปล่อยให้เด็กสำรวจกติกาด้วยตนเองผ่าน Instant Feedback</a:t>
             </a:r>
-            <a:endParaRPr lang="en-US" dirty="0"/>
           </a:p>
         </p:txBody>
       </p:sp>
@@ -1303,9 +1299,8 @@
           <a:p>
             <a:r>
               <a:rPr lang="en-US" dirty="0"/>
-              <a:t>ให้เด็กทุกคนพิมพ์คำตอบของตนเอง เป็นหลักฐานวัด K รายบุคคล</a:t>
+              <a:t>ครูเดินซักถามรายคน ใช้ช่วงนี้ประเมิน P2 (การให้เหตุผล + การแก้จุดบกพร่อง)</a:t>
             </a:r>
-            <a:endParaRPr lang="en-US" dirty="0"/>
           </a:p>
         </p:txBody>
       </p:sp>
@@ -1378,6 +1373,11 @@
 <file path=ppt/slideMasters/slideMaster1.xml><?xml version="1.0" encoding="utf-8"?>
 <p:sldMaster xmlns:a="http://schemas.openxmlformats.org/drawingml/2006/main" xmlns:r="http://schemas.openxmlformats.org/officeDocument/2006/relationships" xmlns:p="http://schemas.openxmlformats.org/presentationml/2006/main">
   <p:cSld>
+    <p:bg>
+      <p:bgRef idx="1001">
+        <a:schemeClr val="bg1"/>
+      </p:bgRef>
+    </p:bg>
     <p:spTree>
       <p:nvGrpSpPr>
         <p:cNvPr id="1" name=""/>
@@ -1660,6 +1660,7 @@
         <a:solidFill>
           <a:srgbClr val="0B1020"/>
         </a:solidFill>
+        <a:effectLst/>
       </p:bgPr>
     </p:bg>
     <p:spTree>
@@ -2225,11 +2226,11 @@
           <a:bodyPr wrap="square" lIns="0" tIns="0" rIns="0" bIns="0" rtlCol="0" anchor="ctr"/>
           <a:lstStyle/>
           <a:p>
-            <a:pPr indent="0" marL="0">
+            <a:pPr marL="0" indent="0">
               <a:buNone/>
             </a:pPr>
             <a:r>
-              <a:rPr lang="en-US" sz="1400" b="1" spc="200" kern="0" dirty="0">
+              <a:rPr lang="en-US" sz="1400" b="1" kern="0" spc="200" dirty="0">
                 <a:solidFill>
                   <a:srgbClr val="22D3EE"/>
                 </a:solidFill>
@@ -2264,7 +2265,7 @@
           <a:bodyPr wrap="square" lIns="0" tIns="0" rIns="0" bIns="0" rtlCol="0" anchor="ctr"/>
           <a:lstStyle/>
           <a:p>
-            <a:pPr indent="0" marL="0">
+            <a:pPr marL="0" indent="0">
               <a:lnSpc>
                 <a:spcPct val="100000"/>
               </a:lnSpc>
@@ -2284,7 +2285,7 @@
             <a:endParaRPr lang="en-US" sz="5000" dirty="0"/>
           </a:p>
           <a:p>
-            <a:pPr indent="0" marL="0">
+            <a:pPr marL="0" indent="0">
               <a:lnSpc>
                 <a:spcPct val="100000"/>
               </a:lnSpc>
@@ -2301,12 +2302,6 @@
               </a:rPr>
               <a:t>แก้ปัญหาด้วยเกม</a:t>
             </a:r>
-            <a:pPr indent="0" marL="0">
-              <a:lnSpc>
-                <a:spcPct val="100000"/>
-              </a:lnSpc>
-              <a:buNone/>
-            </a:pPr>
             <a:r>
               <a:rPr lang="en-US" sz="5000" b="1" dirty="0">
                 <a:solidFill>
@@ -2343,7 +2338,7 @@
           <a:bodyPr wrap="square" lIns="0" tIns="0" rIns="0" bIns="0" rtlCol="0" anchor="ctr"/>
           <a:lstStyle/>
           <a:p>
-            <a:pPr indent="0" marL="0">
+            <a:pPr marL="0" indent="0">
               <a:buNone/>
             </a:pPr>
             <a:r>
@@ -2382,7 +2377,7 @@
           <a:bodyPr wrap="square" lIns="0" tIns="0" rIns="0" bIns="0" rtlCol="0" anchor="ctr"/>
           <a:lstStyle/>
           <a:p>
-            <a:pPr indent="0" marL="0">
+            <a:pPr marL="0" indent="0">
               <a:buNone/>
             </a:pPr>
             <a:r>
@@ -2399,7 +2394,7 @@
             <a:endParaRPr lang="en-US" sz="1600" dirty="0"/>
           </a:p>
           <a:p>
-            <a:pPr indent="0" marL="0">
+            <a:pPr marL="0" indent="0">
               <a:buNone/>
             </a:pPr>
             <a:r>
@@ -2443,7 +2438,7 @@
             <a:prstDash val="solid"/>
           </a:ln>
           <a:effectLst>
-            <a:outerShdw sx="100000" sy="100000" kx="0" ky="0" algn="bl" rotWithShape="0" blurRad="127000" dist="38100" dir="5400000">
+            <a:outerShdw blurRad="127000" dist="38100" dir="5400000" algn="bl" rotWithShape="0">
               <a:srgbClr val="000000">
                 <a:alpha val="35000"/>
               </a:srgbClr>
@@ -2499,7 +2494,7 @@
           <a:bodyPr wrap="square" lIns="0" tIns="0" rIns="0" bIns="0" rtlCol="0" anchor="ctr"/>
           <a:lstStyle/>
           <a:p>
-            <a:pPr algn="ctr" indent="0" marL="0">
+            <a:pPr marL="0" indent="0" algn="ctr">
               <a:buNone/>
             </a:pPr>
             <a:r>
@@ -2613,7 +2608,7 @@
           <a:bodyPr wrap="square" lIns="0" tIns="0" rIns="0" bIns="0" rtlCol="0" anchor="ctr"/>
           <a:lstStyle/>
           <a:p>
-            <a:pPr algn="ctr" indent="0" marL="0">
+            <a:pPr marL="0" indent="0" algn="ctr">
               <a:buNone/>
             </a:pPr>
             <a:r>
@@ -2702,7 +2697,7 @@
           <a:bodyPr wrap="square" lIns="0" tIns="0" rIns="0" bIns="0" rtlCol="0" anchor="ctr"/>
           <a:lstStyle/>
           <a:p>
-            <a:pPr algn="ctr" indent="0" marL="0">
+            <a:pPr marL="0" indent="0" algn="ctr">
               <a:buNone/>
             </a:pPr>
             <a:r>
@@ -2868,7 +2863,7 @@
           <a:bodyPr wrap="square" lIns="0" tIns="0" rIns="0" bIns="0" rtlCol="0" anchor="ctr"/>
           <a:lstStyle/>
           <a:p>
-            <a:pPr algn="ctr" indent="0" marL="0">
+            <a:pPr marL="0" indent="0" algn="ctr">
               <a:buNone/>
             </a:pPr>
             <a:r>
@@ -2957,7 +2952,7 @@
           <a:bodyPr wrap="square" lIns="0" tIns="0" rIns="0" bIns="0" rtlCol="0" anchor="ctr"/>
           <a:lstStyle/>
           <a:p>
-            <a:pPr algn="ctr" indent="0" marL="0">
+            <a:pPr marL="0" indent="0" algn="ctr">
               <a:buNone/>
             </a:pPr>
             <a:r>
@@ -3073,7 +3068,7 @@
           <a:bodyPr wrap="square" lIns="0" tIns="0" rIns="0" bIns="0" rtlCol="0" anchor="ctr"/>
           <a:lstStyle/>
           <a:p>
-            <a:pPr algn="ctr" indent="0" marL="0">
+            <a:pPr marL="0" indent="0" algn="ctr">
               <a:buNone/>
             </a:pPr>
             <a:r>
@@ -3250,7 +3245,7 @@
           <a:bodyPr wrap="square" lIns="0" tIns="0" rIns="0" bIns="0" rtlCol="0" anchor="ctr"/>
           <a:lstStyle/>
           <a:p>
-            <a:pPr algn="ctr" indent="0" marL="0">
+            <a:pPr marL="0" indent="0" algn="ctr">
               <a:buNone/>
             </a:pPr>
             <a:r>
@@ -3273,17 +3268,30 @@
   <p:clrMapOvr>
     <a:masterClrMapping/>
   </p:clrMapOvr>
+  <mc:AlternateContent xmlns:mc="http://schemas.openxmlformats.org/markup-compatibility/2006">
+    <mc:Choice xmlns:p159="http://schemas.microsoft.com/office/powerpoint/2015/09/main" Requires="p159">
+      <p:transition xmlns:p14="http://schemas.microsoft.com/office/powerpoint/2010/main" spd="slow" p14:dur="2000">
+        <p159:morph option="byObject"/>
+      </p:transition>
+    </mc:Choice>
+    <mc:Fallback>
+      <p:transition spd="slow">
+        <p:fade/>
+      </p:transition>
+    </mc:Fallback>
+  </mc:AlternateContent>
 </p:sld>
 </file>
 
 <file path=ppt/slides/slide10.xml><?xml version="1.0" encoding="utf-8"?>
 <p:sld xmlns:a="http://schemas.openxmlformats.org/drawingml/2006/main" xmlns:r="http://schemas.openxmlformats.org/officeDocument/2006/relationships" xmlns:p="http://schemas.openxmlformats.org/presentationml/2006/main">
-  <p:cSld name="Slide 10">
+  <p:cSld name="Slide 9">
     <p:bg>
       <p:bgPr>
         <a:solidFill>
           <a:srgbClr val="0B1020"/>
         </a:solidFill>
+        <a:effectLst/>
       </p:bgPr>
     </p:bg>
     <p:spTree>
@@ -3849,11 +3857,2248 @@
           <a:bodyPr wrap="square" lIns="0" tIns="0" rIns="0" bIns="0" rtlCol="0" anchor="ctr"/>
           <a:lstStyle/>
           <a:p>
-            <a:pPr indent="0" marL="0">
+            <a:pPr marL="0" indent="0">
               <a:buNone/>
             </a:pPr>
             <a:r>
-              <a:rPr lang="en-US" sz="1300" b="1" spc="300" kern="0" dirty="0">
+              <a:rPr lang="en-US" sz="1300" b="1" kern="0" spc="300" dirty="0">
+                <a:solidFill>
+                  <a:srgbClr val="22D3EE"/>
+                </a:solidFill>
+                <a:latin typeface="Courier New" pitchFamily="34" charset="0"/>
+                <a:ea typeface="Courier New" pitchFamily="34" charset="-122"/>
+                <a:cs typeface="Courier New" pitchFamily="34" charset="-120"/>
+              </a:rPr>
+              <a:t>EVALUATE // EXIT TICKET</a:t>
+            </a:r>
+            <a:endParaRPr lang="en-US" sz="1300" dirty="0"/>
+          </a:p>
+        </p:txBody>
+      </p:sp>
+      <p:sp>
+        <p:nvSpPr>
+          <p:cNvPr id="27" name="Text 25"/>
+          <p:cNvSpPr/>
+          <p:nvPr/>
+        </p:nvSpPr>
+        <p:spPr>
+          <a:xfrm>
+            <a:off x="640080" y="777240"/>
+            <a:ext cx="10908792" cy="822960"/>
+          </a:xfrm>
+          <a:prstGeom prst="rect">
+            <a:avLst/>
+          </a:prstGeom>
+          <a:noFill/>
+          <a:ln/>
+        </p:spPr>
+        <p:txBody>
+          <a:bodyPr wrap="square" lIns="0" tIns="0" rIns="0" bIns="0" rtlCol="0" anchor="ctr"/>
+          <a:lstStyle/>
+          <a:p>
+            <a:pPr marL="0" indent="0">
+              <a:buNone/>
+            </a:pPr>
+            <a:r>
+              <a:rPr lang="en-US" sz="3400" b="1" dirty="0">
+                <a:solidFill>
+                  <a:srgbClr val="F1F5F9"/>
+                </a:solidFill>
+                <a:latin typeface="TH Sarabun New" pitchFamily="34" charset="0"/>
+                <a:ea typeface="TH Sarabun New" pitchFamily="34" charset="-122"/>
+                <a:cs typeface="TH Sarabun New" pitchFamily="34" charset="-120"/>
+              </a:rPr>
+              <a:t>วัดความรู้รายบุคคล (กระดานระดมความคิด)</a:t>
+            </a:r>
+            <a:endParaRPr lang="en-US" sz="3400" dirty="0"/>
+          </a:p>
+        </p:txBody>
+      </p:sp>
+      <p:sp>
+        <p:nvSpPr>
+          <p:cNvPr id="28" name="Shape 26"/>
+          <p:cNvSpPr/>
+          <p:nvPr/>
+        </p:nvSpPr>
+        <p:spPr>
+          <a:xfrm>
+            <a:off x="640080" y="2103120"/>
+            <a:ext cx="3429000" cy="3291840"/>
+          </a:xfrm>
+          <a:prstGeom prst="roundRect">
+            <a:avLst>
+              <a:gd name="adj" fmla="val 2500"/>
+            </a:avLst>
+          </a:prstGeom>
+          <a:solidFill>
+            <a:srgbClr val="141C33"/>
+          </a:solidFill>
+          <a:ln w="12700">
+            <a:solidFill>
+              <a:srgbClr val="2A3550"/>
+            </a:solidFill>
+            <a:prstDash val="solid"/>
+          </a:ln>
+          <a:effectLst>
+            <a:outerShdw blurRad="127000" dist="38100" dir="5400000" algn="bl" rotWithShape="0">
+              <a:srgbClr val="000000">
+                <a:alpha val="35000"/>
+              </a:srgbClr>
+            </a:outerShdw>
+          </a:effectLst>
+        </p:spPr>
+      </p:sp>
+      <p:sp>
+        <p:nvSpPr>
+          <p:cNvPr id="29" name="Text 27"/>
+          <p:cNvSpPr/>
+          <p:nvPr/>
+        </p:nvSpPr>
+        <p:spPr>
+          <a:xfrm>
+            <a:off x="960120" y="2377440"/>
+            <a:ext cx="2743200" cy="640080"/>
+          </a:xfrm>
+          <a:prstGeom prst="rect">
+            <a:avLst/>
+          </a:prstGeom>
+          <a:noFill/>
+          <a:ln/>
+        </p:spPr>
+        <p:txBody>
+          <a:bodyPr wrap="square" lIns="0" tIns="0" rIns="0" bIns="0" rtlCol="0" anchor="ctr"/>
+          <a:lstStyle/>
+          <a:p>
+            <a:pPr marL="0" indent="0">
+              <a:buNone/>
+            </a:pPr>
+            <a:r>
+              <a:rPr lang="en-US" sz="3000" b="1" dirty="0">
+                <a:solidFill>
+                  <a:srgbClr val="22D3EE"/>
+                </a:solidFill>
+                <a:latin typeface="Courier New" pitchFamily="34" charset="0"/>
+                <a:ea typeface="Courier New" pitchFamily="34" charset="-122"/>
+                <a:cs typeface="Courier New" pitchFamily="34" charset="-120"/>
+              </a:rPr>
+              <a:t>Q1</a:t>
+            </a:r>
+            <a:endParaRPr lang="en-US" sz="3000" dirty="0"/>
+          </a:p>
+        </p:txBody>
+      </p:sp>
+      <p:sp>
+        <p:nvSpPr>
+          <p:cNvPr id="30" name="Text 28"/>
+          <p:cNvSpPr/>
+          <p:nvPr/>
+        </p:nvSpPr>
+        <p:spPr>
+          <a:xfrm>
+            <a:off x="960120" y="3200400"/>
+            <a:ext cx="2788920" cy="1828800"/>
+          </a:xfrm>
+          <a:prstGeom prst="rect">
+            <a:avLst/>
+          </a:prstGeom>
+          <a:noFill/>
+          <a:ln/>
+        </p:spPr>
+        <p:txBody>
+          <a:bodyPr wrap="square" lIns="0" tIns="0" rIns="0" bIns="0" rtlCol="0" anchor="t"/>
+          <a:lstStyle/>
+          <a:p>
+            <a:pPr marL="0" indent="0">
+              <a:buNone/>
+            </a:pPr>
+            <a:r>
+              <a:rPr lang="en-US" sz="2000" dirty="0" err="1">
+                <a:solidFill>
+                  <a:srgbClr val="F1F5F9"/>
+                </a:solidFill>
+                <a:latin typeface="TH Sarabun New" pitchFamily="34" charset="0"/>
+                <a:ea typeface="TH Sarabun New" pitchFamily="34" charset="-122"/>
+                <a:cs typeface="TH Sarabun New" pitchFamily="34" charset="-120"/>
+              </a:rPr>
+              <a:t>จากตาราง</a:t>
+            </a:r>
+            <a:r>
+              <a:rPr lang="th-TH" sz="2000" dirty="0" err="1">
+                <a:solidFill>
+                  <a:srgbClr val="F1F5F9"/>
+                </a:solidFill>
+                <a:latin typeface="TH Sarabun New" pitchFamily="34" charset="0"/>
+                <a:ea typeface="TH Sarabun New" pitchFamily="34" charset="-122"/>
+                <a:cs typeface="TH Sarabun New" pitchFamily="34" charset="-120"/>
+              </a:rPr>
+              <a:t>ซูโ</a:t>
+            </a:r>
+            <a:r>
+              <a:rPr lang="th-TH" sz="2000" dirty="0">
+                <a:solidFill>
+                  <a:srgbClr val="F1F5F9"/>
+                </a:solidFill>
+                <a:latin typeface="TH Sarabun New" pitchFamily="34" charset="0"/>
+                <a:ea typeface="TH Sarabun New" pitchFamily="34" charset="-122"/>
+                <a:cs typeface="TH Sarabun New" pitchFamily="34" charset="-120"/>
+              </a:rPr>
+              <a:t>ดก</a:t>
+            </a:r>
+            <a:r>
+              <a:rPr lang="th-TH" sz="2000" dirty="0" err="1">
+                <a:solidFill>
+                  <a:srgbClr val="F1F5F9"/>
+                </a:solidFill>
+                <a:latin typeface="TH Sarabun New" pitchFamily="34" charset="0"/>
+                <a:ea typeface="TH Sarabun New" pitchFamily="34" charset="-122"/>
+                <a:cs typeface="TH Sarabun New" pitchFamily="34" charset="-120"/>
+              </a:rPr>
+              <a:t>ุ</a:t>
+            </a:r>
+            <a:r>
+              <a:rPr lang="th-TH" sz="2000" dirty="0">
+                <a:solidFill>
+                  <a:srgbClr val="F1F5F9"/>
+                </a:solidFill>
+                <a:latin typeface="TH Sarabun New" pitchFamily="34" charset="0"/>
+                <a:ea typeface="TH Sarabun New" pitchFamily="34" charset="-122"/>
+                <a:cs typeface="TH Sarabun New" pitchFamily="34" charset="-120"/>
+              </a:rPr>
+              <a:t>ที่ครูกำหนดให้</a:t>
+            </a:r>
+            <a:r>
+              <a:rPr lang="en-US" sz="2000" dirty="0">
+                <a:solidFill>
+                  <a:srgbClr val="F1F5F9"/>
+                </a:solidFill>
+                <a:latin typeface="TH Sarabun New" pitchFamily="34" charset="0"/>
+                <a:ea typeface="TH Sarabun New" pitchFamily="34" charset="-122"/>
+                <a:cs typeface="TH Sarabun New" pitchFamily="34" charset="-120"/>
+              </a:rPr>
+              <a:t> ควรเริ่มเติมช่องใดก่อน เพราะเหตุใด</a:t>
+            </a:r>
+            <a:endParaRPr lang="en-US" sz="2000" dirty="0"/>
+          </a:p>
+        </p:txBody>
+      </p:sp>
+      <p:sp>
+        <p:nvSpPr>
+          <p:cNvPr id="31" name="Shape 29"/>
+          <p:cNvSpPr/>
+          <p:nvPr/>
+        </p:nvSpPr>
+        <p:spPr>
+          <a:xfrm>
+            <a:off x="4343400" y="2103120"/>
+            <a:ext cx="3429000" cy="3291840"/>
+          </a:xfrm>
+          <a:prstGeom prst="roundRect">
+            <a:avLst>
+              <a:gd name="adj" fmla="val 2500"/>
+            </a:avLst>
+          </a:prstGeom>
+          <a:solidFill>
+            <a:srgbClr val="141C33"/>
+          </a:solidFill>
+          <a:ln w="12700">
+            <a:solidFill>
+              <a:srgbClr val="2A3550"/>
+            </a:solidFill>
+            <a:prstDash val="solid"/>
+          </a:ln>
+          <a:effectLst>
+            <a:outerShdw blurRad="127000" dist="38100" dir="5400000" algn="bl" rotWithShape="0">
+              <a:srgbClr val="000000">
+                <a:alpha val="35000"/>
+              </a:srgbClr>
+            </a:outerShdw>
+          </a:effectLst>
+        </p:spPr>
+      </p:sp>
+      <p:sp>
+        <p:nvSpPr>
+          <p:cNvPr id="32" name="Text 30"/>
+          <p:cNvSpPr/>
+          <p:nvPr/>
+        </p:nvSpPr>
+        <p:spPr>
+          <a:xfrm>
+            <a:off x="4663440" y="2377440"/>
+            <a:ext cx="2743200" cy="640080"/>
+          </a:xfrm>
+          <a:prstGeom prst="rect">
+            <a:avLst/>
+          </a:prstGeom>
+          <a:noFill/>
+          <a:ln/>
+        </p:spPr>
+        <p:txBody>
+          <a:bodyPr wrap="square" lIns="0" tIns="0" rIns="0" bIns="0" rtlCol="0" anchor="ctr"/>
+          <a:lstStyle/>
+          <a:p>
+            <a:pPr marL="0" indent="0">
+              <a:buNone/>
+            </a:pPr>
+            <a:r>
+              <a:rPr lang="en-US" sz="3000" b="1" dirty="0">
+                <a:solidFill>
+                  <a:srgbClr val="22D3EE"/>
+                </a:solidFill>
+                <a:latin typeface="Courier New" pitchFamily="34" charset="0"/>
+                <a:ea typeface="Courier New" pitchFamily="34" charset="-122"/>
+                <a:cs typeface="Courier New" pitchFamily="34" charset="-120"/>
+              </a:rPr>
+              <a:t>Q2</a:t>
+            </a:r>
+            <a:endParaRPr lang="en-US" sz="3000" dirty="0"/>
+          </a:p>
+        </p:txBody>
+      </p:sp>
+      <p:sp>
+        <p:nvSpPr>
+          <p:cNvPr id="33" name="Text 31"/>
+          <p:cNvSpPr/>
+          <p:nvPr/>
+        </p:nvSpPr>
+        <p:spPr>
+          <a:xfrm>
+            <a:off x="4663440" y="3200400"/>
+            <a:ext cx="2788920" cy="1828800"/>
+          </a:xfrm>
+          <a:prstGeom prst="rect">
+            <a:avLst/>
+          </a:prstGeom>
+          <a:noFill/>
+          <a:ln/>
+        </p:spPr>
+        <p:txBody>
+          <a:bodyPr wrap="square" lIns="0" tIns="0" rIns="0" bIns="0" rtlCol="0" anchor="t"/>
+          <a:lstStyle/>
+          <a:p>
+            <a:pPr marL="0" indent="0">
+              <a:buNone/>
+            </a:pPr>
+            <a:r>
+              <a:rPr lang="en-US" sz="2000" dirty="0">
+                <a:solidFill>
+                  <a:srgbClr val="F1F5F9"/>
+                </a:solidFill>
+                <a:latin typeface="TH Sarabun New" pitchFamily="34" charset="0"/>
+                <a:ea typeface="TH Sarabun New" pitchFamily="34" charset="-122"/>
+                <a:cs typeface="TH Sarabun New" pitchFamily="34" charset="-120"/>
+              </a:rPr>
+              <a:t>อธิบายกติกาซูโดกุด้วยคำพูดของตนเอง</a:t>
+            </a:r>
+            <a:endParaRPr lang="en-US" sz="2000" dirty="0"/>
+          </a:p>
+        </p:txBody>
+      </p:sp>
+      <p:sp>
+        <p:nvSpPr>
+          <p:cNvPr id="34" name="Shape 32"/>
+          <p:cNvSpPr/>
+          <p:nvPr/>
+        </p:nvSpPr>
+        <p:spPr>
+          <a:xfrm>
+            <a:off x="8046720" y="2103120"/>
+            <a:ext cx="3429000" cy="3291840"/>
+          </a:xfrm>
+          <a:prstGeom prst="roundRect">
+            <a:avLst>
+              <a:gd name="adj" fmla="val 2500"/>
+            </a:avLst>
+          </a:prstGeom>
+          <a:solidFill>
+            <a:srgbClr val="141C33"/>
+          </a:solidFill>
+          <a:ln w="12700">
+            <a:solidFill>
+              <a:srgbClr val="2A3550"/>
+            </a:solidFill>
+            <a:prstDash val="solid"/>
+          </a:ln>
+          <a:effectLst>
+            <a:outerShdw blurRad="127000" dist="38100" dir="5400000" algn="bl" rotWithShape="0">
+              <a:srgbClr val="000000">
+                <a:alpha val="35000"/>
+              </a:srgbClr>
+            </a:outerShdw>
+          </a:effectLst>
+        </p:spPr>
+      </p:sp>
+      <p:sp>
+        <p:nvSpPr>
+          <p:cNvPr id="35" name="Text 33"/>
+          <p:cNvSpPr/>
+          <p:nvPr/>
+        </p:nvSpPr>
+        <p:spPr>
+          <a:xfrm>
+            <a:off x="8366760" y="2377440"/>
+            <a:ext cx="2743200" cy="640080"/>
+          </a:xfrm>
+          <a:prstGeom prst="rect">
+            <a:avLst/>
+          </a:prstGeom>
+          <a:noFill/>
+          <a:ln/>
+        </p:spPr>
+        <p:txBody>
+          <a:bodyPr wrap="square" lIns="0" tIns="0" rIns="0" bIns="0" rtlCol="0" anchor="ctr"/>
+          <a:lstStyle/>
+          <a:p>
+            <a:pPr marL="0" indent="0">
+              <a:buNone/>
+            </a:pPr>
+            <a:r>
+              <a:rPr lang="en-US" sz="3000" b="1" dirty="0">
+                <a:solidFill>
+                  <a:srgbClr val="22D3EE"/>
+                </a:solidFill>
+                <a:latin typeface="Courier New" pitchFamily="34" charset="0"/>
+                <a:ea typeface="Courier New" pitchFamily="34" charset="-122"/>
+                <a:cs typeface="Courier New" pitchFamily="34" charset="-120"/>
+              </a:rPr>
+              <a:t>Q3</a:t>
+            </a:r>
+            <a:endParaRPr lang="en-US" sz="3000" dirty="0"/>
+          </a:p>
+        </p:txBody>
+      </p:sp>
+      <p:sp>
+        <p:nvSpPr>
+          <p:cNvPr id="36" name="Text 34"/>
+          <p:cNvSpPr/>
+          <p:nvPr/>
+        </p:nvSpPr>
+        <p:spPr>
+          <a:xfrm>
+            <a:off x="8366760" y="3200400"/>
+            <a:ext cx="2788920" cy="1828800"/>
+          </a:xfrm>
+          <a:prstGeom prst="rect">
+            <a:avLst/>
+          </a:prstGeom>
+          <a:noFill/>
+          <a:ln/>
+        </p:spPr>
+        <p:txBody>
+          <a:bodyPr wrap="square" lIns="0" tIns="0" rIns="0" bIns="0" rtlCol="0" anchor="t"/>
+          <a:lstStyle/>
+          <a:p>
+            <a:pPr marL="0" indent="0">
+              <a:buNone/>
+            </a:pPr>
+            <a:r>
+              <a:rPr lang="en-US" sz="2000" dirty="0">
+                <a:solidFill>
+                  <a:srgbClr val="F1F5F9"/>
+                </a:solidFill>
+                <a:latin typeface="TH Sarabun New" pitchFamily="34" charset="0"/>
+                <a:ea typeface="TH Sarabun New" pitchFamily="34" charset="-122"/>
+                <a:cs typeface="TH Sarabun New" pitchFamily="34" charset="-120"/>
+              </a:rPr>
+              <a:t>ยกตัวอย่างการใช้เหตุผลเชิงตรรกะในชีวิตประจำวัน 1 สถานการณ์</a:t>
+            </a:r>
+            <a:endParaRPr lang="en-US" sz="2000" dirty="0"/>
+          </a:p>
+        </p:txBody>
+      </p:sp>
+      <p:sp>
+        <p:nvSpPr>
+          <p:cNvPr id="37" name="Text 35"/>
+          <p:cNvSpPr/>
+          <p:nvPr/>
+        </p:nvSpPr>
+        <p:spPr>
+          <a:xfrm>
+            <a:off x="640080" y="5669280"/>
+            <a:ext cx="10908792" cy="457200"/>
+          </a:xfrm>
+          <a:prstGeom prst="rect">
+            <a:avLst/>
+          </a:prstGeom>
+          <a:noFill/>
+          <a:ln/>
+        </p:spPr>
+        <p:txBody>
+          <a:bodyPr wrap="square" lIns="0" tIns="0" rIns="0" bIns="0" rtlCol="0" anchor="ctr"/>
+          <a:lstStyle/>
+          <a:p>
+            <a:pPr marL="0" indent="0" algn="ctr">
+              <a:buNone/>
+            </a:pPr>
+            <a:r>
+              <a:rPr lang="en-US" sz="1700" dirty="0">
+                <a:solidFill>
+                  <a:srgbClr val="94A3B8"/>
+                </a:solidFill>
+                <a:latin typeface="TH Sarabun New" pitchFamily="34" charset="0"/>
+                <a:ea typeface="TH Sarabun New" pitchFamily="34" charset="-122"/>
+                <a:cs typeface="TH Sarabun New" pitchFamily="34" charset="-120"/>
+              </a:rPr>
+              <a:t>ตั้งค่า “เห็นเฉพาะโพสต์ของตนเอง” — ตอบอิสระ ครูอ่านประเมินรายคน</a:t>
+            </a:r>
+            <a:endParaRPr lang="en-US" sz="1700" dirty="0"/>
+          </a:p>
+        </p:txBody>
+      </p:sp>
+    </p:spTree>
+  </p:cSld>
+  <p:clrMapOvr>
+    <a:masterClrMapping/>
+  </p:clrMapOvr>
+  <mc:AlternateContent xmlns:mc="http://schemas.openxmlformats.org/markup-compatibility/2006">
+    <mc:Choice xmlns:p159="http://schemas.microsoft.com/office/powerpoint/2015/09/main" Requires="p159">
+      <p:transition xmlns:p14="http://schemas.microsoft.com/office/powerpoint/2010/main" spd="slow" p14:dur="2000">
+        <p159:morph option="byObject"/>
+      </p:transition>
+    </mc:Choice>
+    <mc:Fallback>
+      <p:transition spd="slow">
+        <p:fade/>
+      </p:transition>
+    </mc:Fallback>
+  </mc:AlternateContent>
+</p:sld>
+</file>
+
+<file path=ppt/slides/slide11.xml><?xml version="1.0" encoding="utf-8"?>
+<p:sld xmlns:a="http://schemas.openxmlformats.org/drawingml/2006/main" xmlns:r="http://schemas.openxmlformats.org/officeDocument/2006/relationships" xmlns:p="http://schemas.openxmlformats.org/presentationml/2006/main">
+  <p:cSld>
+    <p:bg>
+      <p:bgPr>
+        <a:solidFill>
+          <a:srgbClr val="0B1020"/>
+        </a:solidFill>
+        <a:effectLst/>
+      </p:bgPr>
+    </p:bg>
+    <p:spTree>
+      <p:nvGrpSpPr>
+        <p:cNvPr id="1" name="">
+          <a:extLst>
+            <a:ext uri="{FF2B5EF4-FFF2-40B4-BE49-F238E27FC236}">
+              <a16:creationId xmlns:a16="http://schemas.microsoft.com/office/drawing/2014/main" id="{6B592251-3DB2-8E96-00D1-7ECCDA4A3BA4}"/>
+            </a:ext>
+          </a:extLst>
+        </p:cNvPr>
+        <p:cNvGrpSpPr/>
+        <p:nvPr/>
+      </p:nvGrpSpPr>
+      <p:grpSpPr>
+        <a:xfrm>
+          <a:off x="0" y="0"/>
+          <a:ext cx="0" cy="0"/>
+          <a:chOff x="0" y="0"/>
+          <a:chExt cx="0" cy="0"/>
+        </a:xfrm>
+      </p:grpSpPr>
+      <p:sp>
+        <p:nvSpPr>
+          <p:cNvPr id="2" name="Shape 0">
+            <a:extLst>
+              <a:ext uri="{FF2B5EF4-FFF2-40B4-BE49-F238E27FC236}">
+                <a16:creationId xmlns:a16="http://schemas.microsoft.com/office/drawing/2014/main" id="{6019ADF0-2C3E-E157-D448-F522DC7754E4}"/>
+              </a:ext>
+            </a:extLst>
+          </p:cNvPr>
+          <p:cNvSpPr/>
+          <p:nvPr/>
+        </p:nvSpPr>
+        <p:spPr>
+          <a:xfrm>
+            <a:off x="10451592" y="228600"/>
+            <a:ext cx="45720" cy="45720"/>
+          </a:xfrm>
+          <a:prstGeom prst="ellipse">
+            <a:avLst/>
+          </a:prstGeom>
+          <a:solidFill>
+            <a:srgbClr val="22D3EE">
+              <a:alpha val="25000"/>
+            </a:srgbClr>
+          </a:solidFill>
+          <a:ln/>
+        </p:spPr>
+      </p:sp>
+      <p:sp>
+        <p:nvSpPr>
+          <p:cNvPr id="3" name="Shape 1">
+            <a:extLst>
+              <a:ext uri="{FF2B5EF4-FFF2-40B4-BE49-F238E27FC236}">
+                <a16:creationId xmlns:a16="http://schemas.microsoft.com/office/drawing/2014/main" id="{05D4543E-3E0D-52D8-EAA5-305690102DDB}"/>
+              </a:ext>
+            </a:extLst>
+          </p:cNvPr>
+          <p:cNvSpPr/>
+          <p:nvPr/>
+        </p:nvSpPr>
+        <p:spPr>
+          <a:xfrm>
+            <a:off x="10451592" y="502920"/>
+            <a:ext cx="45720" cy="45720"/>
+          </a:xfrm>
+          <a:prstGeom prst="ellipse">
+            <a:avLst/>
+          </a:prstGeom>
+          <a:solidFill>
+            <a:srgbClr val="22D3EE">
+              <a:alpha val="25000"/>
+            </a:srgbClr>
+          </a:solidFill>
+          <a:ln/>
+        </p:spPr>
+      </p:sp>
+      <p:sp>
+        <p:nvSpPr>
+          <p:cNvPr id="4" name="Shape 2">
+            <a:extLst>
+              <a:ext uri="{FF2B5EF4-FFF2-40B4-BE49-F238E27FC236}">
+                <a16:creationId xmlns:a16="http://schemas.microsoft.com/office/drawing/2014/main" id="{11674DBD-5C6A-DA33-85AF-7935E169091D}"/>
+              </a:ext>
+            </a:extLst>
+          </p:cNvPr>
+          <p:cNvSpPr/>
+          <p:nvPr/>
+        </p:nvSpPr>
+        <p:spPr>
+          <a:xfrm>
+            <a:off x="10451592" y="777240"/>
+            <a:ext cx="45720" cy="45720"/>
+          </a:xfrm>
+          <a:prstGeom prst="ellipse">
+            <a:avLst/>
+          </a:prstGeom>
+          <a:solidFill>
+            <a:srgbClr val="22D3EE">
+              <a:alpha val="25000"/>
+            </a:srgbClr>
+          </a:solidFill>
+          <a:ln/>
+        </p:spPr>
+      </p:sp>
+      <p:sp>
+        <p:nvSpPr>
+          <p:cNvPr id="5" name="Shape 3">
+            <a:extLst>
+              <a:ext uri="{FF2B5EF4-FFF2-40B4-BE49-F238E27FC236}">
+                <a16:creationId xmlns:a16="http://schemas.microsoft.com/office/drawing/2014/main" id="{A31473DB-DF33-1FD0-E818-DA3582BA1EB4}"/>
+              </a:ext>
+            </a:extLst>
+          </p:cNvPr>
+          <p:cNvSpPr/>
+          <p:nvPr/>
+        </p:nvSpPr>
+        <p:spPr>
+          <a:xfrm>
+            <a:off x="10451592" y="1051560"/>
+            <a:ext cx="45720" cy="45720"/>
+          </a:xfrm>
+          <a:prstGeom prst="ellipse">
+            <a:avLst/>
+          </a:prstGeom>
+          <a:solidFill>
+            <a:srgbClr val="22D3EE">
+              <a:alpha val="25000"/>
+            </a:srgbClr>
+          </a:solidFill>
+          <a:ln/>
+        </p:spPr>
+      </p:sp>
+      <p:sp>
+        <p:nvSpPr>
+          <p:cNvPr id="6" name="Shape 4">
+            <a:extLst>
+              <a:ext uri="{FF2B5EF4-FFF2-40B4-BE49-F238E27FC236}">
+                <a16:creationId xmlns:a16="http://schemas.microsoft.com/office/drawing/2014/main" id="{B8248C85-58C9-56C3-C590-1734E7AFAE92}"/>
+              </a:ext>
+            </a:extLst>
+          </p:cNvPr>
+          <p:cNvSpPr/>
+          <p:nvPr/>
+        </p:nvSpPr>
+        <p:spPr>
+          <a:xfrm>
+            <a:off x="10725912" y="228600"/>
+            <a:ext cx="45720" cy="45720"/>
+          </a:xfrm>
+          <a:prstGeom prst="ellipse">
+            <a:avLst/>
+          </a:prstGeom>
+          <a:solidFill>
+            <a:srgbClr val="22D3EE">
+              <a:alpha val="25000"/>
+            </a:srgbClr>
+          </a:solidFill>
+          <a:ln/>
+        </p:spPr>
+      </p:sp>
+      <p:sp>
+        <p:nvSpPr>
+          <p:cNvPr id="7" name="Shape 5">
+            <a:extLst>
+              <a:ext uri="{FF2B5EF4-FFF2-40B4-BE49-F238E27FC236}">
+                <a16:creationId xmlns:a16="http://schemas.microsoft.com/office/drawing/2014/main" id="{0C5BD1BD-5BC4-DAF2-9B61-BC5376FECA64}"/>
+              </a:ext>
+            </a:extLst>
+          </p:cNvPr>
+          <p:cNvSpPr/>
+          <p:nvPr/>
+        </p:nvSpPr>
+        <p:spPr>
+          <a:xfrm>
+            <a:off x="10725912" y="502920"/>
+            <a:ext cx="45720" cy="45720"/>
+          </a:xfrm>
+          <a:prstGeom prst="ellipse">
+            <a:avLst/>
+          </a:prstGeom>
+          <a:solidFill>
+            <a:srgbClr val="22D3EE">
+              <a:alpha val="25000"/>
+            </a:srgbClr>
+          </a:solidFill>
+          <a:ln/>
+        </p:spPr>
+      </p:sp>
+      <p:sp>
+        <p:nvSpPr>
+          <p:cNvPr id="8" name="Shape 6">
+            <a:extLst>
+              <a:ext uri="{FF2B5EF4-FFF2-40B4-BE49-F238E27FC236}">
+                <a16:creationId xmlns:a16="http://schemas.microsoft.com/office/drawing/2014/main" id="{ECA0728D-1E05-87BF-F570-7ACB65EE9FFC}"/>
+              </a:ext>
+            </a:extLst>
+          </p:cNvPr>
+          <p:cNvSpPr/>
+          <p:nvPr/>
+        </p:nvSpPr>
+        <p:spPr>
+          <a:xfrm>
+            <a:off x="10725912" y="777240"/>
+            <a:ext cx="45720" cy="45720"/>
+          </a:xfrm>
+          <a:prstGeom prst="ellipse">
+            <a:avLst/>
+          </a:prstGeom>
+          <a:solidFill>
+            <a:srgbClr val="22D3EE">
+              <a:alpha val="25000"/>
+            </a:srgbClr>
+          </a:solidFill>
+          <a:ln/>
+        </p:spPr>
+      </p:sp>
+      <p:sp>
+        <p:nvSpPr>
+          <p:cNvPr id="9" name="Shape 7">
+            <a:extLst>
+              <a:ext uri="{FF2B5EF4-FFF2-40B4-BE49-F238E27FC236}">
+                <a16:creationId xmlns:a16="http://schemas.microsoft.com/office/drawing/2014/main" id="{176834B5-DF7F-34AE-A2C2-0970BFFE1A8C}"/>
+              </a:ext>
+            </a:extLst>
+          </p:cNvPr>
+          <p:cNvSpPr/>
+          <p:nvPr/>
+        </p:nvSpPr>
+        <p:spPr>
+          <a:xfrm>
+            <a:off x="10725912" y="1051560"/>
+            <a:ext cx="45720" cy="45720"/>
+          </a:xfrm>
+          <a:prstGeom prst="ellipse">
+            <a:avLst/>
+          </a:prstGeom>
+          <a:solidFill>
+            <a:srgbClr val="22D3EE">
+              <a:alpha val="25000"/>
+            </a:srgbClr>
+          </a:solidFill>
+          <a:ln/>
+        </p:spPr>
+      </p:sp>
+      <p:sp>
+        <p:nvSpPr>
+          <p:cNvPr id="10" name="Shape 8">
+            <a:extLst>
+              <a:ext uri="{FF2B5EF4-FFF2-40B4-BE49-F238E27FC236}">
+                <a16:creationId xmlns:a16="http://schemas.microsoft.com/office/drawing/2014/main" id="{9927F126-8668-7AB2-727B-779FDE54519B}"/>
+              </a:ext>
+            </a:extLst>
+          </p:cNvPr>
+          <p:cNvSpPr/>
+          <p:nvPr/>
+        </p:nvSpPr>
+        <p:spPr>
+          <a:xfrm>
+            <a:off x="11000232" y="228600"/>
+            <a:ext cx="45720" cy="45720"/>
+          </a:xfrm>
+          <a:prstGeom prst="ellipse">
+            <a:avLst/>
+          </a:prstGeom>
+          <a:solidFill>
+            <a:srgbClr val="22D3EE">
+              <a:alpha val="25000"/>
+            </a:srgbClr>
+          </a:solidFill>
+          <a:ln/>
+        </p:spPr>
+      </p:sp>
+      <p:sp>
+        <p:nvSpPr>
+          <p:cNvPr id="11" name="Shape 9">
+            <a:extLst>
+              <a:ext uri="{FF2B5EF4-FFF2-40B4-BE49-F238E27FC236}">
+                <a16:creationId xmlns:a16="http://schemas.microsoft.com/office/drawing/2014/main" id="{C7AEBEA1-3462-8131-0409-6ADA8ACCDEDD}"/>
+              </a:ext>
+            </a:extLst>
+          </p:cNvPr>
+          <p:cNvSpPr/>
+          <p:nvPr/>
+        </p:nvSpPr>
+        <p:spPr>
+          <a:xfrm>
+            <a:off x="11000232" y="502920"/>
+            <a:ext cx="45720" cy="45720"/>
+          </a:xfrm>
+          <a:prstGeom prst="ellipse">
+            <a:avLst/>
+          </a:prstGeom>
+          <a:solidFill>
+            <a:srgbClr val="22D3EE">
+              <a:alpha val="25000"/>
+            </a:srgbClr>
+          </a:solidFill>
+          <a:ln/>
+        </p:spPr>
+      </p:sp>
+      <p:sp>
+        <p:nvSpPr>
+          <p:cNvPr id="12" name="Shape 10">
+            <a:extLst>
+              <a:ext uri="{FF2B5EF4-FFF2-40B4-BE49-F238E27FC236}">
+                <a16:creationId xmlns:a16="http://schemas.microsoft.com/office/drawing/2014/main" id="{F2795563-FF24-4D34-8EA1-0D0898F41BEC}"/>
+              </a:ext>
+            </a:extLst>
+          </p:cNvPr>
+          <p:cNvSpPr/>
+          <p:nvPr/>
+        </p:nvSpPr>
+        <p:spPr>
+          <a:xfrm>
+            <a:off x="11000232" y="777240"/>
+            <a:ext cx="45720" cy="45720"/>
+          </a:xfrm>
+          <a:prstGeom prst="ellipse">
+            <a:avLst/>
+          </a:prstGeom>
+          <a:solidFill>
+            <a:srgbClr val="22D3EE">
+              <a:alpha val="25000"/>
+            </a:srgbClr>
+          </a:solidFill>
+          <a:ln/>
+        </p:spPr>
+      </p:sp>
+      <p:sp>
+        <p:nvSpPr>
+          <p:cNvPr id="13" name="Shape 11">
+            <a:extLst>
+              <a:ext uri="{FF2B5EF4-FFF2-40B4-BE49-F238E27FC236}">
+                <a16:creationId xmlns:a16="http://schemas.microsoft.com/office/drawing/2014/main" id="{6A6EF049-B0EF-2229-8AA9-CEBF5BCE8EE8}"/>
+              </a:ext>
+            </a:extLst>
+          </p:cNvPr>
+          <p:cNvSpPr/>
+          <p:nvPr/>
+        </p:nvSpPr>
+        <p:spPr>
+          <a:xfrm>
+            <a:off x="11000232" y="1051560"/>
+            <a:ext cx="45720" cy="45720"/>
+          </a:xfrm>
+          <a:prstGeom prst="ellipse">
+            <a:avLst/>
+          </a:prstGeom>
+          <a:solidFill>
+            <a:srgbClr val="22D3EE">
+              <a:alpha val="25000"/>
+            </a:srgbClr>
+          </a:solidFill>
+          <a:ln/>
+        </p:spPr>
+      </p:sp>
+      <p:sp>
+        <p:nvSpPr>
+          <p:cNvPr id="14" name="Shape 12">
+            <a:extLst>
+              <a:ext uri="{FF2B5EF4-FFF2-40B4-BE49-F238E27FC236}">
+                <a16:creationId xmlns:a16="http://schemas.microsoft.com/office/drawing/2014/main" id="{94D56532-C005-92ED-8D4C-D61074DFC205}"/>
+              </a:ext>
+            </a:extLst>
+          </p:cNvPr>
+          <p:cNvSpPr/>
+          <p:nvPr/>
+        </p:nvSpPr>
+        <p:spPr>
+          <a:xfrm>
+            <a:off x="11274552" y="228600"/>
+            <a:ext cx="45720" cy="45720"/>
+          </a:xfrm>
+          <a:prstGeom prst="ellipse">
+            <a:avLst/>
+          </a:prstGeom>
+          <a:solidFill>
+            <a:srgbClr val="22D3EE">
+              <a:alpha val="25000"/>
+            </a:srgbClr>
+          </a:solidFill>
+          <a:ln/>
+        </p:spPr>
+      </p:sp>
+      <p:sp>
+        <p:nvSpPr>
+          <p:cNvPr id="15" name="Shape 13">
+            <a:extLst>
+              <a:ext uri="{FF2B5EF4-FFF2-40B4-BE49-F238E27FC236}">
+                <a16:creationId xmlns:a16="http://schemas.microsoft.com/office/drawing/2014/main" id="{C2627AE4-F5C0-A8E8-360A-88F5482C34FD}"/>
+              </a:ext>
+            </a:extLst>
+          </p:cNvPr>
+          <p:cNvSpPr/>
+          <p:nvPr/>
+        </p:nvSpPr>
+        <p:spPr>
+          <a:xfrm>
+            <a:off x="11274552" y="502920"/>
+            <a:ext cx="45720" cy="45720"/>
+          </a:xfrm>
+          <a:prstGeom prst="ellipse">
+            <a:avLst/>
+          </a:prstGeom>
+          <a:solidFill>
+            <a:srgbClr val="22D3EE">
+              <a:alpha val="25000"/>
+            </a:srgbClr>
+          </a:solidFill>
+          <a:ln/>
+        </p:spPr>
+      </p:sp>
+      <p:sp>
+        <p:nvSpPr>
+          <p:cNvPr id="16" name="Shape 14">
+            <a:extLst>
+              <a:ext uri="{FF2B5EF4-FFF2-40B4-BE49-F238E27FC236}">
+                <a16:creationId xmlns:a16="http://schemas.microsoft.com/office/drawing/2014/main" id="{B4BF1063-53B7-DE17-4D35-CF06D4F747EF}"/>
+              </a:ext>
+            </a:extLst>
+          </p:cNvPr>
+          <p:cNvSpPr/>
+          <p:nvPr/>
+        </p:nvSpPr>
+        <p:spPr>
+          <a:xfrm>
+            <a:off x="11274552" y="777240"/>
+            <a:ext cx="45720" cy="45720"/>
+          </a:xfrm>
+          <a:prstGeom prst="ellipse">
+            <a:avLst/>
+          </a:prstGeom>
+          <a:solidFill>
+            <a:srgbClr val="22D3EE">
+              <a:alpha val="25000"/>
+            </a:srgbClr>
+          </a:solidFill>
+          <a:ln/>
+        </p:spPr>
+      </p:sp>
+      <p:sp>
+        <p:nvSpPr>
+          <p:cNvPr id="17" name="Shape 15">
+            <a:extLst>
+              <a:ext uri="{FF2B5EF4-FFF2-40B4-BE49-F238E27FC236}">
+                <a16:creationId xmlns:a16="http://schemas.microsoft.com/office/drawing/2014/main" id="{4DBBF4C7-1879-20DC-005D-F28895BC3E35}"/>
+              </a:ext>
+            </a:extLst>
+          </p:cNvPr>
+          <p:cNvSpPr/>
+          <p:nvPr/>
+        </p:nvSpPr>
+        <p:spPr>
+          <a:xfrm>
+            <a:off x="11274552" y="1051560"/>
+            <a:ext cx="45720" cy="45720"/>
+          </a:xfrm>
+          <a:prstGeom prst="ellipse">
+            <a:avLst/>
+          </a:prstGeom>
+          <a:solidFill>
+            <a:srgbClr val="22D3EE">
+              <a:alpha val="25000"/>
+            </a:srgbClr>
+          </a:solidFill>
+          <a:ln/>
+        </p:spPr>
+      </p:sp>
+      <p:sp>
+        <p:nvSpPr>
+          <p:cNvPr id="18" name="Shape 16">
+            <a:extLst>
+              <a:ext uri="{FF2B5EF4-FFF2-40B4-BE49-F238E27FC236}">
+                <a16:creationId xmlns:a16="http://schemas.microsoft.com/office/drawing/2014/main" id="{ACDB59F0-A265-F277-8D11-30C0CA2D9703}"/>
+              </a:ext>
+            </a:extLst>
+          </p:cNvPr>
+          <p:cNvSpPr/>
+          <p:nvPr/>
+        </p:nvSpPr>
+        <p:spPr>
+          <a:xfrm>
+            <a:off x="11548872" y="228600"/>
+            <a:ext cx="45720" cy="45720"/>
+          </a:xfrm>
+          <a:prstGeom prst="ellipse">
+            <a:avLst/>
+          </a:prstGeom>
+          <a:solidFill>
+            <a:srgbClr val="22D3EE">
+              <a:alpha val="25000"/>
+            </a:srgbClr>
+          </a:solidFill>
+          <a:ln/>
+        </p:spPr>
+      </p:sp>
+      <p:sp>
+        <p:nvSpPr>
+          <p:cNvPr id="19" name="Shape 17">
+            <a:extLst>
+              <a:ext uri="{FF2B5EF4-FFF2-40B4-BE49-F238E27FC236}">
+                <a16:creationId xmlns:a16="http://schemas.microsoft.com/office/drawing/2014/main" id="{BF130312-8A14-F257-3B57-70B46686557B}"/>
+              </a:ext>
+            </a:extLst>
+          </p:cNvPr>
+          <p:cNvSpPr/>
+          <p:nvPr/>
+        </p:nvSpPr>
+        <p:spPr>
+          <a:xfrm>
+            <a:off x="11548872" y="502920"/>
+            <a:ext cx="45720" cy="45720"/>
+          </a:xfrm>
+          <a:prstGeom prst="ellipse">
+            <a:avLst/>
+          </a:prstGeom>
+          <a:solidFill>
+            <a:srgbClr val="22D3EE">
+              <a:alpha val="25000"/>
+            </a:srgbClr>
+          </a:solidFill>
+          <a:ln/>
+        </p:spPr>
+      </p:sp>
+      <p:sp>
+        <p:nvSpPr>
+          <p:cNvPr id="20" name="Shape 18">
+            <a:extLst>
+              <a:ext uri="{FF2B5EF4-FFF2-40B4-BE49-F238E27FC236}">
+                <a16:creationId xmlns:a16="http://schemas.microsoft.com/office/drawing/2014/main" id="{07CB9019-8E64-D873-DD96-6F8B7BD715A6}"/>
+              </a:ext>
+            </a:extLst>
+          </p:cNvPr>
+          <p:cNvSpPr/>
+          <p:nvPr/>
+        </p:nvSpPr>
+        <p:spPr>
+          <a:xfrm>
+            <a:off x="11548872" y="777240"/>
+            <a:ext cx="45720" cy="45720"/>
+          </a:xfrm>
+          <a:prstGeom prst="ellipse">
+            <a:avLst/>
+          </a:prstGeom>
+          <a:solidFill>
+            <a:srgbClr val="22D3EE">
+              <a:alpha val="25000"/>
+            </a:srgbClr>
+          </a:solidFill>
+          <a:ln/>
+        </p:spPr>
+      </p:sp>
+      <p:sp>
+        <p:nvSpPr>
+          <p:cNvPr id="21" name="Shape 19">
+            <a:extLst>
+              <a:ext uri="{FF2B5EF4-FFF2-40B4-BE49-F238E27FC236}">
+                <a16:creationId xmlns:a16="http://schemas.microsoft.com/office/drawing/2014/main" id="{E10DCAB5-F0E2-F945-635F-143905A6CE22}"/>
+              </a:ext>
+            </a:extLst>
+          </p:cNvPr>
+          <p:cNvSpPr/>
+          <p:nvPr/>
+        </p:nvSpPr>
+        <p:spPr>
+          <a:xfrm>
+            <a:off x="11548872" y="1051560"/>
+            <a:ext cx="45720" cy="45720"/>
+          </a:xfrm>
+          <a:prstGeom prst="ellipse">
+            <a:avLst/>
+          </a:prstGeom>
+          <a:solidFill>
+            <a:srgbClr val="22D3EE">
+              <a:alpha val="25000"/>
+            </a:srgbClr>
+          </a:solidFill>
+          <a:ln/>
+        </p:spPr>
+      </p:sp>
+      <p:sp>
+        <p:nvSpPr>
+          <p:cNvPr id="22" name="Shape 20">
+            <a:extLst>
+              <a:ext uri="{FF2B5EF4-FFF2-40B4-BE49-F238E27FC236}">
+                <a16:creationId xmlns:a16="http://schemas.microsoft.com/office/drawing/2014/main" id="{04D26ABE-4175-4B49-7EF8-6853E96B2BEC}"/>
+              </a:ext>
+            </a:extLst>
+          </p:cNvPr>
+          <p:cNvSpPr/>
+          <p:nvPr/>
+        </p:nvSpPr>
+        <p:spPr>
+          <a:xfrm>
+            <a:off x="11823192" y="228600"/>
+            <a:ext cx="45720" cy="45720"/>
+          </a:xfrm>
+          <a:prstGeom prst="ellipse">
+            <a:avLst/>
+          </a:prstGeom>
+          <a:solidFill>
+            <a:srgbClr val="22D3EE">
+              <a:alpha val="25000"/>
+            </a:srgbClr>
+          </a:solidFill>
+          <a:ln/>
+        </p:spPr>
+      </p:sp>
+      <p:sp>
+        <p:nvSpPr>
+          <p:cNvPr id="23" name="Shape 21">
+            <a:extLst>
+              <a:ext uri="{FF2B5EF4-FFF2-40B4-BE49-F238E27FC236}">
+                <a16:creationId xmlns:a16="http://schemas.microsoft.com/office/drawing/2014/main" id="{D5CDFECD-4C16-88C4-918A-2B22FA86BB87}"/>
+              </a:ext>
+            </a:extLst>
+          </p:cNvPr>
+          <p:cNvSpPr/>
+          <p:nvPr/>
+        </p:nvSpPr>
+        <p:spPr>
+          <a:xfrm>
+            <a:off x="11823192" y="502920"/>
+            <a:ext cx="45720" cy="45720"/>
+          </a:xfrm>
+          <a:prstGeom prst="ellipse">
+            <a:avLst/>
+          </a:prstGeom>
+          <a:solidFill>
+            <a:srgbClr val="22D3EE">
+              <a:alpha val="25000"/>
+            </a:srgbClr>
+          </a:solidFill>
+          <a:ln/>
+        </p:spPr>
+      </p:sp>
+      <p:sp>
+        <p:nvSpPr>
+          <p:cNvPr id="24" name="Shape 22">
+            <a:extLst>
+              <a:ext uri="{FF2B5EF4-FFF2-40B4-BE49-F238E27FC236}">
+                <a16:creationId xmlns:a16="http://schemas.microsoft.com/office/drawing/2014/main" id="{C6238440-60EE-14BB-D898-3ACF97D121A3}"/>
+              </a:ext>
+            </a:extLst>
+          </p:cNvPr>
+          <p:cNvSpPr/>
+          <p:nvPr/>
+        </p:nvSpPr>
+        <p:spPr>
+          <a:xfrm>
+            <a:off x="11823192" y="777240"/>
+            <a:ext cx="45720" cy="45720"/>
+          </a:xfrm>
+          <a:prstGeom prst="ellipse">
+            <a:avLst/>
+          </a:prstGeom>
+          <a:solidFill>
+            <a:srgbClr val="22D3EE">
+              <a:alpha val="25000"/>
+            </a:srgbClr>
+          </a:solidFill>
+          <a:ln/>
+        </p:spPr>
+      </p:sp>
+      <p:sp>
+        <p:nvSpPr>
+          <p:cNvPr id="25" name="Shape 23">
+            <a:extLst>
+              <a:ext uri="{FF2B5EF4-FFF2-40B4-BE49-F238E27FC236}">
+                <a16:creationId xmlns:a16="http://schemas.microsoft.com/office/drawing/2014/main" id="{6B3FBD11-CAFC-E2FB-E8D8-A004E9D4FF71}"/>
+              </a:ext>
+            </a:extLst>
+          </p:cNvPr>
+          <p:cNvSpPr/>
+          <p:nvPr/>
+        </p:nvSpPr>
+        <p:spPr>
+          <a:xfrm>
+            <a:off x="11823192" y="1051560"/>
+            <a:ext cx="45720" cy="45720"/>
+          </a:xfrm>
+          <a:prstGeom prst="ellipse">
+            <a:avLst/>
+          </a:prstGeom>
+          <a:solidFill>
+            <a:srgbClr val="22D3EE">
+              <a:alpha val="25000"/>
+            </a:srgbClr>
+          </a:solidFill>
+          <a:ln/>
+        </p:spPr>
+      </p:sp>
+      <p:sp>
+        <p:nvSpPr>
+          <p:cNvPr id="26" name="Text 24">
+            <a:extLst>
+              <a:ext uri="{FF2B5EF4-FFF2-40B4-BE49-F238E27FC236}">
+                <a16:creationId xmlns:a16="http://schemas.microsoft.com/office/drawing/2014/main" id="{00F06FA5-4F28-E4FA-9FB9-920C72471298}"/>
+              </a:ext>
+            </a:extLst>
+          </p:cNvPr>
+          <p:cNvSpPr/>
+          <p:nvPr/>
+        </p:nvSpPr>
+        <p:spPr>
+          <a:xfrm>
+            <a:off x="640080" y="411480"/>
+            <a:ext cx="7315200" cy="365760"/>
+          </a:xfrm>
+          <a:prstGeom prst="rect">
+            <a:avLst/>
+          </a:prstGeom>
+          <a:noFill/>
+          <a:ln/>
+        </p:spPr>
+        <p:txBody>
+          <a:bodyPr wrap="square" lIns="0" tIns="0" rIns="0" bIns="0" rtlCol="0" anchor="ctr"/>
+          <a:lstStyle/>
+          <a:p>
+            <a:pPr marL="0" indent="0">
+              <a:buNone/>
+            </a:pPr>
+            <a:r>
+              <a:rPr lang="en-US" sz="1300" b="1" kern="0" spc="300" dirty="0">
+                <a:solidFill>
+                  <a:srgbClr val="22D3EE"/>
+                </a:solidFill>
+                <a:latin typeface="Courier New" pitchFamily="34" charset="0"/>
+                <a:ea typeface="Courier New" pitchFamily="34" charset="-122"/>
+                <a:cs typeface="Courier New" pitchFamily="34" charset="-120"/>
+              </a:rPr>
+              <a:t>EVALUATE // Reflection</a:t>
+            </a:r>
+            <a:endParaRPr lang="en-US" sz="1300" dirty="0"/>
+          </a:p>
+        </p:txBody>
+      </p:sp>
+      <p:sp>
+        <p:nvSpPr>
+          <p:cNvPr id="27" name="Text 25">
+            <a:extLst>
+              <a:ext uri="{FF2B5EF4-FFF2-40B4-BE49-F238E27FC236}">
+                <a16:creationId xmlns:a16="http://schemas.microsoft.com/office/drawing/2014/main" id="{7C632A4B-53AC-BD81-BE87-2705D868B664}"/>
+              </a:ext>
+            </a:extLst>
+          </p:cNvPr>
+          <p:cNvSpPr/>
+          <p:nvPr/>
+        </p:nvSpPr>
+        <p:spPr>
+          <a:xfrm>
+            <a:off x="640080" y="777240"/>
+            <a:ext cx="10908792" cy="822960"/>
+          </a:xfrm>
+          <a:prstGeom prst="rect">
+            <a:avLst/>
+          </a:prstGeom>
+          <a:noFill/>
+          <a:ln/>
+        </p:spPr>
+        <p:txBody>
+          <a:bodyPr wrap="square" lIns="0" tIns="0" rIns="0" bIns="0" rtlCol="0" anchor="ctr"/>
+          <a:lstStyle/>
+          <a:p>
+            <a:pPr marL="0" indent="0">
+              <a:buNone/>
+            </a:pPr>
+            <a:r>
+              <a:rPr lang="th-TH" sz="3400" b="1" dirty="0">
+                <a:solidFill>
+                  <a:srgbClr val="F1F5F9"/>
+                </a:solidFill>
+                <a:latin typeface="TH Sarabun New" pitchFamily="34" charset="0"/>
+                <a:ea typeface="TH Sarabun New" pitchFamily="34" charset="-122"/>
+                <a:cs typeface="TH Sarabun New" pitchFamily="34" charset="-120"/>
+              </a:rPr>
+              <a:t>สะท้อนคิด (</a:t>
+            </a:r>
+            <a:r>
+              <a:rPr lang="en-US" sz="3400" b="1" dirty="0">
+                <a:solidFill>
+                  <a:srgbClr val="F1F5F9"/>
+                </a:solidFill>
+                <a:latin typeface="TH Sarabun New" pitchFamily="34" charset="0"/>
+                <a:ea typeface="TH Sarabun New" pitchFamily="34" charset="-122"/>
+                <a:cs typeface="TH Sarabun New" pitchFamily="34" charset="-120"/>
+              </a:rPr>
+              <a:t>Reflection) </a:t>
+            </a:r>
+            <a:r>
+              <a:rPr lang="th-TH" sz="3400" b="1" dirty="0">
+                <a:solidFill>
+                  <a:srgbClr val="F1F5F9"/>
+                </a:solidFill>
+                <a:latin typeface="TH Sarabun New" pitchFamily="34" charset="0"/>
+                <a:ea typeface="TH Sarabun New" pitchFamily="34" charset="-122"/>
+                <a:cs typeface="TH Sarabun New" pitchFamily="34" charset="-120"/>
+              </a:rPr>
+              <a:t>เป็นรายบุคคล </a:t>
+            </a:r>
+            <a:r>
+              <a:rPr lang="en-US" sz="3400" b="1" dirty="0">
+                <a:solidFill>
+                  <a:srgbClr val="F1F5F9"/>
+                </a:solidFill>
+                <a:latin typeface="TH Sarabun New" pitchFamily="34" charset="0"/>
+                <a:ea typeface="TH Sarabun New" pitchFamily="34" charset="-122"/>
+                <a:cs typeface="TH Sarabun New" pitchFamily="34" charset="-120"/>
+              </a:rPr>
+              <a:t>(กระดานระดมความคิด)</a:t>
+            </a:r>
+            <a:endParaRPr lang="en-US" sz="3400" dirty="0"/>
+          </a:p>
+        </p:txBody>
+      </p:sp>
+      <p:sp>
+        <p:nvSpPr>
+          <p:cNvPr id="28" name="Shape 26">
+            <a:extLst>
+              <a:ext uri="{FF2B5EF4-FFF2-40B4-BE49-F238E27FC236}">
+                <a16:creationId xmlns:a16="http://schemas.microsoft.com/office/drawing/2014/main" id="{3F79E560-563E-7812-1301-AEF49648B692}"/>
+              </a:ext>
+            </a:extLst>
+          </p:cNvPr>
+          <p:cNvSpPr/>
+          <p:nvPr/>
+        </p:nvSpPr>
+        <p:spPr>
+          <a:xfrm>
+            <a:off x="2560320" y="1988820"/>
+            <a:ext cx="3429000" cy="3291840"/>
+          </a:xfrm>
+          <a:prstGeom prst="roundRect">
+            <a:avLst>
+              <a:gd name="adj" fmla="val 2500"/>
+            </a:avLst>
+          </a:prstGeom>
+          <a:solidFill>
+            <a:srgbClr val="141C33"/>
+          </a:solidFill>
+          <a:ln w="12700">
+            <a:solidFill>
+              <a:srgbClr val="2A3550"/>
+            </a:solidFill>
+            <a:prstDash val="solid"/>
+          </a:ln>
+          <a:effectLst>
+            <a:outerShdw blurRad="127000" dist="38100" dir="5400000" algn="bl" rotWithShape="0">
+              <a:srgbClr val="000000">
+                <a:alpha val="35000"/>
+              </a:srgbClr>
+            </a:outerShdw>
+          </a:effectLst>
+        </p:spPr>
+      </p:sp>
+      <p:sp>
+        <p:nvSpPr>
+          <p:cNvPr id="29" name="Text 27">
+            <a:extLst>
+              <a:ext uri="{FF2B5EF4-FFF2-40B4-BE49-F238E27FC236}">
+                <a16:creationId xmlns:a16="http://schemas.microsoft.com/office/drawing/2014/main" id="{80E9EF52-BE56-8520-8482-A0B0423EA6BB}"/>
+              </a:ext>
+            </a:extLst>
+          </p:cNvPr>
+          <p:cNvSpPr/>
+          <p:nvPr/>
+        </p:nvSpPr>
+        <p:spPr>
+          <a:xfrm>
+            <a:off x="2880360" y="2263140"/>
+            <a:ext cx="2743200" cy="640080"/>
+          </a:xfrm>
+          <a:prstGeom prst="rect">
+            <a:avLst/>
+          </a:prstGeom>
+          <a:noFill/>
+          <a:ln/>
+        </p:spPr>
+        <p:txBody>
+          <a:bodyPr wrap="square" lIns="0" tIns="0" rIns="0" bIns="0" rtlCol="0" anchor="ctr"/>
+          <a:lstStyle/>
+          <a:p>
+            <a:pPr marL="0" indent="0">
+              <a:buNone/>
+            </a:pPr>
+            <a:r>
+              <a:rPr lang="en-US" sz="3000" b="1" dirty="0">
+                <a:solidFill>
+                  <a:srgbClr val="22D3EE"/>
+                </a:solidFill>
+                <a:latin typeface="Courier New" pitchFamily="34" charset="0"/>
+                <a:ea typeface="Courier New" pitchFamily="34" charset="-122"/>
+                <a:cs typeface="Courier New" pitchFamily="34" charset="-120"/>
+              </a:rPr>
+              <a:t>Q1</a:t>
+            </a:r>
+            <a:endParaRPr lang="en-US" sz="3000" dirty="0"/>
+          </a:p>
+        </p:txBody>
+      </p:sp>
+      <p:sp>
+        <p:nvSpPr>
+          <p:cNvPr id="30" name="Text 28">
+            <a:extLst>
+              <a:ext uri="{FF2B5EF4-FFF2-40B4-BE49-F238E27FC236}">
+                <a16:creationId xmlns:a16="http://schemas.microsoft.com/office/drawing/2014/main" id="{FC7F5014-247C-0B5C-E401-7017562A769A}"/>
+              </a:ext>
+            </a:extLst>
+          </p:cNvPr>
+          <p:cNvSpPr/>
+          <p:nvPr/>
+        </p:nvSpPr>
+        <p:spPr>
+          <a:xfrm>
+            <a:off x="2880360" y="3086100"/>
+            <a:ext cx="2788920" cy="1828800"/>
+          </a:xfrm>
+          <a:prstGeom prst="rect">
+            <a:avLst/>
+          </a:prstGeom>
+          <a:noFill/>
+          <a:ln/>
+        </p:spPr>
+        <p:txBody>
+          <a:bodyPr wrap="square" lIns="0" tIns="0" rIns="0" bIns="0" rtlCol="0" anchor="t"/>
+          <a:lstStyle/>
+          <a:p>
+            <a:pPr marL="0" indent="0">
+              <a:buNone/>
+            </a:pPr>
+            <a:r>
+              <a:rPr lang="th-TH" sz="2000" dirty="0">
+                <a:solidFill>
+                  <a:srgbClr val="F1F5F9"/>
+                </a:solidFill>
+                <a:latin typeface="TH Sarabun New" pitchFamily="34" charset="0"/>
+                <a:ea typeface="TH Sarabun New" pitchFamily="34" charset="-122"/>
+                <a:cs typeface="TH Sarabun New" pitchFamily="34" charset="-120"/>
+              </a:rPr>
+              <a:t>วันนี้ฉันเรียนรู้ว่า...” </a:t>
+            </a:r>
+            <a:endParaRPr lang="en-US" sz="2000" dirty="0"/>
+          </a:p>
+        </p:txBody>
+      </p:sp>
+      <p:sp>
+        <p:nvSpPr>
+          <p:cNvPr id="31" name="Shape 29">
+            <a:extLst>
+              <a:ext uri="{FF2B5EF4-FFF2-40B4-BE49-F238E27FC236}">
+                <a16:creationId xmlns:a16="http://schemas.microsoft.com/office/drawing/2014/main" id="{FE684A1F-3BC8-2AF1-F986-A5A8D40A5036}"/>
+              </a:ext>
+            </a:extLst>
+          </p:cNvPr>
+          <p:cNvSpPr/>
+          <p:nvPr/>
+        </p:nvSpPr>
+        <p:spPr>
+          <a:xfrm>
+            <a:off x="6263640" y="1988820"/>
+            <a:ext cx="3429000" cy="3291840"/>
+          </a:xfrm>
+          <a:prstGeom prst="roundRect">
+            <a:avLst>
+              <a:gd name="adj" fmla="val 2500"/>
+            </a:avLst>
+          </a:prstGeom>
+          <a:solidFill>
+            <a:srgbClr val="141C33"/>
+          </a:solidFill>
+          <a:ln w="12700">
+            <a:solidFill>
+              <a:srgbClr val="2A3550"/>
+            </a:solidFill>
+            <a:prstDash val="solid"/>
+          </a:ln>
+          <a:effectLst>
+            <a:outerShdw blurRad="127000" dist="38100" dir="5400000" algn="bl" rotWithShape="0">
+              <a:srgbClr val="000000">
+                <a:alpha val="35000"/>
+              </a:srgbClr>
+            </a:outerShdw>
+          </a:effectLst>
+        </p:spPr>
+      </p:sp>
+      <p:sp>
+        <p:nvSpPr>
+          <p:cNvPr id="32" name="Text 30">
+            <a:extLst>
+              <a:ext uri="{FF2B5EF4-FFF2-40B4-BE49-F238E27FC236}">
+                <a16:creationId xmlns:a16="http://schemas.microsoft.com/office/drawing/2014/main" id="{2D83073F-5D65-E8E3-E6DD-800D986F8C8B}"/>
+              </a:ext>
+            </a:extLst>
+          </p:cNvPr>
+          <p:cNvSpPr/>
+          <p:nvPr/>
+        </p:nvSpPr>
+        <p:spPr>
+          <a:xfrm>
+            <a:off x="6583680" y="2263140"/>
+            <a:ext cx="2743200" cy="640080"/>
+          </a:xfrm>
+          <a:prstGeom prst="rect">
+            <a:avLst/>
+          </a:prstGeom>
+          <a:noFill/>
+          <a:ln/>
+        </p:spPr>
+        <p:txBody>
+          <a:bodyPr wrap="square" lIns="0" tIns="0" rIns="0" bIns="0" rtlCol="0" anchor="ctr"/>
+          <a:lstStyle/>
+          <a:p>
+            <a:pPr marL="0" indent="0">
+              <a:buNone/>
+            </a:pPr>
+            <a:r>
+              <a:rPr lang="en-US" sz="3000" b="1" dirty="0">
+                <a:solidFill>
+                  <a:srgbClr val="22D3EE"/>
+                </a:solidFill>
+                <a:latin typeface="Courier New" pitchFamily="34" charset="0"/>
+                <a:ea typeface="Courier New" pitchFamily="34" charset="-122"/>
+                <a:cs typeface="Courier New" pitchFamily="34" charset="-120"/>
+              </a:rPr>
+              <a:t>Q2</a:t>
+            </a:r>
+            <a:endParaRPr lang="en-US" sz="3000" dirty="0"/>
+          </a:p>
+        </p:txBody>
+      </p:sp>
+      <p:sp>
+        <p:nvSpPr>
+          <p:cNvPr id="33" name="Text 31">
+            <a:extLst>
+              <a:ext uri="{FF2B5EF4-FFF2-40B4-BE49-F238E27FC236}">
+                <a16:creationId xmlns:a16="http://schemas.microsoft.com/office/drawing/2014/main" id="{38870BCA-4757-EA7A-E94A-BBF06206036F}"/>
+              </a:ext>
+            </a:extLst>
+          </p:cNvPr>
+          <p:cNvSpPr/>
+          <p:nvPr/>
+        </p:nvSpPr>
+        <p:spPr>
+          <a:xfrm>
+            <a:off x="6583680" y="3086100"/>
+            <a:ext cx="2788920" cy="1828800"/>
+          </a:xfrm>
+          <a:prstGeom prst="rect">
+            <a:avLst/>
+          </a:prstGeom>
+          <a:noFill/>
+          <a:ln/>
+        </p:spPr>
+        <p:txBody>
+          <a:bodyPr wrap="square" lIns="0" tIns="0" rIns="0" bIns="0" rtlCol="0" anchor="t"/>
+          <a:lstStyle/>
+          <a:p>
+            <a:pPr marL="0" indent="0">
+              <a:buNone/>
+            </a:pPr>
+            <a:r>
+              <a:rPr lang="th-TH" sz="2000" dirty="0">
+                <a:solidFill>
+                  <a:srgbClr val="F1F5F9"/>
+                </a:solidFill>
+                <a:latin typeface="TH Sarabun New" pitchFamily="34" charset="0"/>
+                <a:ea typeface="TH Sarabun New" pitchFamily="34" charset="-122"/>
+                <a:cs typeface="TH Sarabun New" pitchFamily="34" charset="-120"/>
+              </a:rPr>
+              <a:t>ฉันจะนำการใช้เหตุผลเชิงตรรกะไปใช้ตอน...</a:t>
+            </a:r>
+            <a:endParaRPr lang="en-US" sz="2000" dirty="0"/>
+          </a:p>
+        </p:txBody>
+      </p:sp>
+      <p:sp>
+        <p:nvSpPr>
+          <p:cNvPr id="37" name="Text 35">
+            <a:extLst>
+              <a:ext uri="{FF2B5EF4-FFF2-40B4-BE49-F238E27FC236}">
+                <a16:creationId xmlns:a16="http://schemas.microsoft.com/office/drawing/2014/main" id="{1A792FB5-B0A4-15A2-CD41-9F48983A9364}"/>
+              </a:ext>
+            </a:extLst>
+          </p:cNvPr>
+          <p:cNvSpPr/>
+          <p:nvPr/>
+        </p:nvSpPr>
+        <p:spPr>
+          <a:xfrm>
+            <a:off x="640080" y="5669280"/>
+            <a:ext cx="10908792" cy="457200"/>
+          </a:xfrm>
+          <a:prstGeom prst="rect">
+            <a:avLst/>
+          </a:prstGeom>
+          <a:noFill/>
+          <a:ln/>
+        </p:spPr>
+        <p:txBody>
+          <a:bodyPr wrap="square" lIns="0" tIns="0" rIns="0" bIns="0" rtlCol="0" anchor="ctr"/>
+          <a:lstStyle/>
+          <a:p>
+            <a:pPr marL="0" indent="0" algn="ctr">
+              <a:buNone/>
+            </a:pPr>
+            <a:r>
+              <a:rPr lang="en-US" sz="1700" dirty="0">
+                <a:solidFill>
+                  <a:srgbClr val="94A3B8"/>
+                </a:solidFill>
+                <a:latin typeface="TH Sarabun New" pitchFamily="34" charset="0"/>
+                <a:ea typeface="TH Sarabun New" pitchFamily="34" charset="-122"/>
+                <a:cs typeface="TH Sarabun New" pitchFamily="34" charset="-120"/>
+              </a:rPr>
+              <a:t>ตั้งค่า “เห็นเฉพาะโพสต์ของตนเอง” — ตอบอิสระ ครูอ่านประเมินรายคน</a:t>
+            </a:r>
+            <a:endParaRPr lang="en-US" sz="1700" dirty="0"/>
+          </a:p>
+        </p:txBody>
+      </p:sp>
+    </p:spTree>
+    <p:extLst>
+      <p:ext uri="{BB962C8B-B14F-4D97-AF65-F5344CB8AC3E}">
+        <p14:creationId xmlns:p14="http://schemas.microsoft.com/office/powerpoint/2010/main" val="777723010"/>
+      </p:ext>
+    </p:extLst>
+  </p:cSld>
+  <p:clrMapOvr>
+    <a:masterClrMapping/>
+  </p:clrMapOvr>
+  <mc:AlternateContent xmlns:mc="http://schemas.openxmlformats.org/markup-compatibility/2006">
+    <mc:Choice xmlns:p159="http://schemas.microsoft.com/office/powerpoint/2015/09/main" Requires="p159">
+      <p:transition xmlns:p14="http://schemas.microsoft.com/office/powerpoint/2010/main" spd="slow" p14:dur="2000">
+        <p159:morph option="byObject"/>
+      </p:transition>
+    </mc:Choice>
+    <mc:Fallback>
+      <p:transition spd="slow">
+        <p:fade/>
+      </p:transition>
+    </mc:Fallback>
+  </mc:AlternateContent>
+</p:sld>
+</file>
+
+<file path=ppt/slides/slide12.xml><?xml version="1.0" encoding="utf-8"?>
+<p:sld xmlns:a="http://schemas.openxmlformats.org/drawingml/2006/main" xmlns:r="http://schemas.openxmlformats.org/officeDocument/2006/relationships" xmlns:p="http://schemas.openxmlformats.org/presentationml/2006/main">
+  <p:cSld name="Slide 10">
+    <p:bg>
+      <p:bgPr>
+        <a:solidFill>
+          <a:srgbClr val="0B1020"/>
+        </a:solidFill>
+        <a:effectLst/>
+      </p:bgPr>
+    </p:bg>
+    <p:spTree>
+      <p:nvGrpSpPr>
+        <p:cNvPr id="1" name=""/>
+        <p:cNvGrpSpPr/>
+        <p:nvPr/>
+      </p:nvGrpSpPr>
+      <p:grpSpPr>
+        <a:xfrm>
+          <a:off x="0" y="0"/>
+          <a:ext cx="0" cy="0"/>
+          <a:chOff x="0" y="0"/>
+          <a:chExt cx="0" cy="0"/>
+        </a:xfrm>
+      </p:grpSpPr>
+      <p:sp>
+        <p:nvSpPr>
+          <p:cNvPr id="2" name="Shape 0"/>
+          <p:cNvSpPr/>
+          <p:nvPr/>
+        </p:nvSpPr>
+        <p:spPr>
+          <a:xfrm>
+            <a:off x="10451592" y="228600"/>
+            <a:ext cx="45720" cy="45720"/>
+          </a:xfrm>
+          <a:prstGeom prst="ellipse">
+            <a:avLst/>
+          </a:prstGeom>
+          <a:solidFill>
+            <a:srgbClr val="22D3EE">
+              <a:alpha val="25000"/>
+            </a:srgbClr>
+          </a:solidFill>
+          <a:ln/>
+        </p:spPr>
+      </p:sp>
+      <p:sp>
+        <p:nvSpPr>
+          <p:cNvPr id="3" name="Shape 1"/>
+          <p:cNvSpPr/>
+          <p:nvPr/>
+        </p:nvSpPr>
+        <p:spPr>
+          <a:xfrm>
+            <a:off x="10451592" y="502920"/>
+            <a:ext cx="45720" cy="45720"/>
+          </a:xfrm>
+          <a:prstGeom prst="ellipse">
+            <a:avLst/>
+          </a:prstGeom>
+          <a:solidFill>
+            <a:srgbClr val="22D3EE">
+              <a:alpha val="25000"/>
+            </a:srgbClr>
+          </a:solidFill>
+          <a:ln/>
+        </p:spPr>
+      </p:sp>
+      <p:sp>
+        <p:nvSpPr>
+          <p:cNvPr id="4" name="Shape 2"/>
+          <p:cNvSpPr/>
+          <p:nvPr/>
+        </p:nvSpPr>
+        <p:spPr>
+          <a:xfrm>
+            <a:off x="10451592" y="777240"/>
+            <a:ext cx="45720" cy="45720"/>
+          </a:xfrm>
+          <a:prstGeom prst="ellipse">
+            <a:avLst/>
+          </a:prstGeom>
+          <a:solidFill>
+            <a:srgbClr val="22D3EE">
+              <a:alpha val="25000"/>
+            </a:srgbClr>
+          </a:solidFill>
+          <a:ln/>
+        </p:spPr>
+      </p:sp>
+      <p:sp>
+        <p:nvSpPr>
+          <p:cNvPr id="5" name="Shape 3"/>
+          <p:cNvSpPr/>
+          <p:nvPr/>
+        </p:nvSpPr>
+        <p:spPr>
+          <a:xfrm>
+            <a:off x="10451592" y="1051560"/>
+            <a:ext cx="45720" cy="45720"/>
+          </a:xfrm>
+          <a:prstGeom prst="ellipse">
+            <a:avLst/>
+          </a:prstGeom>
+          <a:solidFill>
+            <a:srgbClr val="22D3EE">
+              <a:alpha val="25000"/>
+            </a:srgbClr>
+          </a:solidFill>
+          <a:ln/>
+        </p:spPr>
+      </p:sp>
+      <p:sp>
+        <p:nvSpPr>
+          <p:cNvPr id="6" name="Shape 4"/>
+          <p:cNvSpPr/>
+          <p:nvPr/>
+        </p:nvSpPr>
+        <p:spPr>
+          <a:xfrm>
+            <a:off x="10725912" y="228600"/>
+            <a:ext cx="45720" cy="45720"/>
+          </a:xfrm>
+          <a:prstGeom prst="ellipse">
+            <a:avLst/>
+          </a:prstGeom>
+          <a:solidFill>
+            <a:srgbClr val="22D3EE">
+              <a:alpha val="25000"/>
+            </a:srgbClr>
+          </a:solidFill>
+          <a:ln/>
+        </p:spPr>
+      </p:sp>
+      <p:sp>
+        <p:nvSpPr>
+          <p:cNvPr id="7" name="Shape 5"/>
+          <p:cNvSpPr/>
+          <p:nvPr/>
+        </p:nvSpPr>
+        <p:spPr>
+          <a:xfrm>
+            <a:off x="10725912" y="502920"/>
+            <a:ext cx="45720" cy="45720"/>
+          </a:xfrm>
+          <a:prstGeom prst="ellipse">
+            <a:avLst/>
+          </a:prstGeom>
+          <a:solidFill>
+            <a:srgbClr val="22D3EE">
+              <a:alpha val="25000"/>
+            </a:srgbClr>
+          </a:solidFill>
+          <a:ln/>
+        </p:spPr>
+      </p:sp>
+      <p:sp>
+        <p:nvSpPr>
+          <p:cNvPr id="8" name="Shape 6"/>
+          <p:cNvSpPr/>
+          <p:nvPr/>
+        </p:nvSpPr>
+        <p:spPr>
+          <a:xfrm>
+            <a:off x="10725912" y="777240"/>
+            <a:ext cx="45720" cy="45720"/>
+          </a:xfrm>
+          <a:prstGeom prst="ellipse">
+            <a:avLst/>
+          </a:prstGeom>
+          <a:solidFill>
+            <a:srgbClr val="22D3EE">
+              <a:alpha val="25000"/>
+            </a:srgbClr>
+          </a:solidFill>
+          <a:ln/>
+        </p:spPr>
+      </p:sp>
+      <p:sp>
+        <p:nvSpPr>
+          <p:cNvPr id="9" name="Shape 7"/>
+          <p:cNvSpPr/>
+          <p:nvPr/>
+        </p:nvSpPr>
+        <p:spPr>
+          <a:xfrm>
+            <a:off x="10725912" y="1051560"/>
+            <a:ext cx="45720" cy="45720"/>
+          </a:xfrm>
+          <a:prstGeom prst="ellipse">
+            <a:avLst/>
+          </a:prstGeom>
+          <a:solidFill>
+            <a:srgbClr val="22D3EE">
+              <a:alpha val="25000"/>
+            </a:srgbClr>
+          </a:solidFill>
+          <a:ln/>
+        </p:spPr>
+      </p:sp>
+      <p:sp>
+        <p:nvSpPr>
+          <p:cNvPr id="10" name="Shape 8"/>
+          <p:cNvSpPr/>
+          <p:nvPr/>
+        </p:nvSpPr>
+        <p:spPr>
+          <a:xfrm>
+            <a:off x="11000232" y="228600"/>
+            <a:ext cx="45720" cy="45720"/>
+          </a:xfrm>
+          <a:prstGeom prst="ellipse">
+            <a:avLst/>
+          </a:prstGeom>
+          <a:solidFill>
+            <a:srgbClr val="22D3EE">
+              <a:alpha val="25000"/>
+            </a:srgbClr>
+          </a:solidFill>
+          <a:ln/>
+        </p:spPr>
+      </p:sp>
+      <p:sp>
+        <p:nvSpPr>
+          <p:cNvPr id="11" name="Shape 9"/>
+          <p:cNvSpPr/>
+          <p:nvPr/>
+        </p:nvSpPr>
+        <p:spPr>
+          <a:xfrm>
+            <a:off x="11000232" y="502920"/>
+            <a:ext cx="45720" cy="45720"/>
+          </a:xfrm>
+          <a:prstGeom prst="ellipse">
+            <a:avLst/>
+          </a:prstGeom>
+          <a:solidFill>
+            <a:srgbClr val="22D3EE">
+              <a:alpha val="25000"/>
+            </a:srgbClr>
+          </a:solidFill>
+          <a:ln/>
+        </p:spPr>
+      </p:sp>
+      <p:sp>
+        <p:nvSpPr>
+          <p:cNvPr id="12" name="Shape 10"/>
+          <p:cNvSpPr/>
+          <p:nvPr/>
+        </p:nvSpPr>
+        <p:spPr>
+          <a:xfrm>
+            <a:off x="11000232" y="777240"/>
+            <a:ext cx="45720" cy="45720"/>
+          </a:xfrm>
+          <a:prstGeom prst="ellipse">
+            <a:avLst/>
+          </a:prstGeom>
+          <a:solidFill>
+            <a:srgbClr val="22D3EE">
+              <a:alpha val="25000"/>
+            </a:srgbClr>
+          </a:solidFill>
+          <a:ln/>
+        </p:spPr>
+      </p:sp>
+      <p:sp>
+        <p:nvSpPr>
+          <p:cNvPr id="13" name="Shape 11"/>
+          <p:cNvSpPr/>
+          <p:nvPr/>
+        </p:nvSpPr>
+        <p:spPr>
+          <a:xfrm>
+            <a:off x="11000232" y="1051560"/>
+            <a:ext cx="45720" cy="45720"/>
+          </a:xfrm>
+          <a:prstGeom prst="ellipse">
+            <a:avLst/>
+          </a:prstGeom>
+          <a:solidFill>
+            <a:srgbClr val="22D3EE">
+              <a:alpha val="25000"/>
+            </a:srgbClr>
+          </a:solidFill>
+          <a:ln/>
+        </p:spPr>
+      </p:sp>
+      <p:sp>
+        <p:nvSpPr>
+          <p:cNvPr id="14" name="Shape 12"/>
+          <p:cNvSpPr/>
+          <p:nvPr/>
+        </p:nvSpPr>
+        <p:spPr>
+          <a:xfrm>
+            <a:off x="11274552" y="228600"/>
+            <a:ext cx="45720" cy="45720"/>
+          </a:xfrm>
+          <a:prstGeom prst="ellipse">
+            <a:avLst/>
+          </a:prstGeom>
+          <a:solidFill>
+            <a:srgbClr val="22D3EE">
+              <a:alpha val="25000"/>
+            </a:srgbClr>
+          </a:solidFill>
+          <a:ln/>
+        </p:spPr>
+      </p:sp>
+      <p:sp>
+        <p:nvSpPr>
+          <p:cNvPr id="15" name="Shape 13"/>
+          <p:cNvSpPr/>
+          <p:nvPr/>
+        </p:nvSpPr>
+        <p:spPr>
+          <a:xfrm>
+            <a:off x="11274552" y="502920"/>
+            <a:ext cx="45720" cy="45720"/>
+          </a:xfrm>
+          <a:prstGeom prst="ellipse">
+            <a:avLst/>
+          </a:prstGeom>
+          <a:solidFill>
+            <a:srgbClr val="22D3EE">
+              <a:alpha val="25000"/>
+            </a:srgbClr>
+          </a:solidFill>
+          <a:ln/>
+        </p:spPr>
+      </p:sp>
+      <p:sp>
+        <p:nvSpPr>
+          <p:cNvPr id="16" name="Shape 14"/>
+          <p:cNvSpPr/>
+          <p:nvPr/>
+        </p:nvSpPr>
+        <p:spPr>
+          <a:xfrm>
+            <a:off x="11274552" y="777240"/>
+            <a:ext cx="45720" cy="45720"/>
+          </a:xfrm>
+          <a:prstGeom prst="ellipse">
+            <a:avLst/>
+          </a:prstGeom>
+          <a:solidFill>
+            <a:srgbClr val="22D3EE">
+              <a:alpha val="25000"/>
+            </a:srgbClr>
+          </a:solidFill>
+          <a:ln/>
+        </p:spPr>
+      </p:sp>
+      <p:sp>
+        <p:nvSpPr>
+          <p:cNvPr id="17" name="Shape 15"/>
+          <p:cNvSpPr/>
+          <p:nvPr/>
+        </p:nvSpPr>
+        <p:spPr>
+          <a:xfrm>
+            <a:off x="11274552" y="1051560"/>
+            <a:ext cx="45720" cy="45720"/>
+          </a:xfrm>
+          <a:prstGeom prst="ellipse">
+            <a:avLst/>
+          </a:prstGeom>
+          <a:solidFill>
+            <a:srgbClr val="22D3EE">
+              <a:alpha val="25000"/>
+            </a:srgbClr>
+          </a:solidFill>
+          <a:ln/>
+        </p:spPr>
+      </p:sp>
+      <p:sp>
+        <p:nvSpPr>
+          <p:cNvPr id="18" name="Shape 16"/>
+          <p:cNvSpPr/>
+          <p:nvPr/>
+        </p:nvSpPr>
+        <p:spPr>
+          <a:xfrm>
+            <a:off x="11548872" y="228600"/>
+            <a:ext cx="45720" cy="45720"/>
+          </a:xfrm>
+          <a:prstGeom prst="ellipse">
+            <a:avLst/>
+          </a:prstGeom>
+          <a:solidFill>
+            <a:srgbClr val="22D3EE">
+              <a:alpha val="25000"/>
+            </a:srgbClr>
+          </a:solidFill>
+          <a:ln/>
+        </p:spPr>
+      </p:sp>
+      <p:sp>
+        <p:nvSpPr>
+          <p:cNvPr id="19" name="Shape 17"/>
+          <p:cNvSpPr/>
+          <p:nvPr/>
+        </p:nvSpPr>
+        <p:spPr>
+          <a:xfrm>
+            <a:off x="11548872" y="502920"/>
+            <a:ext cx="45720" cy="45720"/>
+          </a:xfrm>
+          <a:prstGeom prst="ellipse">
+            <a:avLst/>
+          </a:prstGeom>
+          <a:solidFill>
+            <a:srgbClr val="22D3EE">
+              <a:alpha val="25000"/>
+            </a:srgbClr>
+          </a:solidFill>
+          <a:ln/>
+        </p:spPr>
+      </p:sp>
+      <p:sp>
+        <p:nvSpPr>
+          <p:cNvPr id="20" name="Shape 18"/>
+          <p:cNvSpPr/>
+          <p:nvPr/>
+        </p:nvSpPr>
+        <p:spPr>
+          <a:xfrm>
+            <a:off x="11548872" y="777240"/>
+            <a:ext cx="45720" cy="45720"/>
+          </a:xfrm>
+          <a:prstGeom prst="ellipse">
+            <a:avLst/>
+          </a:prstGeom>
+          <a:solidFill>
+            <a:srgbClr val="22D3EE">
+              <a:alpha val="25000"/>
+            </a:srgbClr>
+          </a:solidFill>
+          <a:ln/>
+        </p:spPr>
+      </p:sp>
+      <p:sp>
+        <p:nvSpPr>
+          <p:cNvPr id="21" name="Shape 19"/>
+          <p:cNvSpPr/>
+          <p:nvPr/>
+        </p:nvSpPr>
+        <p:spPr>
+          <a:xfrm>
+            <a:off x="11548872" y="1051560"/>
+            <a:ext cx="45720" cy="45720"/>
+          </a:xfrm>
+          <a:prstGeom prst="ellipse">
+            <a:avLst/>
+          </a:prstGeom>
+          <a:solidFill>
+            <a:srgbClr val="22D3EE">
+              <a:alpha val="25000"/>
+            </a:srgbClr>
+          </a:solidFill>
+          <a:ln/>
+        </p:spPr>
+      </p:sp>
+      <p:sp>
+        <p:nvSpPr>
+          <p:cNvPr id="22" name="Shape 20"/>
+          <p:cNvSpPr/>
+          <p:nvPr/>
+        </p:nvSpPr>
+        <p:spPr>
+          <a:xfrm>
+            <a:off x="11823192" y="228600"/>
+            <a:ext cx="45720" cy="45720"/>
+          </a:xfrm>
+          <a:prstGeom prst="ellipse">
+            <a:avLst/>
+          </a:prstGeom>
+          <a:solidFill>
+            <a:srgbClr val="22D3EE">
+              <a:alpha val="25000"/>
+            </a:srgbClr>
+          </a:solidFill>
+          <a:ln/>
+        </p:spPr>
+      </p:sp>
+      <p:sp>
+        <p:nvSpPr>
+          <p:cNvPr id="23" name="Shape 21"/>
+          <p:cNvSpPr/>
+          <p:nvPr/>
+        </p:nvSpPr>
+        <p:spPr>
+          <a:xfrm>
+            <a:off x="11823192" y="502920"/>
+            <a:ext cx="45720" cy="45720"/>
+          </a:xfrm>
+          <a:prstGeom prst="ellipse">
+            <a:avLst/>
+          </a:prstGeom>
+          <a:solidFill>
+            <a:srgbClr val="22D3EE">
+              <a:alpha val="25000"/>
+            </a:srgbClr>
+          </a:solidFill>
+          <a:ln/>
+        </p:spPr>
+      </p:sp>
+      <p:sp>
+        <p:nvSpPr>
+          <p:cNvPr id="24" name="Shape 22"/>
+          <p:cNvSpPr/>
+          <p:nvPr/>
+        </p:nvSpPr>
+        <p:spPr>
+          <a:xfrm>
+            <a:off x="11823192" y="777240"/>
+            <a:ext cx="45720" cy="45720"/>
+          </a:xfrm>
+          <a:prstGeom prst="ellipse">
+            <a:avLst/>
+          </a:prstGeom>
+          <a:solidFill>
+            <a:srgbClr val="22D3EE">
+              <a:alpha val="25000"/>
+            </a:srgbClr>
+          </a:solidFill>
+          <a:ln/>
+        </p:spPr>
+      </p:sp>
+      <p:sp>
+        <p:nvSpPr>
+          <p:cNvPr id="25" name="Shape 23"/>
+          <p:cNvSpPr/>
+          <p:nvPr/>
+        </p:nvSpPr>
+        <p:spPr>
+          <a:xfrm>
+            <a:off x="11823192" y="1051560"/>
+            <a:ext cx="45720" cy="45720"/>
+          </a:xfrm>
+          <a:prstGeom prst="ellipse">
+            <a:avLst/>
+          </a:prstGeom>
+          <a:solidFill>
+            <a:srgbClr val="22D3EE">
+              <a:alpha val="25000"/>
+            </a:srgbClr>
+          </a:solidFill>
+          <a:ln/>
+        </p:spPr>
+      </p:sp>
+      <p:sp>
+        <p:nvSpPr>
+          <p:cNvPr id="26" name="Text 24"/>
+          <p:cNvSpPr/>
+          <p:nvPr/>
+        </p:nvSpPr>
+        <p:spPr>
+          <a:xfrm>
+            <a:off x="640080" y="411480"/>
+            <a:ext cx="7315200" cy="365760"/>
+          </a:xfrm>
+          <a:prstGeom prst="rect">
+            <a:avLst/>
+          </a:prstGeom>
+          <a:noFill/>
+          <a:ln/>
+        </p:spPr>
+        <p:txBody>
+          <a:bodyPr wrap="square" lIns="0" tIns="0" rIns="0" bIns="0" rtlCol="0" anchor="ctr"/>
+          <a:lstStyle/>
+          <a:p>
+            <a:pPr marL="0" indent="0">
+              <a:buNone/>
+            </a:pPr>
+            <a:r>
+              <a:rPr lang="en-US" sz="1300" b="1" kern="0" spc="300" dirty="0">
                 <a:solidFill>
                   <a:srgbClr val="22D3EE"/>
                 </a:solidFill>
@@ -3888,7 +6133,7 @@
           <a:bodyPr wrap="square" lIns="0" tIns="0" rIns="0" bIns="0" rtlCol="0" anchor="ctr"/>
           <a:lstStyle/>
           <a:p>
-            <a:pPr indent="0" marL="0">
+            <a:pPr marL="0" indent="0">
               <a:buNone/>
             </a:pPr>
             <a:r>
@@ -3932,7 +6177,7 @@
             <a:prstDash val="solid"/>
           </a:ln>
           <a:effectLst>
-            <a:outerShdw sx="100000" sy="100000" kx="0" ky="0" algn="bl" rotWithShape="0" blurRad="127000" dist="38100" dir="5400000">
+            <a:outerShdw blurRad="127000" dist="38100" dir="5400000" algn="bl" rotWithShape="0">
               <a:srgbClr val="000000">
                 <a:alpha val="35000"/>
               </a:srgbClr>
@@ -3961,7 +6206,7 @@
           <a:bodyPr wrap="square" lIns="0" tIns="0" rIns="0" bIns="0" rtlCol="0" anchor="ctr"/>
           <a:lstStyle/>
           <a:p>
-            <a:pPr indent="0" marL="0">
+            <a:pPr marL="0" indent="0">
               <a:buNone/>
             </a:pPr>
             <a:r>
@@ -4000,7 +6245,7 @@
           <a:bodyPr wrap="square" lIns="0" tIns="0" rIns="0" bIns="0" rtlCol="0" anchor="ctr"/>
           <a:lstStyle/>
           <a:p>
-            <a:pPr indent="0" marL="0">
+            <a:pPr marL="0" indent="0">
               <a:buNone/>
             </a:pPr>
             <a:r>
@@ -4044,7 +6289,7 @@
             <a:prstDash val="solid"/>
           </a:ln>
           <a:effectLst>
-            <a:outerShdw sx="100000" sy="100000" kx="0" ky="0" algn="bl" rotWithShape="0" blurRad="127000" dist="38100" dir="5400000">
+            <a:outerShdw blurRad="127000" dist="38100" dir="5400000" algn="bl" rotWithShape="0">
               <a:srgbClr val="000000">
                 <a:alpha val="35000"/>
               </a:srgbClr>
@@ -4071,7 +6316,7 @@
           </a:solidFill>
           <a:ln/>
           <a:effectLst>
-            <a:outerShdw sx="100000" sy="100000" kx="0" ky="0" algn="bl" rotWithShape="0" blurRad="177800" dist="50800" dir="16200000">
+            <a:outerShdw blurRad="177800" dist="50800" dir="16200000" algn="bl" rotWithShape="0">
               <a:srgbClr val="FBBF24">
                 <a:alpha val="50000"/>
               </a:srgbClr>
@@ -4100,7 +6345,7 @@
           <a:bodyPr wrap="square" lIns="0" tIns="0" rIns="0" bIns="0" rtlCol="0" anchor="ctr"/>
           <a:lstStyle/>
           <a:p>
-            <a:pPr indent="0" marL="0">
+            <a:pPr marL="0" indent="0">
               <a:buNone/>
             </a:pPr>
             <a:r>
@@ -4139,7 +6384,7 @@
           <a:bodyPr wrap="square" lIns="0" tIns="0" rIns="0" bIns="0" rtlCol="0" anchor="ctr"/>
           <a:lstStyle/>
           <a:p>
-            <a:pPr indent="0" marL="0">
+            <a:pPr marL="0" indent="0">
               <a:buNone/>
             </a:pPr>
             <a:r>
@@ -4183,7 +6428,7 @@
             <a:prstDash val="solid"/>
           </a:ln>
           <a:effectLst>
-            <a:outerShdw sx="100000" sy="100000" kx="0" ky="0" algn="bl" rotWithShape="0" blurRad="127000" dist="38100" dir="5400000">
+            <a:outerShdw blurRad="127000" dist="38100" dir="5400000" algn="bl" rotWithShape="0">
               <a:srgbClr val="000000">
                 <a:alpha val="35000"/>
               </a:srgbClr>
@@ -4210,7 +6455,7 @@
           </a:solidFill>
           <a:ln/>
           <a:effectLst>
-            <a:outerShdw sx="100000" sy="100000" kx="0" ky="0" algn="bl" rotWithShape="0" blurRad="177800" dist="50800" dir="16200000">
+            <a:outerShdw blurRad="177800" dist="50800" dir="16200000" algn="bl" rotWithShape="0">
               <a:srgbClr val="34D399">
                 <a:alpha val="50000"/>
               </a:srgbClr>
@@ -4239,7 +6484,7 @@
           <a:bodyPr wrap="square" lIns="0" tIns="0" rIns="0" bIns="0" rtlCol="0" anchor="ctr"/>
           <a:lstStyle/>
           <a:p>
-            <a:pPr indent="0" marL="0">
+            <a:pPr marL="0" indent="0">
               <a:buNone/>
             </a:pPr>
             <a:r>
@@ -4278,7 +6523,7 @@
           <a:bodyPr wrap="square" lIns="0" tIns="0" rIns="0" bIns="0" rtlCol="0" anchor="ctr"/>
           <a:lstStyle/>
           <a:p>
-            <a:pPr indent="0" marL="0">
+            <a:pPr marL="0" indent="0">
               <a:buNone/>
             </a:pPr>
             <a:r>
@@ -4322,7 +6567,7 @@
             <a:prstDash val="solid"/>
           </a:ln>
           <a:effectLst>
-            <a:outerShdw sx="100000" sy="100000" kx="0" ky="0" algn="bl" rotWithShape="0" blurRad="127000" dist="38100" dir="5400000">
+            <a:outerShdw blurRad="127000" dist="38100" dir="5400000" algn="bl" rotWithShape="0">
               <a:srgbClr val="000000">
                 <a:alpha val="35000"/>
               </a:srgbClr>
@@ -4349,7 +6594,7 @@
           </a:solidFill>
           <a:ln/>
           <a:effectLst>
-            <a:outerShdw sx="100000" sy="100000" kx="0" ky="0" algn="bl" rotWithShape="0" blurRad="177800" dist="50800" dir="16200000">
+            <a:outerShdw blurRad="177800" dist="50800" dir="16200000" algn="bl" rotWithShape="0">
               <a:srgbClr val="3B82F6">
                 <a:alpha val="50000"/>
               </a:srgbClr>
@@ -4378,7 +6623,7 @@
           <a:bodyPr wrap="square" lIns="0" tIns="0" rIns="0" bIns="0" rtlCol="0" anchor="ctr"/>
           <a:lstStyle/>
           <a:p>
-            <a:pPr indent="0" marL="0">
+            <a:pPr marL="0" indent="0">
               <a:buNone/>
             </a:pPr>
             <a:r>
@@ -4417,7 +6662,7 @@
           <a:bodyPr wrap="square" lIns="0" tIns="0" rIns="0" bIns="0" rtlCol="0" anchor="ctr"/>
           <a:lstStyle/>
           <a:p>
-            <a:pPr indent="0" marL="0">
+            <a:pPr marL="0" indent="0">
               <a:buNone/>
             </a:pPr>
             <a:r>
@@ -4440,6 +6685,18 @@
   <p:clrMapOvr>
     <a:masterClrMapping/>
   </p:clrMapOvr>
+  <mc:AlternateContent xmlns:mc="http://schemas.openxmlformats.org/markup-compatibility/2006">
+    <mc:Choice xmlns:p159="http://schemas.microsoft.com/office/powerpoint/2015/09/main" Requires="p159">
+      <p:transition xmlns:p14="http://schemas.microsoft.com/office/powerpoint/2010/main" spd="slow" p14:dur="2000">
+        <p159:morph option="byObject"/>
+      </p:transition>
+    </mc:Choice>
+    <mc:Fallback>
+      <p:transition spd="slow">
+        <p:fade/>
+      </p:transition>
+    </mc:Fallback>
+  </mc:AlternateContent>
 </p:sld>
 </file>
 
@@ -4451,6 +6708,7 @@
         <a:solidFill>
           <a:srgbClr val="0B1020"/>
         </a:solidFill>
+        <a:effectLst/>
       </p:bgPr>
     </p:bg>
     <p:spTree>
@@ -5016,11 +7274,11 @@
           <a:bodyPr wrap="square" lIns="0" tIns="0" rIns="0" bIns="0" rtlCol="0" anchor="ctr"/>
           <a:lstStyle/>
           <a:p>
-            <a:pPr indent="0" marL="0">
+            <a:pPr marL="0" indent="0">
               <a:buNone/>
             </a:pPr>
             <a:r>
-              <a:rPr lang="en-US" sz="1300" b="1" spc="300" kern="0" dirty="0">
+              <a:rPr lang="en-US" sz="1300" b="1" kern="0" spc="300" dirty="0">
                 <a:solidFill>
                   <a:srgbClr val="22D3EE"/>
                 </a:solidFill>
@@ -5055,7 +7313,7 @@
           <a:bodyPr wrap="square" lIns="0" tIns="0" rIns="0" bIns="0" rtlCol="0" anchor="ctr"/>
           <a:lstStyle/>
           <a:p>
-            <a:pPr indent="0" marL="0">
+            <a:pPr marL="0" indent="0">
               <a:buNone/>
             </a:pPr>
             <a:r>
@@ -5099,7 +7357,7 @@
             <a:prstDash val="solid"/>
           </a:ln>
           <a:effectLst>
-            <a:outerShdw sx="100000" sy="100000" kx="0" ky="0" algn="bl" rotWithShape="0" blurRad="127000" dist="38100" dir="5400000">
+            <a:outerShdw blurRad="127000" dist="38100" dir="5400000" algn="bl" rotWithShape="0">
               <a:srgbClr val="000000">
                 <a:alpha val="35000"/>
               </a:srgbClr>
@@ -5126,7 +7384,7 @@
           </a:solidFill>
           <a:ln/>
           <a:effectLst>
-            <a:outerShdw sx="100000" sy="100000" kx="0" ky="0" algn="bl" rotWithShape="0" blurRad="177800" dist="50800" dir="16200000">
+            <a:outerShdw blurRad="177800" dist="50800" dir="16200000" algn="bl" rotWithShape="0">
               <a:srgbClr val="22D3EE">
                 <a:alpha val="50000"/>
               </a:srgbClr>
@@ -5155,7 +7413,7 @@
           <a:bodyPr wrap="square" lIns="0" tIns="0" rIns="0" bIns="0" rtlCol="0" anchor="ctr"/>
           <a:lstStyle/>
           <a:p>
-            <a:pPr algn="ctr" indent="0" marL="0">
+            <a:pPr marL="0" indent="0" algn="ctr">
               <a:buNone/>
             </a:pPr>
             <a:r>
@@ -5194,7 +7452,7 @@
           <a:bodyPr wrap="square" lIns="0" tIns="0" rIns="0" bIns="0" rtlCol="0" anchor="ctr"/>
           <a:lstStyle/>
           <a:p>
-            <a:pPr indent="0" marL="0">
+            <a:pPr marL="0" indent="0">
               <a:buNone/>
             </a:pPr>
             <a:r>
@@ -5233,7 +7491,7 @@
           <a:bodyPr wrap="square" lIns="0" tIns="0" rIns="0" bIns="0" rtlCol="0" anchor="t"/>
           <a:lstStyle/>
           <a:p>
-            <a:pPr indent="0" marL="0">
+            <a:pPr marL="0" indent="0">
               <a:buNone/>
             </a:pPr>
             <a:r>
@@ -5277,7 +7535,7 @@
             <a:prstDash val="solid"/>
           </a:ln>
           <a:effectLst>
-            <a:outerShdw sx="100000" sy="100000" kx="0" ky="0" algn="bl" rotWithShape="0" blurRad="127000" dist="38100" dir="5400000">
+            <a:outerShdw blurRad="127000" dist="38100" dir="5400000" algn="bl" rotWithShape="0">
               <a:srgbClr val="000000">
                 <a:alpha val="35000"/>
               </a:srgbClr>
@@ -5304,7 +7562,7 @@
           </a:solidFill>
           <a:ln/>
           <a:effectLst>
-            <a:outerShdw sx="100000" sy="100000" kx="0" ky="0" algn="bl" rotWithShape="0" blurRad="177800" dist="50800" dir="16200000">
+            <a:outerShdw blurRad="177800" dist="50800" dir="16200000" algn="bl" rotWithShape="0">
               <a:srgbClr val="3B82F6">
                 <a:alpha val="50000"/>
               </a:srgbClr>
@@ -5333,7 +7591,7 @@
           <a:bodyPr wrap="square" lIns="0" tIns="0" rIns="0" bIns="0" rtlCol="0" anchor="ctr"/>
           <a:lstStyle/>
           <a:p>
-            <a:pPr algn="ctr" indent="0" marL="0">
+            <a:pPr marL="0" indent="0" algn="ctr">
               <a:buNone/>
             </a:pPr>
             <a:r>
@@ -5372,7 +7630,7 @@
           <a:bodyPr wrap="square" lIns="0" tIns="0" rIns="0" bIns="0" rtlCol="0" anchor="ctr"/>
           <a:lstStyle/>
           <a:p>
-            <a:pPr indent="0" marL="0">
+            <a:pPr marL="0" indent="0">
               <a:buNone/>
             </a:pPr>
             <a:r>
@@ -5411,7 +7669,7 @@
           <a:bodyPr wrap="square" lIns="0" tIns="0" rIns="0" bIns="0" rtlCol="0" anchor="t"/>
           <a:lstStyle/>
           <a:p>
-            <a:pPr indent="0" marL="0">
+            <a:pPr marL="0" indent="0">
               <a:buNone/>
             </a:pPr>
             <a:r>
@@ -5455,7 +7713,7 @@
             <a:prstDash val="solid"/>
           </a:ln>
           <a:effectLst>
-            <a:outerShdw sx="100000" sy="100000" kx="0" ky="0" algn="bl" rotWithShape="0" blurRad="127000" dist="38100" dir="5400000">
+            <a:outerShdw blurRad="127000" dist="38100" dir="5400000" algn="bl" rotWithShape="0">
               <a:srgbClr val="000000">
                 <a:alpha val="35000"/>
               </a:srgbClr>
@@ -5482,7 +7740,7 @@
           </a:solidFill>
           <a:ln/>
           <a:effectLst>
-            <a:outerShdw sx="100000" sy="100000" kx="0" ky="0" algn="bl" rotWithShape="0" blurRad="177800" dist="50800" dir="16200000">
+            <a:outerShdw blurRad="177800" dist="50800" dir="16200000" algn="bl" rotWithShape="0">
               <a:srgbClr val="34D399">
                 <a:alpha val="50000"/>
               </a:srgbClr>
@@ -5511,7 +7769,7 @@
           <a:bodyPr wrap="square" lIns="0" tIns="0" rIns="0" bIns="0" rtlCol="0" anchor="ctr"/>
           <a:lstStyle/>
           <a:p>
-            <a:pPr algn="ctr" indent="0" marL="0">
+            <a:pPr marL="0" indent="0" algn="ctr">
               <a:buNone/>
             </a:pPr>
             <a:r>
@@ -5550,7 +7808,7 @@
           <a:bodyPr wrap="square" lIns="0" tIns="0" rIns="0" bIns="0" rtlCol="0" anchor="ctr"/>
           <a:lstStyle/>
           <a:p>
-            <a:pPr indent="0" marL="0">
+            <a:pPr marL="0" indent="0">
               <a:buNone/>
             </a:pPr>
             <a:r>
@@ -5589,7 +7847,7 @@
           <a:bodyPr wrap="square" lIns="0" tIns="0" rIns="0" bIns="0" rtlCol="0" anchor="t"/>
           <a:lstStyle/>
           <a:p>
-            <a:pPr indent="0" marL="0">
+            <a:pPr marL="0" indent="0">
               <a:buNone/>
             </a:pPr>
             <a:r>
@@ -5612,6 +7870,18 @@
   <p:clrMapOvr>
     <a:masterClrMapping/>
   </p:clrMapOvr>
+  <mc:AlternateContent xmlns:mc="http://schemas.openxmlformats.org/markup-compatibility/2006">
+    <mc:Choice xmlns:p159="http://schemas.microsoft.com/office/powerpoint/2015/09/main" Requires="p159">
+      <p:transition xmlns:p14="http://schemas.microsoft.com/office/powerpoint/2010/main" spd="slow" p14:dur="2000">
+        <p159:morph option="byObject"/>
+      </p:transition>
+    </mc:Choice>
+    <mc:Fallback>
+      <p:transition spd="slow">
+        <p:fade/>
+      </p:transition>
+    </mc:Fallback>
+  </mc:AlternateContent>
 </p:sld>
 </file>
 
@@ -5623,6 +7893,7 @@
         <a:solidFill>
           <a:srgbClr val="0B1020"/>
         </a:solidFill>
+        <a:effectLst/>
       </p:bgPr>
     </p:bg>
     <p:spTree>
@@ -6188,11 +8459,11 @@
           <a:bodyPr wrap="square" lIns="0" tIns="0" rIns="0" bIns="0" rtlCol="0" anchor="ctr"/>
           <a:lstStyle/>
           <a:p>
-            <a:pPr indent="0" marL="0">
+            <a:pPr marL="0" indent="0">
               <a:buNone/>
             </a:pPr>
             <a:r>
-              <a:rPr lang="en-US" sz="1300" b="1" spc="300" kern="0" dirty="0">
+              <a:rPr lang="en-US" sz="1300" b="1" kern="0" spc="300" dirty="0">
                 <a:solidFill>
                   <a:srgbClr val="22D3EE"/>
                 </a:solidFill>
@@ -6227,7 +8498,7 @@
           <a:bodyPr wrap="square" lIns="0" tIns="0" rIns="0" bIns="0" rtlCol="0" anchor="ctr"/>
           <a:lstStyle/>
           <a:p>
-            <a:pPr indent="0" marL="0">
+            <a:pPr marL="0" indent="0">
               <a:buNone/>
             </a:pPr>
             <a:r>
@@ -6239,7 +8510,7 @@
                 <a:ea typeface="TH Sarabun New" pitchFamily="34" charset="-122"/>
                 <a:cs typeface="TH Sarabun New" pitchFamily="34" charset="-120"/>
               </a:rPr>
-              <a:t>ขั้นนำ: เกมทายเลขจากเงื่อนไข</a:t>
+              <a:t>ขั้นนำ: เกมทายจากเงื่อนไข</a:t>
             </a:r>
             <a:endParaRPr lang="en-US" sz="3400" dirty="0"/>
           </a:p>
@@ -6254,7 +8525,7 @@
         <p:spPr>
           <a:xfrm>
             <a:off x="640080" y="1920240"/>
-            <a:ext cx="6766560" cy="4206240"/>
+            <a:ext cx="6400800" cy="4206240"/>
           </a:xfrm>
           <a:prstGeom prst="roundRect">
             <a:avLst>
@@ -6271,7 +8542,7 @@
             <a:prstDash val="solid"/>
           </a:ln>
           <a:effectLst>
-            <a:outerShdw sx="100000" sy="100000" kx="0" ky="0" algn="bl" rotWithShape="0" blurRad="127000" dist="38100" dir="5400000">
+            <a:outerShdw blurRad="127000" dist="38100" dir="5400000" algn="bl" rotWithShape="0">
               <a:srgbClr val="000000">
                 <a:alpha val="35000"/>
               </a:srgbClr>
@@ -6287,8 +8558,8 @@
         </p:nvSpPr>
         <p:spPr>
           <a:xfrm>
-            <a:off x="1005840" y="2194560"/>
-            <a:ext cx="6035040" cy="2926080"/>
+            <a:off x="1005840" y="2148840"/>
+            <a:ext cx="5486400" cy="411480"/>
           </a:xfrm>
           <a:prstGeom prst="rect">
             <a:avLst/>
@@ -6300,137 +8571,34 @@
           <a:bodyPr wrap="square" lIns="0" tIns="0" rIns="0" bIns="0" rtlCol="0" anchor="ctr"/>
           <a:lstStyle/>
           <a:p>
-            <a:pPr indent="0" marL="0">
-              <a:lnSpc>
-                <a:spcPct val="115000"/>
-              </a:lnSpc>
+            <a:pPr marL="0" indent="0">
               <a:buNone/>
             </a:pPr>
             <a:r>
-              <a:rPr lang="en-US" sz="1900" dirty="0">
-                <a:solidFill>
-                  <a:srgbClr val="F1F5F9"/>
-                </a:solidFill>
-                <a:latin typeface="Courier New" pitchFamily="34" charset="0"/>
-                <a:ea typeface="Courier New" pitchFamily="34" charset="-122"/>
-                <a:cs typeface="Courier New" pitchFamily="34" charset="-120"/>
-              </a:rPr>
-              <a:t>&gt; ฉันเป็นตัวเลข</a:t>
-            </a:r>
-            <a:endParaRPr lang="en-US" sz="1900" dirty="0"/>
-          </a:p>
-          <a:p>
-            <a:pPr indent="0" marL="0">
-              <a:lnSpc>
-                <a:spcPct val="115000"/>
-              </a:lnSpc>
-              <a:buNone/>
-            </a:pPr>
-            <a:r>
-              <a:rPr lang="en-US" sz="1900" dirty="0">
-                <a:solidFill>
-                  <a:srgbClr val="F1F5F9"/>
-                </a:solidFill>
-                <a:latin typeface="Courier New" pitchFamily="34" charset="0"/>
-                <a:ea typeface="Courier New" pitchFamily="34" charset="-122"/>
-                <a:cs typeface="Courier New" pitchFamily="34" charset="-120"/>
-              </a:rPr>
-              <a:t>&gt; ฉันไม่ใช่จำนวนคี่</a:t>
-            </a:r>
-            <a:endParaRPr lang="en-US" sz="1900" dirty="0"/>
-          </a:p>
-          <a:p>
-            <a:pPr indent="0" marL="0">
-              <a:lnSpc>
-                <a:spcPct val="115000"/>
-              </a:lnSpc>
-              <a:buNone/>
-            </a:pPr>
-            <a:r>
-              <a:rPr lang="en-US" sz="1900" dirty="0">
-                <a:solidFill>
-                  <a:srgbClr val="F1F5F9"/>
-                </a:solidFill>
-                <a:latin typeface="Courier New" pitchFamily="34" charset="0"/>
-                <a:ea typeface="Courier New" pitchFamily="34" charset="-122"/>
-                <a:cs typeface="Courier New" pitchFamily="34" charset="-120"/>
-              </a:rPr>
-              <a:t>&gt; ฉันมีค่ามากกว่า 90</a:t>
-            </a:r>
-            <a:endParaRPr lang="en-US" sz="1900" dirty="0"/>
-          </a:p>
-          <a:p>
-            <a:pPr indent="0" marL="0">
-              <a:lnSpc>
-                <a:spcPct val="115000"/>
-              </a:lnSpc>
-              <a:buNone/>
-            </a:pPr>
-            <a:r>
-              <a:rPr lang="en-US" sz="1900" dirty="0">
-                <a:solidFill>
-                  <a:srgbClr val="F1F5F9"/>
-                </a:solidFill>
-                <a:latin typeface="Courier New" pitchFamily="34" charset="0"/>
-                <a:ea typeface="Courier New" pitchFamily="34" charset="-122"/>
-                <a:cs typeface="Courier New" pitchFamily="34" charset="-120"/>
-              </a:rPr>
-              <a:t>&gt; ฉันมีค่าไม่เกิน 100</a:t>
-            </a:r>
-            <a:endParaRPr lang="en-US" sz="1900" dirty="0"/>
-          </a:p>
-          <a:p>
-            <a:pPr indent="0" marL="0">
-              <a:lnSpc>
-                <a:spcPct val="115000"/>
-              </a:lnSpc>
-              <a:buNone/>
-            </a:pPr>
-            <a:r>
-              <a:rPr lang="en-US" sz="1900" dirty="0">
-                <a:solidFill>
-                  <a:srgbClr val="F1F5F9"/>
-                </a:solidFill>
-                <a:latin typeface="Courier New" pitchFamily="34" charset="0"/>
-                <a:ea typeface="Courier New" pitchFamily="34" charset="-122"/>
-                <a:cs typeface="Courier New" pitchFamily="34" charset="-120"/>
-              </a:rPr>
-              <a:t>&gt; ถ้าเอา 100 มาลบฉัน จะไม่เหลืออะไรเลย</a:t>
-            </a:r>
-            <a:endParaRPr lang="en-US" sz="1900" dirty="0"/>
-          </a:p>
-          <a:p>
-            <a:pPr indent="0" marL="0">
-              <a:lnSpc>
-                <a:spcPct val="115000"/>
-              </a:lnSpc>
-              <a:buNone/>
-            </a:pPr>
-            <a:r>
-              <a:rPr lang="en-US" sz="1900" b="1" dirty="0">
+              <a:rPr lang="en-US" sz="1800" b="1" dirty="0">
                 <a:solidFill>
                   <a:srgbClr val="22D3EE"/>
                 </a:solidFill>
-                <a:latin typeface="Courier New" pitchFamily="34" charset="0"/>
-                <a:ea typeface="Courier New" pitchFamily="34" charset="-122"/>
-                <a:cs typeface="Courier New" pitchFamily="34" charset="-120"/>
+                <a:latin typeface="TH Sarabun New" pitchFamily="34" charset="0"/>
+                <a:ea typeface="TH Sarabun New" pitchFamily="34" charset="-122"/>
+                <a:cs typeface="TH Sarabun New" pitchFamily="34" charset="-120"/>
               </a:rPr>
-              <a:t>&gt; ฉันคือเลขใด ?</a:t>
+              <a:t>ตัวอย่าง A — ทายจำนวน</a:t>
             </a:r>
-            <a:endParaRPr lang="en-US" sz="1900" dirty="0"/>
+            <a:endParaRPr lang="en-US" sz="1800" dirty="0"/>
           </a:p>
         </p:txBody>
       </p:sp>
       <p:sp>
         <p:nvSpPr>
-          <p:cNvPr id="30" name="Shape 28"/>
-          <p:cNvSpPr/>
-          <p:nvPr/>
-        </p:nvSpPr>
-        <p:spPr>
-          <a:xfrm>
-            <a:off x="1005840" y="5212080"/>
-            <a:ext cx="731520" cy="731520"/>
+          <p:cNvPr id="31" name="Shape 29"/>
+          <p:cNvSpPr/>
+          <p:nvPr/>
+        </p:nvSpPr>
+        <p:spPr>
+          <a:xfrm>
+            <a:off x="1005840" y="5257800"/>
+            <a:ext cx="640080" cy="640080"/>
           </a:xfrm>
           <a:prstGeom prst="ellipse">
             <a:avLst/>
@@ -6440,7 +8608,7 @@
           </a:solidFill>
           <a:ln/>
           <a:effectLst>
-            <a:outerShdw sx="100000" sy="100000" kx="0" ky="0" algn="bl" rotWithShape="0" blurRad="177800" dist="50800" dir="16200000">
+            <a:outerShdw blurRad="177800" dist="50800" dir="16200000" algn="bl" rotWithShape="0">
               <a:srgbClr val="34D399">
                 <a:alpha val="50000"/>
               </a:srgbClr>
@@ -6450,14 +8618,14 @@
       </p:sp>
       <p:sp>
         <p:nvSpPr>
-          <p:cNvPr id="31" name="Text 29"/>
-          <p:cNvSpPr/>
-          <p:nvPr/>
-        </p:nvSpPr>
-        <p:spPr>
-          <a:xfrm>
-            <a:off x="1005840" y="5212080"/>
-            <a:ext cx="731520" cy="731520"/>
+          <p:cNvPr id="32" name="Text 30"/>
+          <p:cNvSpPr/>
+          <p:nvPr/>
+        </p:nvSpPr>
+        <p:spPr>
+          <a:xfrm>
+            <a:off x="1005840" y="5257800"/>
+            <a:ext cx="640080" cy="640080"/>
           </a:xfrm>
           <a:prstGeom prst="rect">
             <a:avLst/>
@@ -6469,7 +8637,7 @@
           <a:bodyPr wrap="square" lIns="0" tIns="0" rIns="0" bIns="0" rtlCol="0" anchor="ctr"/>
           <a:lstStyle/>
           <a:p>
-            <a:pPr algn="ctr" indent="0" marL="0">
+            <a:pPr marL="0" indent="0" algn="ctr">
               <a:buNone/>
             </a:pPr>
             <a:r>
@@ -6489,14 +8657,14 @@
       </p:sp>
       <p:sp>
         <p:nvSpPr>
-          <p:cNvPr id="32" name="Text 30"/>
-          <p:cNvSpPr/>
-          <p:nvPr/>
-        </p:nvSpPr>
-        <p:spPr>
-          <a:xfrm>
-            <a:off x="1874520" y="5212080"/>
-            <a:ext cx="4572000" cy="731520"/>
+          <p:cNvPr id="33" name="Text 31"/>
+          <p:cNvSpPr/>
+          <p:nvPr/>
+        </p:nvSpPr>
+        <p:spPr>
+          <a:xfrm>
+            <a:off x="1783080" y="5257800"/>
+            <a:ext cx="3657600" cy="640080"/>
           </a:xfrm>
           <a:prstGeom prst="rect">
             <a:avLst/>
@@ -6508,11 +8676,11 @@
           <a:bodyPr wrap="square" lIns="0" tIns="0" rIns="0" bIns="0" rtlCol="0" anchor="ctr"/>
           <a:lstStyle/>
           <a:p>
-            <a:pPr indent="0" marL="0">
+            <a:pPr marL="0" indent="0">
               <a:buNone/>
             </a:pPr>
             <a:r>
-              <a:rPr lang="en-US" sz="2400" b="1" dirty="0">
+              <a:rPr lang="en-US" sz="2300" b="1" dirty="0">
                 <a:solidFill>
                   <a:srgbClr val="34D399"/>
                 </a:solidFill>
@@ -6520,26 +8688,26 @@
                 <a:ea typeface="TH Sarabun New" pitchFamily="34" charset="-122"/>
                 <a:cs typeface="TH Sarabun New" pitchFamily="34" charset="-120"/>
               </a:rPr>
-              <a:t>คำตอบคือ 100</a:t>
+              <a:t>คำตอบคือ 25</a:t>
             </a:r>
-            <a:endParaRPr lang="en-US" sz="2400" dirty="0"/>
+            <a:endParaRPr lang="en-US" sz="2300" dirty="0"/>
           </a:p>
         </p:txBody>
       </p:sp>
       <p:sp>
         <p:nvSpPr>
-          <p:cNvPr id="33" name="Shape 31"/>
-          <p:cNvSpPr/>
-          <p:nvPr/>
-        </p:nvSpPr>
-        <p:spPr>
-          <a:xfrm>
-            <a:off x="7772400" y="1920240"/>
-            <a:ext cx="3749040" cy="4206240"/>
+          <p:cNvPr id="34" name="Shape 32"/>
+          <p:cNvSpPr/>
+          <p:nvPr/>
+        </p:nvSpPr>
+        <p:spPr>
+          <a:xfrm>
+            <a:off x="7223760" y="1920240"/>
+            <a:ext cx="4297680" cy="2331720"/>
           </a:xfrm>
           <a:prstGeom prst="roundRect">
             <a:avLst>
-              <a:gd name="adj" fmla="val 2195"/>
+              <a:gd name="adj" fmla="val 3529"/>
             </a:avLst>
           </a:prstGeom>
           <a:solidFill>
@@ -6552,7 +8720,7 @@
             <a:prstDash val="solid"/>
           </a:ln>
           <a:effectLst>
-            <a:outerShdw sx="100000" sy="100000" kx="0" ky="0" algn="bl" rotWithShape="0" blurRad="127000" dist="38100" dir="5400000">
+            <a:outerShdw blurRad="127000" dist="38100" dir="5400000" algn="bl" rotWithShape="0">
               <a:srgbClr val="000000">
                 <a:alpha val="35000"/>
               </a:srgbClr>
@@ -6562,14 +8730,14 @@
       </p:sp>
       <p:sp>
         <p:nvSpPr>
-          <p:cNvPr id="34" name="Text 32"/>
-          <p:cNvSpPr/>
-          <p:nvPr/>
-        </p:nvSpPr>
-        <p:spPr>
-          <a:xfrm>
-            <a:off x="8092440" y="2240280"/>
-            <a:ext cx="3108960" cy="457200"/>
+          <p:cNvPr id="35" name="Text 33"/>
+          <p:cNvSpPr/>
+          <p:nvPr/>
+        </p:nvSpPr>
+        <p:spPr>
+          <a:xfrm>
+            <a:off x="7498080" y="2103120"/>
+            <a:ext cx="3840480" cy="411480"/>
           </a:xfrm>
           <a:prstGeom prst="rect">
             <a:avLst/>
@@ -6581,11 +8749,205 @@
           <a:bodyPr wrap="square" lIns="0" tIns="0" rIns="0" bIns="0" rtlCol="0" anchor="ctr"/>
           <a:lstStyle/>
           <a:p>
-            <a:pPr indent="0" marL="0">
+            <a:pPr marL="0" indent="0">
               <a:buNone/>
             </a:pPr>
             <a:r>
-              <a:rPr lang="en-US" sz="2000" b="1" dirty="0">
+              <a:rPr lang="en-US" sz="1700" b="1" dirty="0">
+                <a:solidFill>
+                  <a:srgbClr val="FBBF24"/>
+                </a:solidFill>
+                <a:latin typeface="TH Sarabun New" pitchFamily="34" charset="0"/>
+                <a:ea typeface="TH Sarabun New" pitchFamily="34" charset="-122"/>
+                <a:cs typeface="TH Sarabun New" pitchFamily="34" charset="-120"/>
+              </a:rPr>
+              <a:t>ตัวอย่าง B — ทายรูปสัญลักษณ์</a:t>
+            </a:r>
+            <a:endParaRPr lang="en-US" sz="1700" dirty="0"/>
+          </a:p>
+        </p:txBody>
+      </p:sp>
+      <p:sp>
+        <p:nvSpPr>
+          <p:cNvPr id="36" name="Text 34"/>
+          <p:cNvSpPr/>
+          <p:nvPr/>
+        </p:nvSpPr>
+        <p:spPr>
+          <a:xfrm>
+            <a:off x="7498080" y="2606040"/>
+            <a:ext cx="3840480" cy="1097280"/>
+          </a:xfrm>
+          <a:prstGeom prst="rect">
+            <a:avLst/>
+          </a:prstGeom>
+          <a:noFill/>
+          <a:ln/>
+        </p:spPr>
+        <p:txBody>
+          <a:bodyPr wrap="square" lIns="0" tIns="0" rIns="0" bIns="0" rtlCol="0" anchor="ctr"/>
+          <a:lstStyle/>
+          <a:p>
+            <a:pPr marL="0" indent="0">
+              <a:lnSpc>
+                <a:spcPct val="110000"/>
+              </a:lnSpc>
+              <a:buNone/>
+            </a:pPr>
+            <a:r>
+              <a:rPr lang="en-US" sz="1700" dirty="0">
+                <a:solidFill>
+                  <a:srgbClr val="94A3B8"/>
+                </a:solidFill>
+                <a:latin typeface="TH Sarabun New" pitchFamily="34" charset="0"/>
+                <a:ea typeface="TH Sarabun New" pitchFamily="34" charset="-122"/>
+                <a:cs typeface="TH Sarabun New" pitchFamily="34" charset="-120"/>
+              </a:rPr>
+              <a:t>รูปเรขาคณิต • ด้านตรงทุกด้าน</a:t>
+            </a:r>
+            <a:endParaRPr lang="en-US" sz="1700" dirty="0"/>
+          </a:p>
+          <a:p>
+            <a:pPr marL="0" indent="0">
+              <a:lnSpc>
+                <a:spcPct val="110000"/>
+              </a:lnSpc>
+              <a:buNone/>
+            </a:pPr>
+            <a:r>
+              <a:rPr lang="en-US" sz="1700" dirty="0">
+                <a:solidFill>
+                  <a:srgbClr val="94A3B8"/>
+                </a:solidFill>
+                <a:latin typeface="TH Sarabun New" pitchFamily="34" charset="0"/>
+                <a:ea typeface="TH Sarabun New" pitchFamily="34" charset="-122"/>
+                <a:cs typeface="TH Sarabun New" pitchFamily="34" charset="-120"/>
+              </a:rPr>
+              <a:t>มุมน้อยกว่า 4 มุม • ด้านเท่ากันทุกด้าน</a:t>
+            </a:r>
+            <a:endParaRPr lang="en-US" sz="1700" dirty="0"/>
+          </a:p>
+          <a:p>
+            <a:pPr marL="0" indent="0">
+              <a:lnSpc>
+                <a:spcPct val="110000"/>
+              </a:lnSpc>
+              <a:buNone/>
+            </a:pPr>
+            <a:r>
+              <a:rPr lang="en-US" sz="1700" b="1" dirty="0">
+                <a:solidFill>
+                  <a:srgbClr val="F1F5F9"/>
+                </a:solidFill>
+                <a:latin typeface="TH Sarabun New" pitchFamily="34" charset="0"/>
+                <a:ea typeface="TH Sarabun New" pitchFamily="34" charset="-122"/>
+                <a:cs typeface="TH Sarabun New" pitchFamily="34" charset="-120"/>
+              </a:rPr>
+              <a:t>→ ฉันคือรูปอะไร ?</a:t>
+            </a:r>
+            <a:endParaRPr lang="en-US" sz="1700" dirty="0"/>
+          </a:p>
+        </p:txBody>
+      </p:sp>
+      <p:sp>
+        <p:nvSpPr>
+          <p:cNvPr id="37" name="Text 35"/>
+          <p:cNvSpPr/>
+          <p:nvPr/>
+        </p:nvSpPr>
+        <p:spPr>
+          <a:xfrm>
+            <a:off x="7498080" y="3703320"/>
+            <a:ext cx="3840480" cy="457200"/>
+          </a:xfrm>
+          <a:prstGeom prst="rect">
+            <a:avLst/>
+          </a:prstGeom>
+          <a:noFill/>
+          <a:ln/>
+        </p:spPr>
+        <p:txBody>
+          <a:bodyPr wrap="square" lIns="0" tIns="0" rIns="0" bIns="0" rtlCol="0" anchor="ctr"/>
+          <a:lstStyle/>
+          <a:p>
+            <a:pPr marL="0" indent="0">
+              <a:buNone/>
+            </a:pPr>
+            <a:r>
+              <a:rPr lang="en-US" sz="1800" b="1" dirty="0">
+                <a:solidFill>
+                  <a:srgbClr val="34D399"/>
+                </a:solidFill>
+                <a:latin typeface="TH Sarabun New" pitchFamily="34" charset="0"/>
+                <a:ea typeface="TH Sarabun New" pitchFamily="34" charset="-122"/>
+                <a:cs typeface="TH Sarabun New" pitchFamily="34" charset="-120"/>
+              </a:rPr>
+              <a:t>คำตอบ: สามเหลี่ยมด้านเท่า</a:t>
+            </a:r>
+            <a:endParaRPr lang="en-US" sz="1800" dirty="0"/>
+          </a:p>
+        </p:txBody>
+      </p:sp>
+      <p:sp>
+        <p:nvSpPr>
+          <p:cNvPr id="38" name="Shape 36"/>
+          <p:cNvSpPr/>
+          <p:nvPr/>
+        </p:nvSpPr>
+        <p:spPr>
+          <a:xfrm>
+            <a:off x="7223760" y="4434840"/>
+            <a:ext cx="4297680" cy="1691640"/>
+          </a:xfrm>
+          <a:prstGeom prst="roundRect">
+            <a:avLst>
+              <a:gd name="adj" fmla="val 4865"/>
+            </a:avLst>
+          </a:prstGeom>
+          <a:solidFill>
+            <a:srgbClr val="141C33"/>
+          </a:solidFill>
+          <a:ln w="12700">
+            <a:solidFill>
+              <a:srgbClr val="2A3550"/>
+            </a:solidFill>
+            <a:prstDash val="solid"/>
+          </a:ln>
+          <a:effectLst>
+            <a:outerShdw blurRad="127000" dist="38100" dir="5400000" algn="bl" rotWithShape="0">
+              <a:srgbClr val="000000">
+                <a:alpha val="35000"/>
+              </a:srgbClr>
+            </a:outerShdw>
+          </a:effectLst>
+        </p:spPr>
+      </p:sp>
+      <p:sp>
+        <p:nvSpPr>
+          <p:cNvPr id="39" name="Text 37"/>
+          <p:cNvSpPr/>
+          <p:nvPr/>
+        </p:nvSpPr>
+        <p:spPr>
+          <a:xfrm>
+            <a:off x="7498080" y="4617720"/>
+            <a:ext cx="3749040" cy="365760"/>
+          </a:xfrm>
+          <a:prstGeom prst="rect">
+            <a:avLst/>
+          </a:prstGeom>
+          <a:noFill/>
+          <a:ln/>
+        </p:spPr>
+        <p:txBody>
+          <a:bodyPr wrap="square" lIns="0" tIns="0" rIns="0" bIns="0" rtlCol="0" anchor="ctr"/>
+          <a:lstStyle/>
+          <a:p>
+            <a:pPr marL="0" indent="0">
+              <a:buNone/>
+            </a:pPr>
+            <a:r>
+              <a:rPr lang="en-US" sz="1800" b="1" dirty="0">
                 <a:solidFill>
                   <a:srgbClr val="22D3EE"/>
                 </a:solidFill>
@@ -6595,20 +8957,20 @@
               </a:rPr>
               <a:t>แนวคิด</a:t>
             </a:r>
-            <a:endParaRPr lang="en-US" sz="2000" dirty="0"/>
+            <a:endParaRPr lang="en-US" sz="1800" dirty="0"/>
           </a:p>
         </p:txBody>
       </p:sp>
       <p:sp>
         <p:nvSpPr>
-          <p:cNvPr id="35" name="Text 33"/>
-          <p:cNvSpPr/>
-          <p:nvPr/>
-        </p:nvSpPr>
-        <p:spPr>
-          <a:xfrm>
-            <a:off x="8092440" y="2834640"/>
-            <a:ext cx="3108960" cy="3017520"/>
+          <p:cNvPr id="40" name="Text 38"/>
+          <p:cNvSpPr/>
+          <p:nvPr/>
+        </p:nvSpPr>
+        <p:spPr>
+          <a:xfrm>
+            <a:off x="7498080" y="5029200"/>
+            <a:ext cx="3749040" cy="1005840"/>
           </a:xfrm>
           <a:prstGeom prst="rect">
             <a:avLst/>
@@ -6620,11 +8982,11 @@
           <a:bodyPr wrap="square" lIns="0" tIns="0" rIns="0" bIns="0" rtlCol="0" anchor="t"/>
           <a:lstStyle/>
           <a:p>
-            <a:pPr indent="0" marL="0">
+            <a:pPr marL="0" indent="0">
               <a:buNone/>
             </a:pPr>
             <a:r>
-              <a:rPr lang="en-US" sz="1900" dirty="0">
+              <a:rPr lang="en-US" sz="1700" dirty="0">
                 <a:solidFill>
                   <a:srgbClr val="F1F5F9"/>
                 </a:solidFill>
@@ -6632,9 +8994,374 @@
                 <a:ea typeface="TH Sarabun New" pitchFamily="34" charset="-122"/>
                 <a:cs typeface="TH Sarabun New" pitchFamily="34" charset="-120"/>
               </a:rPr>
-              <a:t>การนำเงื่อนไขที่โจทย์กำหนดมาพิจารณาทีละข้ออย่างครอบคลุม จนเหลือคำตอบที่เป็นไปได้เพียงหนึ่งเดียว เรียกว่า การใช้เหตุผลเชิงตรรกะ</a:t>
+              <a:t>พิจารณาเงื่อนไขทีละข้ออย่างครอบคลุม จนเหลือคำตอบเพียงหนึ่งเดียว = การใช้เหตุผลเชิงตรรกะ</a:t>
             </a:r>
-            <a:endParaRPr lang="en-US" sz="1900" dirty="0"/>
+            <a:endParaRPr lang="en-US" sz="1700" dirty="0"/>
+          </a:p>
+        </p:txBody>
+      </p:sp>
+      <p:sp>
+        <p:nvSpPr>
+          <p:cNvPr id="41" name="Text 28">
+            <a:extLst>
+              <a:ext uri="{FF2B5EF4-FFF2-40B4-BE49-F238E27FC236}">
+                <a16:creationId xmlns:a16="http://schemas.microsoft.com/office/drawing/2014/main" id="{625BBC98-458A-73CD-FC4B-FE30842AA60B}"/>
+              </a:ext>
+            </a:extLst>
+          </p:cNvPr>
+          <p:cNvSpPr/>
+          <p:nvPr/>
+        </p:nvSpPr>
+        <p:spPr>
+          <a:xfrm>
+            <a:off x="1005840" y="2506894"/>
+            <a:ext cx="5669280" cy="411480"/>
+          </a:xfrm>
+          <a:prstGeom prst="rect">
+            <a:avLst/>
+          </a:prstGeom>
+          <a:noFill/>
+          <a:ln/>
+        </p:spPr>
+        <p:txBody>
+          <a:bodyPr wrap="square" lIns="0" tIns="0" rIns="0" bIns="0" rtlCol="0" anchor="ctr"/>
+          <a:lstStyle/>
+          <a:p>
+            <a:pPr marL="0" indent="0">
+              <a:lnSpc>
+                <a:spcPct val="112000"/>
+              </a:lnSpc>
+              <a:buNone/>
+            </a:pPr>
+            <a:r>
+              <a:rPr lang="en-US" sz="1800" dirty="0">
+                <a:solidFill>
+                  <a:srgbClr val="F1F5F9"/>
+                </a:solidFill>
+                <a:latin typeface="Courier New" pitchFamily="34" charset="0"/>
+                <a:ea typeface="Courier New" pitchFamily="34" charset="-122"/>
+                <a:cs typeface="Courier New" pitchFamily="34" charset="-120"/>
+              </a:rPr>
+              <a:t>&gt; </a:t>
+            </a:r>
+            <a:r>
+              <a:rPr lang="en-US" sz="1800" dirty="0" err="1">
+                <a:solidFill>
+                  <a:srgbClr val="F1F5F9"/>
+                </a:solidFill>
+                <a:latin typeface="Courier New" pitchFamily="34" charset="0"/>
+                <a:ea typeface="Courier New" pitchFamily="34" charset="-122"/>
+                <a:cs typeface="Courier New" pitchFamily="34" charset="-120"/>
+              </a:rPr>
+              <a:t>ฉันเป็นเลขสองหลัก</a:t>
+            </a:r>
+            <a:endParaRPr lang="en-US" sz="1800" dirty="0"/>
+          </a:p>
+        </p:txBody>
+      </p:sp>
+      <p:sp>
+        <p:nvSpPr>
+          <p:cNvPr id="42" name="Text 28">
+            <a:extLst>
+              <a:ext uri="{FF2B5EF4-FFF2-40B4-BE49-F238E27FC236}">
+                <a16:creationId xmlns:a16="http://schemas.microsoft.com/office/drawing/2014/main" id="{8DD227BF-55EA-976B-E29B-6BF2097CBC03}"/>
+              </a:ext>
+            </a:extLst>
+          </p:cNvPr>
+          <p:cNvSpPr/>
+          <p:nvPr/>
+        </p:nvSpPr>
+        <p:spPr>
+          <a:xfrm>
+            <a:off x="1005840" y="2918374"/>
+            <a:ext cx="5669280" cy="457200"/>
+          </a:xfrm>
+          <a:prstGeom prst="rect">
+            <a:avLst/>
+          </a:prstGeom>
+          <a:noFill/>
+          <a:ln/>
+        </p:spPr>
+        <p:txBody>
+          <a:bodyPr wrap="square" lIns="0" tIns="0" rIns="0" bIns="0" rtlCol="0" anchor="ctr"/>
+          <a:lstStyle/>
+          <a:p>
+            <a:pPr marL="0" indent="0">
+              <a:lnSpc>
+                <a:spcPct val="112000"/>
+              </a:lnSpc>
+              <a:buNone/>
+            </a:pPr>
+            <a:r>
+              <a:rPr lang="en-US" sz="1800" dirty="0">
+                <a:solidFill>
+                  <a:srgbClr val="F1F5F9"/>
+                </a:solidFill>
+                <a:latin typeface="Courier New" pitchFamily="34" charset="0"/>
+                <a:ea typeface="Courier New" pitchFamily="34" charset="-122"/>
+                <a:cs typeface="Courier New" pitchFamily="34" charset="-120"/>
+              </a:rPr>
+              <a:t>&gt; </a:t>
+            </a:r>
+            <a:r>
+              <a:rPr lang="en-US" sz="1800" dirty="0" err="1">
+                <a:solidFill>
+                  <a:srgbClr val="F1F5F9"/>
+                </a:solidFill>
+                <a:latin typeface="Courier New" pitchFamily="34" charset="0"/>
+                <a:ea typeface="Courier New" pitchFamily="34" charset="-122"/>
+                <a:cs typeface="Courier New" pitchFamily="34" charset="-120"/>
+              </a:rPr>
+              <a:t>ฉันหารด้วย</a:t>
+            </a:r>
+            <a:r>
+              <a:rPr lang="en-US" sz="1800" dirty="0">
+                <a:solidFill>
+                  <a:srgbClr val="F1F5F9"/>
+                </a:solidFill>
+                <a:latin typeface="Courier New" pitchFamily="34" charset="0"/>
+                <a:ea typeface="Courier New" pitchFamily="34" charset="-122"/>
+                <a:cs typeface="Courier New" pitchFamily="34" charset="-120"/>
+              </a:rPr>
+              <a:t> 5 </a:t>
+            </a:r>
+            <a:r>
+              <a:rPr lang="en-US" sz="1800" dirty="0" err="1">
+                <a:solidFill>
+                  <a:srgbClr val="F1F5F9"/>
+                </a:solidFill>
+                <a:latin typeface="Courier New" pitchFamily="34" charset="0"/>
+                <a:ea typeface="Courier New" pitchFamily="34" charset="-122"/>
+                <a:cs typeface="Courier New" pitchFamily="34" charset="-120"/>
+              </a:rPr>
+              <a:t>ลงตัว</a:t>
+            </a:r>
+            <a:endParaRPr lang="en-US" sz="1800" dirty="0"/>
+          </a:p>
+        </p:txBody>
+      </p:sp>
+      <p:sp>
+        <p:nvSpPr>
+          <p:cNvPr id="43" name="Text 28">
+            <a:extLst>
+              <a:ext uri="{FF2B5EF4-FFF2-40B4-BE49-F238E27FC236}">
+                <a16:creationId xmlns:a16="http://schemas.microsoft.com/office/drawing/2014/main" id="{0E81FA0D-5B99-1E99-8958-973F8721932F}"/>
+              </a:ext>
+            </a:extLst>
+          </p:cNvPr>
+          <p:cNvSpPr/>
+          <p:nvPr/>
+        </p:nvSpPr>
+        <p:spPr>
+          <a:xfrm>
+            <a:off x="1005840" y="3248688"/>
+            <a:ext cx="5669280" cy="640080"/>
+          </a:xfrm>
+          <a:prstGeom prst="rect">
+            <a:avLst/>
+          </a:prstGeom>
+          <a:noFill/>
+          <a:ln/>
+        </p:spPr>
+        <p:txBody>
+          <a:bodyPr wrap="square" lIns="0" tIns="0" rIns="0" bIns="0" rtlCol="0" anchor="ctr"/>
+          <a:lstStyle/>
+          <a:p>
+            <a:pPr marL="0" indent="0">
+              <a:lnSpc>
+                <a:spcPct val="112000"/>
+              </a:lnSpc>
+              <a:buNone/>
+            </a:pPr>
+            <a:r>
+              <a:rPr lang="en-US" sz="1800" dirty="0">
+                <a:solidFill>
+                  <a:srgbClr val="F1F5F9"/>
+                </a:solidFill>
+                <a:latin typeface="Courier New" pitchFamily="34" charset="0"/>
+                <a:ea typeface="Courier New" pitchFamily="34" charset="-122"/>
+                <a:cs typeface="Courier New" pitchFamily="34" charset="-120"/>
+              </a:rPr>
+              <a:t>&gt; ฉันมากกว่า 20 </a:t>
+            </a:r>
+            <a:r>
+              <a:rPr lang="en-US" sz="1800" dirty="0" err="1">
+                <a:solidFill>
+                  <a:srgbClr val="F1F5F9"/>
+                </a:solidFill>
+                <a:latin typeface="Courier New" pitchFamily="34" charset="0"/>
+                <a:ea typeface="Courier New" pitchFamily="34" charset="-122"/>
+                <a:cs typeface="Courier New" pitchFamily="34" charset="-120"/>
+              </a:rPr>
+              <a:t>แต่ไม่เกิน</a:t>
+            </a:r>
+            <a:r>
+              <a:rPr lang="en-US" sz="1800" dirty="0">
+                <a:solidFill>
+                  <a:srgbClr val="F1F5F9"/>
+                </a:solidFill>
+                <a:latin typeface="Courier New" pitchFamily="34" charset="0"/>
+                <a:ea typeface="Courier New" pitchFamily="34" charset="-122"/>
+                <a:cs typeface="Courier New" pitchFamily="34" charset="-120"/>
+              </a:rPr>
+              <a:t> 40</a:t>
+            </a:r>
+            <a:endParaRPr lang="en-US" sz="1800" dirty="0"/>
+          </a:p>
+        </p:txBody>
+      </p:sp>
+      <p:sp>
+        <p:nvSpPr>
+          <p:cNvPr id="44" name="Text 28">
+            <a:extLst>
+              <a:ext uri="{FF2B5EF4-FFF2-40B4-BE49-F238E27FC236}">
+                <a16:creationId xmlns:a16="http://schemas.microsoft.com/office/drawing/2014/main" id="{83952024-F5D6-E6F5-EA8B-7E27530C6592}"/>
+              </a:ext>
+            </a:extLst>
+          </p:cNvPr>
+          <p:cNvSpPr/>
+          <p:nvPr/>
+        </p:nvSpPr>
+        <p:spPr>
+          <a:xfrm>
+            <a:off x="1005840" y="3761625"/>
+            <a:ext cx="5669280" cy="501893"/>
+          </a:xfrm>
+          <a:prstGeom prst="rect">
+            <a:avLst/>
+          </a:prstGeom>
+          <a:noFill/>
+          <a:ln/>
+        </p:spPr>
+        <p:txBody>
+          <a:bodyPr wrap="square" lIns="0" tIns="0" rIns="0" bIns="0" rtlCol="0" anchor="ctr"/>
+          <a:lstStyle/>
+          <a:p>
+            <a:pPr marL="0" indent="0">
+              <a:lnSpc>
+                <a:spcPct val="112000"/>
+              </a:lnSpc>
+              <a:buNone/>
+            </a:pPr>
+            <a:r>
+              <a:rPr lang="en-US" sz="1800" dirty="0">
+                <a:solidFill>
+                  <a:srgbClr val="F1F5F9"/>
+                </a:solidFill>
+                <a:latin typeface="Courier New" pitchFamily="34" charset="0"/>
+                <a:ea typeface="Courier New" pitchFamily="34" charset="-122"/>
+                <a:cs typeface="Courier New" pitchFamily="34" charset="-120"/>
+              </a:rPr>
+              <a:t>&gt; </a:t>
+            </a:r>
+            <a:r>
+              <a:rPr lang="en-US" sz="1800" dirty="0" err="1">
+                <a:solidFill>
+                  <a:srgbClr val="F1F5F9"/>
+                </a:solidFill>
+                <a:latin typeface="Courier New" pitchFamily="34" charset="0"/>
+                <a:ea typeface="Courier New" pitchFamily="34" charset="-122"/>
+                <a:cs typeface="Courier New" pitchFamily="34" charset="-120"/>
+              </a:rPr>
+              <a:t>ฉันเป็นจำนวนคี่</a:t>
+            </a:r>
+            <a:endParaRPr lang="en-US" sz="1800" dirty="0"/>
+          </a:p>
+        </p:txBody>
+      </p:sp>
+      <p:sp>
+        <p:nvSpPr>
+          <p:cNvPr id="45" name="Text 28">
+            <a:extLst>
+              <a:ext uri="{FF2B5EF4-FFF2-40B4-BE49-F238E27FC236}">
+                <a16:creationId xmlns:a16="http://schemas.microsoft.com/office/drawing/2014/main" id="{B73E96F8-0326-D9CF-D665-EEA679334367}"/>
+              </a:ext>
+            </a:extLst>
+          </p:cNvPr>
+          <p:cNvSpPr/>
+          <p:nvPr/>
+        </p:nvSpPr>
+        <p:spPr>
+          <a:xfrm>
+            <a:off x="1005840" y="4168996"/>
+            <a:ext cx="5669280" cy="491618"/>
+          </a:xfrm>
+          <a:prstGeom prst="rect">
+            <a:avLst/>
+          </a:prstGeom>
+          <a:noFill/>
+          <a:ln/>
+        </p:spPr>
+        <p:txBody>
+          <a:bodyPr wrap="square" lIns="0" tIns="0" rIns="0" bIns="0" rtlCol="0" anchor="ctr"/>
+          <a:lstStyle/>
+          <a:p>
+            <a:pPr marL="0" indent="0">
+              <a:lnSpc>
+                <a:spcPct val="112000"/>
+              </a:lnSpc>
+              <a:buNone/>
+            </a:pPr>
+            <a:r>
+              <a:rPr lang="en-US" sz="1800" dirty="0">
+                <a:solidFill>
+                  <a:srgbClr val="F1F5F9"/>
+                </a:solidFill>
+                <a:latin typeface="Courier New" pitchFamily="34" charset="0"/>
+                <a:ea typeface="Courier New" pitchFamily="34" charset="-122"/>
+                <a:cs typeface="Courier New" pitchFamily="34" charset="-120"/>
+              </a:rPr>
+              <a:t>&gt; ผลบวกของเลขสองหลัก = 7</a:t>
+            </a:r>
+            <a:endParaRPr lang="en-US" sz="1800" dirty="0"/>
+          </a:p>
+        </p:txBody>
+      </p:sp>
+      <p:sp>
+        <p:nvSpPr>
+          <p:cNvPr id="46" name="Text 28">
+            <a:extLst>
+              <a:ext uri="{FF2B5EF4-FFF2-40B4-BE49-F238E27FC236}">
+                <a16:creationId xmlns:a16="http://schemas.microsoft.com/office/drawing/2014/main" id="{B245B907-7332-516A-E074-285E456C1843}"/>
+              </a:ext>
+            </a:extLst>
+          </p:cNvPr>
+          <p:cNvSpPr/>
+          <p:nvPr/>
+        </p:nvSpPr>
+        <p:spPr>
+          <a:xfrm>
+            <a:off x="1005840" y="4635828"/>
+            <a:ext cx="5669280" cy="405572"/>
+          </a:xfrm>
+          <a:prstGeom prst="rect">
+            <a:avLst/>
+          </a:prstGeom>
+          <a:noFill/>
+          <a:ln/>
+        </p:spPr>
+        <p:txBody>
+          <a:bodyPr wrap="square" lIns="0" tIns="0" rIns="0" bIns="0" rtlCol="0" anchor="ctr"/>
+          <a:lstStyle/>
+          <a:p>
+            <a:pPr marL="0" indent="0">
+              <a:lnSpc>
+                <a:spcPct val="112000"/>
+              </a:lnSpc>
+              <a:buNone/>
+            </a:pPr>
+            <a:r>
+              <a:rPr lang="en-US" sz="1800" b="1" dirty="0">
+                <a:solidFill>
+                  <a:srgbClr val="22D3EE"/>
+                </a:solidFill>
+                <a:latin typeface="Courier New" pitchFamily="34" charset="0"/>
+                <a:ea typeface="Courier New" pitchFamily="34" charset="-122"/>
+                <a:cs typeface="Courier New" pitchFamily="34" charset="-120"/>
+              </a:rPr>
+              <a:t>&gt; ฉันคือเลขใด ?</a:t>
+            </a:r>
+            <a:endParaRPr lang="en-US" sz="1800" dirty="0"/>
           </a:p>
         </p:txBody>
       </p:sp>
@@ -6643,6 +9370,628 @@
   <p:clrMapOvr>
     <a:masterClrMapping/>
   </p:clrMapOvr>
+  <mc:AlternateContent xmlns:mc="http://schemas.openxmlformats.org/markup-compatibility/2006">
+    <mc:Choice xmlns:p159="http://schemas.microsoft.com/office/powerpoint/2015/09/main" Requires="p159">
+      <p:transition xmlns:p14="http://schemas.microsoft.com/office/powerpoint/2010/main" spd="slow" p14:dur="2000">
+        <p159:morph option="byObject"/>
+      </p:transition>
+    </mc:Choice>
+    <mc:Fallback>
+      <p:transition spd="slow">
+        <p:fade/>
+      </p:transition>
+    </mc:Fallback>
+  </mc:AlternateContent>
+  <p:timing>
+    <p:tnLst>
+      <p:par>
+        <p:cTn id="1" dur="indefinite" restart="never" nodeType="tmRoot">
+          <p:childTnLst>
+            <p:seq concurrent="1" nextAc="seek">
+              <p:cTn id="2" dur="indefinite" nodeType="mainSeq">
+                <p:childTnLst>
+                  <p:par>
+                    <p:cTn id="3" fill="hold">
+                      <p:stCondLst>
+                        <p:cond delay="indefinite"/>
+                      </p:stCondLst>
+                      <p:childTnLst>
+                        <p:par>
+                          <p:cTn id="4" fill="hold">
+                            <p:stCondLst>
+                              <p:cond delay="0"/>
+                            </p:stCondLst>
+                            <p:childTnLst>
+                              <p:par>
+                                <p:cTn id="5" presetID="16" presetClass="entr" presetSubtype="21" fill="hold" grpId="0" nodeType="clickEffect">
+                                  <p:stCondLst>
+                                    <p:cond delay="0"/>
+                                  </p:stCondLst>
+                                  <p:childTnLst>
+                                    <p:set>
+                                      <p:cBhvr>
+                                        <p:cTn id="6" dur="1" fill="hold">
+                                          <p:stCondLst>
+                                            <p:cond delay="0"/>
+                                          </p:stCondLst>
+                                        </p:cTn>
+                                        <p:tgtEl>
+                                          <p:spTgt spid="41"/>
+                                        </p:tgtEl>
+                                        <p:attrNameLst>
+                                          <p:attrName>style.visibility</p:attrName>
+                                        </p:attrNameLst>
+                                      </p:cBhvr>
+                                      <p:to>
+                                        <p:strVal val="visible"/>
+                                      </p:to>
+                                    </p:set>
+                                    <p:animEffect transition="in" filter="barn(inVertical)">
+                                      <p:cBhvr>
+                                        <p:cTn id="7" dur="500"/>
+                                        <p:tgtEl>
+                                          <p:spTgt spid="41"/>
+                                        </p:tgtEl>
+                                      </p:cBhvr>
+                                    </p:animEffect>
+                                  </p:childTnLst>
+                                </p:cTn>
+                              </p:par>
+                            </p:childTnLst>
+                          </p:cTn>
+                        </p:par>
+                      </p:childTnLst>
+                    </p:cTn>
+                  </p:par>
+                  <p:par>
+                    <p:cTn id="8" fill="hold">
+                      <p:stCondLst>
+                        <p:cond delay="indefinite"/>
+                      </p:stCondLst>
+                      <p:childTnLst>
+                        <p:par>
+                          <p:cTn id="9" fill="hold">
+                            <p:stCondLst>
+                              <p:cond delay="0"/>
+                            </p:stCondLst>
+                            <p:childTnLst>
+                              <p:par>
+                                <p:cTn id="10" presetID="16" presetClass="entr" presetSubtype="21" fill="hold" grpId="0" nodeType="clickEffect">
+                                  <p:stCondLst>
+                                    <p:cond delay="0"/>
+                                  </p:stCondLst>
+                                  <p:childTnLst>
+                                    <p:set>
+                                      <p:cBhvr>
+                                        <p:cTn id="11" dur="1" fill="hold">
+                                          <p:stCondLst>
+                                            <p:cond delay="0"/>
+                                          </p:stCondLst>
+                                        </p:cTn>
+                                        <p:tgtEl>
+                                          <p:spTgt spid="42"/>
+                                        </p:tgtEl>
+                                        <p:attrNameLst>
+                                          <p:attrName>style.visibility</p:attrName>
+                                        </p:attrNameLst>
+                                      </p:cBhvr>
+                                      <p:to>
+                                        <p:strVal val="visible"/>
+                                      </p:to>
+                                    </p:set>
+                                    <p:animEffect transition="in" filter="barn(inVertical)">
+                                      <p:cBhvr>
+                                        <p:cTn id="12" dur="500"/>
+                                        <p:tgtEl>
+                                          <p:spTgt spid="42"/>
+                                        </p:tgtEl>
+                                      </p:cBhvr>
+                                    </p:animEffect>
+                                  </p:childTnLst>
+                                </p:cTn>
+                              </p:par>
+                            </p:childTnLst>
+                          </p:cTn>
+                        </p:par>
+                      </p:childTnLst>
+                    </p:cTn>
+                  </p:par>
+                  <p:par>
+                    <p:cTn id="13" fill="hold">
+                      <p:stCondLst>
+                        <p:cond delay="indefinite"/>
+                      </p:stCondLst>
+                      <p:childTnLst>
+                        <p:par>
+                          <p:cTn id="14" fill="hold">
+                            <p:stCondLst>
+                              <p:cond delay="0"/>
+                            </p:stCondLst>
+                            <p:childTnLst>
+                              <p:par>
+                                <p:cTn id="15" presetID="16" presetClass="entr" presetSubtype="21" fill="hold" grpId="0" nodeType="clickEffect">
+                                  <p:stCondLst>
+                                    <p:cond delay="0"/>
+                                  </p:stCondLst>
+                                  <p:childTnLst>
+                                    <p:set>
+                                      <p:cBhvr>
+                                        <p:cTn id="16" dur="1" fill="hold">
+                                          <p:stCondLst>
+                                            <p:cond delay="0"/>
+                                          </p:stCondLst>
+                                        </p:cTn>
+                                        <p:tgtEl>
+                                          <p:spTgt spid="43"/>
+                                        </p:tgtEl>
+                                        <p:attrNameLst>
+                                          <p:attrName>style.visibility</p:attrName>
+                                        </p:attrNameLst>
+                                      </p:cBhvr>
+                                      <p:to>
+                                        <p:strVal val="visible"/>
+                                      </p:to>
+                                    </p:set>
+                                    <p:animEffect transition="in" filter="barn(inVertical)">
+                                      <p:cBhvr>
+                                        <p:cTn id="17" dur="500"/>
+                                        <p:tgtEl>
+                                          <p:spTgt spid="43"/>
+                                        </p:tgtEl>
+                                      </p:cBhvr>
+                                    </p:animEffect>
+                                  </p:childTnLst>
+                                </p:cTn>
+                              </p:par>
+                            </p:childTnLst>
+                          </p:cTn>
+                        </p:par>
+                      </p:childTnLst>
+                    </p:cTn>
+                  </p:par>
+                  <p:par>
+                    <p:cTn id="18" fill="hold">
+                      <p:stCondLst>
+                        <p:cond delay="indefinite"/>
+                      </p:stCondLst>
+                      <p:childTnLst>
+                        <p:par>
+                          <p:cTn id="19" fill="hold">
+                            <p:stCondLst>
+                              <p:cond delay="0"/>
+                            </p:stCondLst>
+                            <p:childTnLst>
+                              <p:par>
+                                <p:cTn id="20" presetID="16" presetClass="entr" presetSubtype="21" fill="hold" grpId="0" nodeType="clickEffect">
+                                  <p:stCondLst>
+                                    <p:cond delay="0"/>
+                                  </p:stCondLst>
+                                  <p:childTnLst>
+                                    <p:set>
+                                      <p:cBhvr>
+                                        <p:cTn id="21" dur="1" fill="hold">
+                                          <p:stCondLst>
+                                            <p:cond delay="0"/>
+                                          </p:stCondLst>
+                                        </p:cTn>
+                                        <p:tgtEl>
+                                          <p:spTgt spid="44"/>
+                                        </p:tgtEl>
+                                        <p:attrNameLst>
+                                          <p:attrName>style.visibility</p:attrName>
+                                        </p:attrNameLst>
+                                      </p:cBhvr>
+                                      <p:to>
+                                        <p:strVal val="visible"/>
+                                      </p:to>
+                                    </p:set>
+                                    <p:animEffect transition="in" filter="barn(inVertical)">
+                                      <p:cBhvr>
+                                        <p:cTn id="22" dur="500"/>
+                                        <p:tgtEl>
+                                          <p:spTgt spid="44"/>
+                                        </p:tgtEl>
+                                      </p:cBhvr>
+                                    </p:animEffect>
+                                  </p:childTnLst>
+                                </p:cTn>
+                              </p:par>
+                            </p:childTnLst>
+                          </p:cTn>
+                        </p:par>
+                      </p:childTnLst>
+                    </p:cTn>
+                  </p:par>
+                  <p:par>
+                    <p:cTn id="23" fill="hold">
+                      <p:stCondLst>
+                        <p:cond delay="indefinite"/>
+                      </p:stCondLst>
+                      <p:childTnLst>
+                        <p:par>
+                          <p:cTn id="24" fill="hold">
+                            <p:stCondLst>
+                              <p:cond delay="0"/>
+                            </p:stCondLst>
+                            <p:childTnLst>
+                              <p:par>
+                                <p:cTn id="25" presetID="16" presetClass="entr" presetSubtype="21" fill="hold" grpId="0" nodeType="clickEffect">
+                                  <p:stCondLst>
+                                    <p:cond delay="0"/>
+                                  </p:stCondLst>
+                                  <p:childTnLst>
+                                    <p:set>
+                                      <p:cBhvr>
+                                        <p:cTn id="26" dur="1" fill="hold">
+                                          <p:stCondLst>
+                                            <p:cond delay="0"/>
+                                          </p:stCondLst>
+                                        </p:cTn>
+                                        <p:tgtEl>
+                                          <p:spTgt spid="45"/>
+                                        </p:tgtEl>
+                                        <p:attrNameLst>
+                                          <p:attrName>style.visibility</p:attrName>
+                                        </p:attrNameLst>
+                                      </p:cBhvr>
+                                      <p:to>
+                                        <p:strVal val="visible"/>
+                                      </p:to>
+                                    </p:set>
+                                    <p:animEffect transition="in" filter="barn(inVertical)">
+                                      <p:cBhvr>
+                                        <p:cTn id="27" dur="500"/>
+                                        <p:tgtEl>
+                                          <p:spTgt spid="45"/>
+                                        </p:tgtEl>
+                                      </p:cBhvr>
+                                    </p:animEffect>
+                                  </p:childTnLst>
+                                </p:cTn>
+                              </p:par>
+                            </p:childTnLst>
+                          </p:cTn>
+                        </p:par>
+                      </p:childTnLst>
+                    </p:cTn>
+                  </p:par>
+                  <p:par>
+                    <p:cTn id="28" fill="hold">
+                      <p:stCondLst>
+                        <p:cond delay="indefinite"/>
+                      </p:stCondLst>
+                      <p:childTnLst>
+                        <p:par>
+                          <p:cTn id="29" fill="hold">
+                            <p:stCondLst>
+                              <p:cond delay="0"/>
+                            </p:stCondLst>
+                            <p:childTnLst>
+                              <p:par>
+                                <p:cTn id="30" presetID="16" presetClass="entr" presetSubtype="21" fill="hold" grpId="0" nodeType="clickEffect">
+                                  <p:stCondLst>
+                                    <p:cond delay="0"/>
+                                  </p:stCondLst>
+                                  <p:childTnLst>
+                                    <p:set>
+                                      <p:cBhvr>
+                                        <p:cTn id="31" dur="1" fill="hold">
+                                          <p:stCondLst>
+                                            <p:cond delay="0"/>
+                                          </p:stCondLst>
+                                        </p:cTn>
+                                        <p:tgtEl>
+                                          <p:spTgt spid="46"/>
+                                        </p:tgtEl>
+                                        <p:attrNameLst>
+                                          <p:attrName>style.visibility</p:attrName>
+                                        </p:attrNameLst>
+                                      </p:cBhvr>
+                                      <p:to>
+                                        <p:strVal val="visible"/>
+                                      </p:to>
+                                    </p:set>
+                                    <p:animEffect transition="in" filter="barn(inVertical)">
+                                      <p:cBhvr>
+                                        <p:cTn id="32" dur="500"/>
+                                        <p:tgtEl>
+                                          <p:spTgt spid="46"/>
+                                        </p:tgtEl>
+                                      </p:cBhvr>
+                                    </p:animEffect>
+                                  </p:childTnLst>
+                                </p:cTn>
+                              </p:par>
+                            </p:childTnLst>
+                          </p:cTn>
+                        </p:par>
+                      </p:childTnLst>
+                    </p:cTn>
+                  </p:par>
+                  <p:par>
+                    <p:cTn id="33" fill="hold">
+                      <p:stCondLst>
+                        <p:cond delay="indefinite"/>
+                      </p:stCondLst>
+                      <p:childTnLst>
+                        <p:par>
+                          <p:cTn id="34" fill="hold">
+                            <p:stCondLst>
+                              <p:cond delay="0"/>
+                            </p:stCondLst>
+                            <p:childTnLst>
+                              <p:par>
+                                <p:cTn id="35" presetID="2" presetClass="entr" presetSubtype="4" fill="hold" grpId="0" nodeType="clickEffect">
+                                  <p:stCondLst>
+                                    <p:cond delay="0"/>
+                                  </p:stCondLst>
+                                  <p:childTnLst>
+                                    <p:set>
+                                      <p:cBhvr>
+                                        <p:cTn id="36" dur="1" fill="hold">
+                                          <p:stCondLst>
+                                            <p:cond delay="0"/>
+                                          </p:stCondLst>
+                                        </p:cTn>
+                                        <p:tgtEl>
+                                          <p:spTgt spid="33"/>
+                                        </p:tgtEl>
+                                        <p:attrNameLst>
+                                          <p:attrName>style.visibility</p:attrName>
+                                        </p:attrNameLst>
+                                      </p:cBhvr>
+                                      <p:to>
+                                        <p:strVal val="visible"/>
+                                      </p:to>
+                                    </p:set>
+                                    <p:anim calcmode="lin" valueType="num">
+                                      <p:cBhvr additive="base">
+                                        <p:cTn id="37" dur="500" fill="hold"/>
+                                        <p:tgtEl>
+                                          <p:spTgt spid="33"/>
+                                        </p:tgtEl>
+                                        <p:attrNameLst>
+                                          <p:attrName>ppt_x</p:attrName>
+                                        </p:attrNameLst>
+                                      </p:cBhvr>
+                                      <p:tavLst>
+                                        <p:tav tm="0">
+                                          <p:val>
+                                            <p:strVal val="#ppt_x"/>
+                                          </p:val>
+                                        </p:tav>
+                                        <p:tav tm="100000">
+                                          <p:val>
+                                            <p:strVal val="#ppt_x"/>
+                                          </p:val>
+                                        </p:tav>
+                                      </p:tavLst>
+                                    </p:anim>
+                                    <p:anim calcmode="lin" valueType="num">
+                                      <p:cBhvr additive="base">
+                                        <p:cTn id="38" dur="500" fill="hold"/>
+                                        <p:tgtEl>
+                                          <p:spTgt spid="33"/>
+                                        </p:tgtEl>
+                                        <p:attrNameLst>
+                                          <p:attrName>ppt_y</p:attrName>
+                                        </p:attrNameLst>
+                                      </p:cBhvr>
+                                      <p:tavLst>
+                                        <p:tav tm="0">
+                                          <p:val>
+                                            <p:strVal val="1+#ppt_h/2"/>
+                                          </p:val>
+                                        </p:tav>
+                                        <p:tav tm="100000">
+                                          <p:val>
+                                            <p:strVal val="#ppt_y"/>
+                                          </p:val>
+                                        </p:tav>
+                                      </p:tavLst>
+                                    </p:anim>
+                                  </p:childTnLst>
+                                </p:cTn>
+                              </p:par>
+                            </p:childTnLst>
+                          </p:cTn>
+                        </p:par>
+                      </p:childTnLst>
+                    </p:cTn>
+                  </p:par>
+                  <p:par>
+                    <p:cTn id="39" fill="hold">
+                      <p:stCondLst>
+                        <p:cond delay="indefinite"/>
+                      </p:stCondLst>
+                      <p:childTnLst>
+                        <p:par>
+                          <p:cTn id="40" fill="hold">
+                            <p:stCondLst>
+                              <p:cond delay="0"/>
+                            </p:stCondLst>
+                            <p:childTnLst>
+                              <p:par>
+                                <p:cTn id="41" presetID="9" presetClass="entr" presetSubtype="0" fill="hold" grpId="0" nodeType="clickEffect">
+                                  <p:stCondLst>
+                                    <p:cond delay="0"/>
+                                  </p:stCondLst>
+                                  <p:childTnLst>
+                                    <p:set>
+                                      <p:cBhvr>
+                                        <p:cTn id="42" dur="1" fill="hold">
+                                          <p:stCondLst>
+                                            <p:cond delay="0"/>
+                                          </p:stCondLst>
+                                        </p:cTn>
+                                        <p:tgtEl>
+                                          <p:spTgt spid="36"/>
+                                        </p:tgtEl>
+                                        <p:attrNameLst>
+                                          <p:attrName>style.visibility</p:attrName>
+                                        </p:attrNameLst>
+                                      </p:cBhvr>
+                                      <p:to>
+                                        <p:strVal val="visible"/>
+                                      </p:to>
+                                    </p:set>
+                                    <p:animEffect transition="in" filter="dissolve">
+                                      <p:cBhvr>
+                                        <p:cTn id="43" dur="500"/>
+                                        <p:tgtEl>
+                                          <p:spTgt spid="36"/>
+                                        </p:tgtEl>
+                                      </p:cBhvr>
+                                    </p:animEffect>
+                                  </p:childTnLst>
+                                </p:cTn>
+                              </p:par>
+                            </p:childTnLst>
+                          </p:cTn>
+                        </p:par>
+                      </p:childTnLst>
+                    </p:cTn>
+                  </p:par>
+                  <p:par>
+                    <p:cTn id="44" fill="hold">
+                      <p:stCondLst>
+                        <p:cond delay="indefinite"/>
+                      </p:stCondLst>
+                      <p:childTnLst>
+                        <p:par>
+                          <p:cTn id="45" fill="hold">
+                            <p:stCondLst>
+                              <p:cond delay="0"/>
+                            </p:stCondLst>
+                            <p:childTnLst>
+                              <p:par>
+                                <p:cTn id="46" presetID="22" presetClass="entr" presetSubtype="4" fill="hold" grpId="0" nodeType="clickEffect">
+                                  <p:stCondLst>
+                                    <p:cond delay="0"/>
+                                  </p:stCondLst>
+                                  <p:childTnLst>
+                                    <p:set>
+                                      <p:cBhvr>
+                                        <p:cTn id="47" dur="1" fill="hold">
+                                          <p:stCondLst>
+                                            <p:cond delay="0"/>
+                                          </p:stCondLst>
+                                        </p:cTn>
+                                        <p:tgtEl>
+                                          <p:spTgt spid="37"/>
+                                        </p:tgtEl>
+                                        <p:attrNameLst>
+                                          <p:attrName>style.visibility</p:attrName>
+                                        </p:attrNameLst>
+                                      </p:cBhvr>
+                                      <p:to>
+                                        <p:strVal val="visible"/>
+                                      </p:to>
+                                    </p:set>
+                                    <p:animEffect transition="in" filter="wipe(down)">
+                                      <p:cBhvr>
+                                        <p:cTn id="48" dur="500"/>
+                                        <p:tgtEl>
+                                          <p:spTgt spid="37"/>
+                                        </p:tgtEl>
+                                      </p:cBhvr>
+                                    </p:animEffect>
+                                  </p:childTnLst>
+                                </p:cTn>
+                              </p:par>
+                            </p:childTnLst>
+                          </p:cTn>
+                        </p:par>
+                      </p:childTnLst>
+                    </p:cTn>
+                  </p:par>
+                  <p:par>
+                    <p:cTn id="49" fill="hold">
+                      <p:stCondLst>
+                        <p:cond delay="indefinite"/>
+                      </p:stCondLst>
+                      <p:childTnLst>
+                        <p:par>
+                          <p:cTn id="50" fill="hold">
+                            <p:stCondLst>
+                              <p:cond delay="0"/>
+                            </p:stCondLst>
+                            <p:childTnLst>
+                              <p:par>
+                                <p:cTn id="51" presetID="10" presetClass="entr" presetSubtype="0" fill="hold" grpId="0" nodeType="clickEffect">
+                                  <p:stCondLst>
+                                    <p:cond delay="0"/>
+                                  </p:stCondLst>
+                                  <p:childTnLst>
+                                    <p:set>
+                                      <p:cBhvr>
+                                        <p:cTn id="52" dur="1" fill="hold">
+                                          <p:stCondLst>
+                                            <p:cond delay="0"/>
+                                          </p:stCondLst>
+                                        </p:cTn>
+                                        <p:tgtEl>
+                                          <p:spTgt spid="40"/>
+                                        </p:tgtEl>
+                                        <p:attrNameLst>
+                                          <p:attrName>style.visibility</p:attrName>
+                                        </p:attrNameLst>
+                                      </p:cBhvr>
+                                      <p:to>
+                                        <p:strVal val="visible"/>
+                                      </p:to>
+                                    </p:set>
+                                    <p:animEffect transition="in" filter="fade">
+                                      <p:cBhvr>
+                                        <p:cTn id="53" dur="500"/>
+                                        <p:tgtEl>
+                                          <p:spTgt spid="40"/>
+                                        </p:tgtEl>
+                                      </p:cBhvr>
+                                    </p:animEffect>
+                                  </p:childTnLst>
+                                </p:cTn>
+                              </p:par>
+                            </p:childTnLst>
+                          </p:cTn>
+                        </p:par>
+                      </p:childTnLst>
+                    </p:cTn>
+                  </p:par>
+                </p:childTnLst>
+              </p:cTn>
+              <p:prevCondLst>
+                <p:cond evt="onPrev" delay="0">
+                  <p:tgtEl>
+                    <p:sldTgt/>
+                  </p:tgtEl>
+                </p:cond>
+              </p:prevCondLst>
+              <p:nextCondLst>
+                <p:cond evt="onNext" delay="0">
+                  <p:tgtEl>
+                    <p:sldTgt/>
+                  </p:tgtEl>
+                </p:cond>
+              </p:nextCondLst>
+            </p:seq>
+          </p:childTnLst>
+        </p:cTn>
+      </p:par>
+    </p:tnLst>
+    <p:bldLst>
+      <p:bldP spid="33" grpId="0" animBg="1"/>
+      <p:bldP spid="36" grpId="0" animBg="1"/>
+      <p:bldP spid="37" grpId="0" animBg="1"/>
+      <p:bldP spid="40" grpId="0" animBg="1"/>
+      <p:bldP spid="41" grpId="0" animBg="1"/>
+      <p:bldP spid="42" grpId="0" animBg="1"/>
+      <p:bldP spid="43" grpId="0" animBg="1"/>
+      <p:bldP spid="44" grpId="0" animBg="1"/>
+      <p:bldP spid="45" grpId="0" animBg="1"/>
+      <p:bldP spid="46" grpId="0" animBg="1"/>
+    </p:bldLst>
+  </p:timing>
 </p:sld>
 </file>
 
@@ -6654,6 +10003,7 @@
         <a:solidFill>
           <a:srgbClr val="0B1020"/>
         </a:solidFill>
+        <a:effectLst/>
       </p:bgPr>
     </p:bg>
     <p:spTree>
@@ -7219,11 +10569,11 @@
           <a:bodyPr wrap="square" lIns="0" tIns="0" rIns="0" bIns="0" rtlCol="0" anchor="ctr"/>
           <a:lstStyle/>
           <a:p>
-            <a:pPr indent="0" marL="0">
+            <a:pPr marL="0" indent="0">
               <a:buNone/>
             </a:pPr>
             <a:r>
-              <a:rPr lang="en-US" sz="1300" b="1" spc="300" kern="0" dirty="0">
+              <a:rPr lang="en-US" sz="1300" b="1" kern="0" spc="300" dirty="0">
                 <a:solidFill>
                   <a:srgbClr val="22D3EE"/>
                 </a:solidFill>
@@ -7258,7 +10608,7 @@
           <a:bodyPr wrap="square" lIns="0" tIns="0" rIns="0" bIns="0" rtlCol="0" anchor="ctr"/>
           <a:lstStyle/>
           <a:p>
-            <a:pPr indent="0" marL="0">
+            <a:pPr marL="0" indent="0">
               <a:buNone/>
             </a:pPr>
             <a:r>
@@ -7302,7 +10652,7 @@
             <a:prstDash val="solid"/>
           </a:ln>
           <a:effectLst>
-            <a:outerShdw sx="100000" sy="100000" kx="0" ky="0" algn="bl" rotWithShape="0" blurRad="127000" dist="38100" dir="5400000">
+            <a:outerShdw blurRad="127000" dist="38100" dir="5400000" algn="bl" rotWithShape="0">
               <a:srgbClr val="000000">
                 <a:alpha val="35000"/>
               </a:srgbClr>
@@ -7331,12 +10681,33 @@
           <a:bodyPr wrap="square" lIns="0" tIns="0" rIns="0" bIns="0" rtlCol="0" anchor="ctr"/>
           <a:lstStyle/>
           <a:p>
-            <a:pPr indent="0" marL="0">
+            <a:pPr>
               <a:lnSpc>
                 <a:spcPct val="105000"/>
               </a:lnSpc>
-              <a:buNone/>
             </a:pPr>
+            <a:r>
+              <a:rPr lang="th-TH" sz="2700" dirty="0">
+                <a:solidFill>
+                  <a:srgbClr val="F1F5F9"/>
+                </a:solidFill>
+                <a:latin typeface="TH Sarabun New" pitchFamily="34" charset="0"/>
+                <a:ea typeface="TH Sarabun New" pitchFamily="34" charset="-122"/>
+                <a:cs typeface="TH Sarabun New" pitchFamily="34" charset="-120"/>
+              </a:rPr>
+              <a:t>การ</a:t>
+            </a:r>
+            <a:r>
+              <a:rPr lang="en-US" sz="2700" dirty="0" err="1">
+                <a:solidFill>
+                  <a:srgbClr val="F1F5F9"/>
+                </a:solidFill>
+                <a:latin typeface="TH Sarabun New" pitchFamily="34" charset="0"/>
+                <a:ea typeface="TH Sarabun New" pitchFamily="34" charset="-122"/>
+                <a:cs typeface="TH Sarabun New" pitchFamily="34" charset="-120"/>
+              </a:rPr>
+              <a:t>นำ</a:t>
+            </a:r>
             <a:r>
               <a:rPr lang="en-US" sz="2700" dirty="0">
                 <a:solidFill>
@@ -7346,16 +10717,32 @@
                 <a:ea typeface="TH Sarabun New" pitchFamily="34" charset="-122"/>
                 <a:cs typeface="TH Sarabun New" pitchFamily="34" charset="-120"/>
               </a:rPr>
-              <a:t>นำ </a:t>
+              <a:t> </a:t>
             </a:r>
-            <a:pPr indent="0" marL="0">
-              <a:lnSpc>
-                <a:spcPct val="105000"/>
-              </a:lnSpc>
-              <a:buNone/>
-            </a:pPr>
             <a:r>
-              <a:rPr lang="en-US" sz="2700" b="1" dirty="0">
+              <a:rPr lang="th-TH" sz="2700" b="1" dirty="0">
+                <a:solidFill>
+                  <a:srgbClr val="22D3EE"/>
+                </a:solidFill>
+                <a:latin typeface="TH Sarabun New" pitchFamily="34" charset="0"/>
+                <a:ea typeface="TH Sarabun New" pitchFamily="34" charset="-122"/>
+                <a:cs typeface="TH Sarabun New" pitchFamily="34" charset="-120"/>
+              </a:rPr>
+              <a:t>กฎเกณฑ์ หรือ</a:t>
+            </a:r>
+            <a:r>
+              <a:rPr lang="en-US" sz="2700" dirty="0">
+                <a:solidFill>
+                  <a:srgbClr val="F1F5F9"/>
+                </a:solidFill>
+                <a:latin typeface="TH Sarabun New" pitchFamily="34" charset="0"/>
+                <a:ea typeface="TH Sarabun New" pitchFamily="34" charset="-122"/>
+                <a:cs typeface="TH Sarabun New" pitchFamily="34" charset="-120"/>
+              </a:rPr>
+              <a:t> </a:t>
+            </a:r>
+            <a:r>
+              <a:rPr lang="en-US" sz="2700" b="1" dirty="0" err="1">
                 <a:solidFill>
                   <a:srgbClr val="22D3EE"/>
                 </a:solidFill>
@@ -7365,12 +10752,28 @@
               </a:rPr>
               <a:t>เงื่อนไขที่ครอบคลุมทุกกรณี</a:t>
             </a:r>
-            <a:pPr indent="0" marL="0">
-              <a:lnSpc>
-                <a:spcPct val="105000"/>
-              </a:lnSpc>
-              <a:buNone/>
-            </a:pPr>
+            <a:r>
+              <a:rPr lang="th-TH" sz="2700" b="1" dirty="0">
+                <a:solidFill>
+                  <a:srgbClr val="22D3EE"/>
+                </a:solidFill>
+                <a:latin typeface="TH Sarabun New" pitchFamily="34" charset="0"/>
+                <a:ea typeface="TH Sarabun New" pitchFamily="34" charset="-122"/>
+                <a:cs typeface="TH Sarabun New" pitchFamily="34" charset="-120"/>
+              </a:rPr>
+              <a:t> </a:t>
+            </a:r>
+            <a:r>
+              <a:rPr lang="en-US" sz="2700" dirty="0" err="1">
+                <a:solidFill>
+                  <a:srgbClr val="F1F5F9"/>
+                </a:solidFill>
+                <a:latin typeface="TH Sarabun New" pitchFamily="34" charset="0"/>
+                <a:ea typeface="TH Sarabun New" pitchFamily="34" charset="-122"/>
+                <a:cs typeface="TH Sarabun New" pitchFamily="34" charset="-120"/>
+              </a:rPr>
+              <a:t>มาพิจารณา</a:t>
+            </a:r>
             <a:r>
               <a:rPr lang="en-US" sz="2700" dirty="0">
                 <a:solidFill>
@@ -7380,16 +10783,32 @@
                 <a:ea typeface="TH Sarabun New" pitchFamily="34" charset="-122"/>
                 <a:cs typeface="TH Sarabun New" pitchFamily="34" charset="-120"/>
               </a:rPr>
-              <a:t> มาพิจารณา เพื่อหา </a:t>
+              <a:t> </a:t>
             </a:r>
-            <a:pPr indent="0" marL="0">
-              <a:lnSpc>
-                <a:spcPct val="105000"/>
-              </a:lnSpc>
-              <a:buNone/>
-            </a:pPr>
             <a:r>
-              <a:rPr lang="en-US" sz="2700" b="1" dirty="0">
+              <a:rPr lang="en-US" sz="2700" dirty="0" err="1">
+                <a:solidFill>
+                  <a:srgbClr val="F1F5F9"/>
+                </a:solidFill>
+                <a:latin typeface="TH Sarabun New" pitchFamily="34" charset="0"/>
+                <a:ea typeface="TH Sarabun New" pitchFamily="34" charset="-122"/>
+                <a:cs typeface="TH Sarabun New" pitchFamily="34" charset="-120"/>
+              </a:rPr>
+              <a:t>เพื่อหา</a:t>
+            </a:r>
+            <a:r>
+              <a:rPr lang="en-US" sz="2700" dirty="0">
+                <a:solidFill>
+                  <a:srgbClr val="F1F5F9"/>
+                </a:solidFill>
+                <a:latin typeface="TH Sarabun New" pitchFamily="34" charset="0"/>
+                <a:ea typeface="TH Sarabun New" pitchFamily="34" charset="-122"/>
+                <a:cs typeface="TH Sarabun New" pitchFamily="34" charset="-120"/>
+              </a:rPr>
+              <a:t> </a:t>
+            </a:r>
+            <a:r>
+              <a:rPr lang="en-US" sz="2700" b="1" dirty="0" err="1">
                 <a:solidFill>
                   <a:srgbClr val="34D399"/>
                 </a:solidFill>
@@ -7397,7 +10816,18 @@
                 <a:ea typeface="TH Sarabun New" pitchFamily="34" charset="-122"/>
                 <a:cs typeface="TH Sarabun New" pitchFamily="34" charset="-120"/>
               </a:rPr>
-              <a:t>คำตอบที่ถูกต้องเพียงหนึ่งเดียว</a:t>
+              <a:t>คำตอบ</a:t>
+            </a:r>
+            <a:r>
+              <a:rPr lang="th-TH" sz="2700" b="1" dirty="0">
+                <a:solidFill>
+                  <a:srgbClr val="34D399"/>
+                </a:solidFill>
+                <a:latin typeface="TH Sarabun New" pitchFamily="34" charset="0"/>
+                <a:ea typeface="TH Sarabun New" pitchFamily="34" charset="-122"/>
+                <a:cs typeface="TH Sarabun New" pitchFamily="34" charset="-120"/>
+              </a:rPr>
+              <a:t>หรือการคาดการณ์ผลลัพธ์</a:t>
             </a:r>
             <a:endParaRPr lang="en-US" sz="2700" dirty="0"/>
           </a:p>
@@ -7429,7 +10859,7 @@
             <a:prstDash val="solid"/>
           </a:ln>
           <a:effectLst>
-            <a:outerShdw sx="100000" sy="100000" kx="0" ky="0" algn="bl" rotWithShape="0" blurRad="127000" dist="38100" dir="5400000">
+            <a:outerShdw blurRad="127000" dist="38100" dir="5400000" algn="bl" rotWithShape="0">
               <a:srgbClr val="000000">
                 <a:alpha val="35000"/>
               </a:srgbClr>
@@ -7458,7 +10888,7 @@
           <a:bodyPr wrap="square" lIns="0" tIns="0" rIns="0" bIns="0" rtlCol="0" anchor="ctr"/>
           <a:lstStyle/>
           <a:p>
-            <a:pPr indent="0" marL="0">
+            <a:pPr marL="0" indent="0">
               <a:buNone/>
             </a:pPr>
             <a:r>
@@ -7497,7 +10927,7 @@
           <a:bodyPr wrap="square" lIns="0" tIns="0" rIns="0" bIns="0" rtlCol="0" anchor="ctr"/>
           <a:lstStyle/>
           <a:p>
-            <a:pPr indent="0" marL="0">
+            <a:pPr marL="0" indent="0">
               <a:buNone/>
             </a:pPr>
             <a:r>
@@ -7541,7 +10971,7 @@
             <a:prstDash val="solid"/>
           </a:ln>
           <a:effectLst>
-            <a:outerShdw sx="100000" sy="100000" kx="0" ky="0" algn="bl" rotWithShape="0" blurRad="127000" dist="38100" dir="5400000">
+            <a:outerShdw blurRad="127000" dist="38100" dir="5400000" algn="bl" rotWithShape="0">
               <a:srgbClr val="000000">
                 <a:alpha val="35000"/>
               </a:srgbClr>
@@ -7570,7 +11000,7 @@
           <a:bodyPr wrap="square" lIns="0" tIns="0" rIns="0" bIns="0" rtlCol="0" anchor="ctr"/>
           <a:lstStyle/>
           <a:p>
-            <a:pPr indent="0" marL="0">
+            <a:pPr marL="0" indent="0">
               <a:buNone/>
             </a:pPr>
             <a:r>
@@ -7609,7 +11039,7 @@
           <a:bodyPr wrap="square" lIns="0" tIns="0" rIns="0" bIns="0" rtlCol="0" anchor="ctr"/>
           <a:lstStyle/>
           <a:p>
-            <a:pPr indent="0" marL="0">
+            <a:pPr marL="0" indent="0">
               <a:buNone/>
             </a:pPr>
             <a:r>
@@ -7653,7 +11083,7 @@
             <a:prstDash val="solid"/>
           </a:ln>
           <a:effectLst>
-            <a:outerShdw sx="100000" sy="100000" kx="0" ky="0" algn="bl" rotWithShape="0" blurRad="127000" dist="38100" dir="5400000">
+            <a:outerShdw blurRad="127000" dist="38100" dir="5400000" algn="bl" rotWithShape="0">
               <a:srgbClr val="000000">
                 <a:alpha val="35000"/>
               </a:srgbClr>
@@ -7682,7 +11112,7 @@
           <a:bodyPr wrap="square" lIns="0" tIns="0" rIns="0" bIns="0" rtlCol="0" anchor="ctr"/>
           <a:lstStyle/>
           <a:p>
-            <a:pPr indent="0" marL="0">
+            <a:pPr marL="0" indent="0">
               <a:buNone/>
             </a:pPr>
             <a:r>
@@ -7721,7 +11151,7 @@
           <a:bodyPr wrap="square" lIns="0" tIns="0" rIns="0" bIns="0" rtlCol="0" anchor="ctr"/>
           <a:lstStyle/>
           <a:p>
-            <a:pPr indent="0" marL="0">
+            <a:pPr marL="0" indent="0">
               <a:buNone/>
             </a:pPr>
             <a:r>
@@ -7744,10 +11174,1041 @@
   <p:clrMapOvr>
     <a:masterClrMapping/>
   </p:clrMapOvr>
+  <mc:AlternateContent xmlns:mc="http://schemas.openxmlformats.org/markup-compatibility/2006">
+    <mc:Choice xmlns:p159="http://schemas.microsoft.com/office/powerpoint/2015/09/main" Requires="p159">
+      <p:transition xmlns:p14="http://schemas.microsoft.com/office/powerpoint/2010/main" spd="slow" p14:dur="2000">
+        <p159:morph option="byObject"/>
+      </p:transition>
+    </mc:Choice>
+    <mc:Fallback>
+      <p:transition spd="slow">
+        <p:fade/>
+      </p:transition>
+    </mc:Fallback>
+  </mc:AlternateContent>
 </p:sld>
 </file>
 
 <file path=ppt/slides/slide5.xml><?xml version="1.0" encoding="utf-8"?>
+<p:sld xmlns:a="http://schemas.openxmlformats.org/drawingml/2006/main" xmlns:r="http://schemas.openxmlformats.org/officeDocument/2006/relationships" xmlns:p="http://schemas.openxmlformats.org/presentationml/2006/main">
+  <p:cSld>
+    <p:bg>
+      <p:bgPr>
+        <a:solidFill>
+          <a:srgbClr val="0B1020"/>
+        </a:solidFill>
+        <a:effectLst/>
+      </p:bgPr>
+    </p:bg>
+    <p:spTree>
+      <p:nvGrpSpPr>
+        <p:cNvPr id="1" name="">
+          <a:extLst>
+            <a:ext uri="{FF2B5EF4-FFF2-40B4-BE49-F238E27FC236}">
+              <a16:creationId xmlns:a16="http://schemas.microsoft.com/office/drawing/2014/main" id="{F34F3140-B5FF-AE02-D967-615B38D59220}"/>
+            </a:ext>
+          </a:extLst>
+        </p:cNvPr>
+        <p:cNvGrpSpPr/>
+        <p:nvPr/>
+      </p:nvGrpSpPr>
+      <p:grpSpPr>
+        <a:xfrm>
+          <a:off x="0" y="0"/>
+          <a:ext cx="0" cy="0"/>
+          <a:chOff x="0" y="0"/>
+          <a:chExt cx="0" cy="0"/>
+        </a:xfrm>
+      </p:grpSpPr>
+      <p:sp>
+        <p:nvSpPr>
+          <p:cNvPr id="2" name="Shape 0">
+            <a:extLst>
+              <a:ext uri="{FF2B5EF4-FFF2-40B4-BE49-F238E27FC236}">
+                <a16:creationId xmlns:a16="http://schemas.microsoft.com/office/drawing/2014/main" id="{1CBD2607-1C33-97B8-275C-B3101FECE056}"/>
+              </a:ext>
+            </a:extLst>
+          </p:cNvPr>
+          <p:cNvSpPr/>
+          <p:nvPr/>
+        </p:nvSpPr>
+        <p:spPr>
+          <a:xfrm>
+            <a:off x="10451592" y="228600"/>
+            <a:ext cx="45720" cy="45720"/>
+          </a:xfrm>
+          <a:prstGeom prst="ellipse">
+            <a:avLst/>
+          </a:prstGeom>
+          <a:solidFill>
+            <a:srgbClr val="22D3EE">
+              <a:alpha val="25000"/>
+            </a:srgbClr>
+          </a:solidFill>
+          <a:ln/>
+        </p:spPr>
+      </p:sp>
+      <p:sp>
+        <p:nvSpPr>
+          <p:cNvPr id="3" name="Shape 1">
+            <a:extLst>
+              <a:ext uri="{FF2B5EF4-FFF2-40B4-BE49-F238E27FC236}">
+                <a16:creationId xmlns:a16="http://schemas.microsoft.com/office/drawing/2014/main" id="{548E440D-EB07-E8F6-DFC2-355E66C74D51}"/>
+              </a:ext>
+            </a:extLst>
+          </p:cNvPr>
+          <p:cNvSpPr/>
+          <p:nvPr/>
+        </p:nvSpPr>
+        <p:spPr>
+          <a:xfrm>
+            <a:off x="10451592" y="502920"/>
+            <a:ext cx="45720" cy="45720"/>
+          </a:xfrm>
+          <a:prstGeom prst="ellipse">
+            <a:avLst/>
+          </a:prstGeom>
+          <a:solidFill>
+            <a:srgbClr val="22D3EE">
+              <a:alpha val="25000"/>
+            </a:srgbClr>
+          </a:solidFill>
+          <a:ln/>
+        </p:spPr>
+      </p:sp>
+      <p:sp>
+        <p:nvSpPr>
+          <p:cNvPr id="4" name="Shape 2">
+            <a:extLst>
+              <a:ext uri="{FF2B5EF4-FFF2-40B4-BE49-F238E27FC236}">
+                <a16:creationId xmlns:a16="http://schemas.microsoft.com/office/drawing/2014/main" id="{A562E18F-B1E2-54D6-9C6D-2297685D8AE0}"/>
+              </a:ext>
+            </a:extLst>
+          </p:cNvPr>
+          <p:cNvSpPr/>
+          <p:nvPr/>
+        </p:nvSpPr>
+        <p:spPr>
+          <a:xfrm>
+            <a:off x="10451592" y="777240"/>
+            <a:ext cx="45720" cy="45720"/>
+          </a:xfrm>
+          <a:prstGeom prst="ellipse">
+            <a:avLst/>
+          </a:prstGeom>
+          <a:solidFill>
+            <a:srgbClr val="22D3EE">
+              <a:alpha val="25000"/>
+            </a:srgbClr>
+          </a:solidFill>
+          <a:ln/>
+        </p:spPr>
+      </p:sp>
+      <p:sp>
+        <p:nvSpPr>
+          <p:cNvPr id="5" name="Shape 3">
+            <a:extLst>
+              <a:ext uri="{FF2B5EF4-FFF2-40B4-BE49-F238E27FC236}">
+                <a16:creationId xmlns:a16="http://schemas.microsoft.com/office/drawing/2014/main" id="{D8D462AD-969D-BB3C-9CB9-392FE3159727}"/>
+              </a:ext>
+            </a:extLst>
+          </p:cNvPr>
+          <p:cNvSpPr/>
+          <p:nvPr/>
+        </p:nvSpPr>
+        <p:spPr>
+          <a:xfrm>
+            <a:off x="10451592" y="1051560"/>
+            <a:ext cx="45720" cy="45720"/>
+          </a:xfrm>
+          <a:prstGeom prst="ellipse">
+            <a:avLst/>
+          </a:prstGeom>
+          <a:solidFill>
+            <a:srgbClr val="22D3EE">
+              <a:alpha val="25000"/>
+            </a:srgbClr>
+          </a:solidFill>
+          <a:ln/>
+        </p:spPr>
+      </p:sp>
+      <p:sp>
+        <p:nvSpPr>
+          <p:cNvPr id="6" name="Shape 4">
+            <a:extLst>
+              <a:ext uri="{FF2B5EF4-FFF2-40B4-BE49-F238E27FC236}">
+                <a16:creationId xmlns:a16="http://schemas.microsoft.com/office/drawing/2014/main" id="{B7F32FE6-C64B-D742-10FD-597891D8A6BD}"/>
+              </a:ext>
+            </a:extLst>
+          </p:cNvPr>
+          <p:cNvSpPr/>
+          <p:nvPr/>
+        </p:nvSpPr>
+        <p:spPr>
+          <a:xfrm>
+            <a:off x="10725912" y="228600"/>
+            <a:ext cx="45720" cy="45720"/>
+          </a:xfrm>
+          <a:prstGeom prst="ellipse">
+            <a:avLst/>
+          </a:prstGeom>
+          <a:solidFill>
+            <a:srgbClr val="22D3EE">
+              <a:alpha val="25000"/>
+            </a:srgbClr>
+          </a:solidFill>
+          <a:ln/>
+        </p:spPr>
+      </p:sp>
+      <p:sp>
+        <p:nvSpPr>
+          <p:cNvPr id="7" name="Shape 5">
+            <a:extLst>
+              <a:ext uri="{FF2B5EF4-FFF2-40B4-BE49-F238E27FC236}">
+                <a16:creationId xmlns:a16="http://schemas.microsoft.com/office/drawing/2014/main" id="{92CE817D-1F12-83F9-DB22-6B5AB6723C53}"/>
+              </a:ext>
+            </a:extLst>
+          </p:cNvPr>
+          <p:cNvSpPr/>
+          <p:nvPr/>
+        </p:nvSpPr>
+        <p:spPr>
+          <a:xfrm>
+            <a:off x="10725912" y="502920"/>
+            <a:ext cx="45720" cy="45720"/>
+          </a:xfrm>
+          <a:prstGeom prst="ellipse">
+            <a:avLst/>
+          </a:prstGeom>
+          <a:solidFill>
+            <a:srgbClr val="22D3EE">
+              <a:alpha val="25000"/>
+            </a:srgbClr>
+          </a:solidFill>
+          <a:ln/>
+        </p:spPr>
+      </p:sp>
+      <p:sp>
+        <p:nvSpPr>
+          <p:cNvPr id="8" name="Shape 6">
+            <a:extLst>
+              <a:ext uri="{FF2B5EF4-FFF2-40B4-BE49-F238E27FC236}">
+                <a16:creationId xmlns:a16="http://schemas.microsoft.com/office/drawing/2014/main" id="{2816717A-0250-3B7A-8CA4-93377EAB613C}"/>
+              </a:ext>
+            </a:extLst>
+          </p:cNvPr>
+          <p:cNvSpPr/>
+          <p:nvPr/>
+        </p:nvSpPr>
+        <p:spPr>
+          <a:xfrm>
+            <a:off x="10725912" y="777240"/>
+            <a:ext cx="45720" cy="45720"/>
+          </a:xfrm>
+          <a:prstGeom prst="ellipse">
+            <a:avLst/>
+          </a:prstGeom>
+          <a:solidFill>
+            <a:srgbClr val="22D3EE">
+              <a:alpha val="25000"/>
+            </a:srgbClr>
+          </a:solidFill>
+          <a:ln/>
+        </p:spPr>
+      </p:sp>
+      <p:sp>
+        <p:nvSpPr>
+          <p:cNvPr id="9" name="Shape 7">
+            <a:extLst>
+              <a:ext uri="{FF2B5EF4-FFF2-40B4-BE49-F238E27FC236}">
+                <a16:creationId xmlns:a16="http://schemas.microsoft.com/office/drawing/2014/main" id="{C8C71F95-84EF-BAAB-2911-83A06838901A}"/>
+              </a:ext>
+            </a:extLst>
+          </p:cNvPr>
+          <p:cNvSpPr/>
+          <p:nvPr/>
+        </p:nvSpPr>
+        <p:spPr>
+          <a:xfrm>
+            <a:off x="10725912" y="1051560"/>
+            <a:ext cx="45720" cy="45720"/>
+          </a:xfrm>
+          <a:prstGeom prst="ellipse">
+            <a:avLst/>
+          </a:prstGeom>
+          <a:solidFill>
+            <a:srgbClr val="22D3EE">
+              <a:alpha val="25000"/>
+            </a:srgbClr>
+          </a:solidFill>
+          <a:ln/>
+        </p:spPr>
+      </p:sp>
+      <p:sp>
+        <p:nvSpPr>
+          <p:cNvPr id="10" name="Shape 8">
+            <a:extLst>
+              <a:ext uri="{FF2B5EF4-FFF2-40B4-BE49-F238E27FC236}">
+                <a16:creationId xmlns:a16="http://schemas.microsoft.com/office/drawing/2014/main" id="{06EE7AF9-0BFA-A909-4763-2206AA6CB3D7}"/>
+              </a:ext>
+            </a:extLst>
+          </p:cNvPr>
+          <p:cNvSpPr/>
+          <p:nvPr/>
+        </p:nvSpPr>
+        <p:spPr>
+          <a:xfrm>
+            <a:off x="11000232" y="228600"/>
+            <a:ext cx="45720" cy="45720"/>
+          </a:xfrm>
+          <a:prstGeom prst="ellipse">
+            <a:avLst/>
+          </a:prstGeom>
+          <a:solidFill>
+            <a:srgbClr val="22D3EE">
+              <a:alpha val="25000"/>
+            </a:srgbClr>
+          </a:solidFill>
+          <a:ln/>
+        </p:spPr>
+      </p:sp>
+      <p:sp>
+        <p:nvSpPr>
+          <p:cNvPr id="11" name="Shape 9">
+            <a:extLst>
+              <a:ext uri="{FF2B5EF4-FFF2-40B4-BE49-F238E27FC236}">
+                <a16:creationId xmlns:a16="http://schemas.microsoft.com/office/drawing/2014/main" id="{084CFF7C-4548-CE71-D494-0FDCFFDD2209}"/>
+              </a:ext>
+            </a:extLst>
+          </p:cNvPr>
+          <p:cNvSpPr/>
+          <p:nvPr/>
+        </p:nvSpPr>
+        <p:spPr>
+          <a:xfrm>
+            <a:off x="11000232" y="502920"/>
+            <a:ext cx="45720" cy="45720"/>
+          </a:xfrm>
+          <a:prstGeom prst="ellipse">
+            <a:avLst/>
+          </a:prstGeom>
+          <a:solidFill>
+            <a:srgbClr val="22D3EE">
+              <a:alpha val="25000"/>
+            </a:srgbClr>
+          </a:solidFill>
+          <a:ln/>
+        </p:spPr>
+      </p:sp>
+      <p:sp>
+        <p:nvSpPr>
+          <p:cNvPr id="12" name="Shape 10">
+            <a:extLst>
+              <a:ext uri="{FF2B5EF4-FFF2-40B4-BE49-F238E27FC236}">
+                <a16:creationId xmlns:a16="http://schemas.microsoft.com/office/drawing/2014/main" id="{4AC90955-D815-DFBE-809F-C617C6B3D6CC}"/>
+              </a:ext>
+            </a:extLst>
+          </p:cNvPr>
+          <p:cNvSpPr/>
+          <p:nvPr/>
+        </p:nvSpPr>
+        <p:spPr>
+          <a:xfrm>
+            <a:off x="11000232" y="777240"/>
+            <a:ext cx="45720" cy="45720"/>
+          </a:xfrm>
+          <a:prstGeom prst="ellipse">
+            <a:avLst/>
+          </a:prstGeom>
+          <a:solidFill>
+            <a:srgbClr val="22D3EE">
+              <a:alpha val="25000"/>
+            </a:srgbClr>
+          </a:solidFill>
+          <a:ln/>
+        </p:spPr>
+      </p:sp>
+      <p:sp>
+        <p:nvSpPr>
+          <p:cNvPr id="13" name="Shape 11">
+            <a:extLst>
+              <a:ext uri="{FF2B5EF4-FFF2-40B4-BE49-F238E27FC236}">
+                <a16:creationId xmlns:a16="http://schemas.microsoft.com/office/drawing/2014/main" id="{C20DDB8E-8083-40F6-6658-10ACEA7E47B4}"/>
+              </a:ext>
+            </a:extLst>
+          </p:cNvPr>
+          <p:cNvSpPr/>
+          <p:nvPr/>
+        </p:nvSpPr>
+        <p:spPr>
+          <a:xfrm>
+            <a:off x="11000232" y="1051560"/>
+            <a:ext cx="45720" cy="45720"/>
+          </a:xfrm>
+          <a:prstGeom prst="ellipse">
+            <a:avLst/>
+          </a:prstGeom>
+          <a:solidFill>
+            <a:srgbClr val="22D3EE">
+              <a:alpha val="25000"/>
+            </a:srgbClr>
+          </a:solidFill>
+          <a:ln/>
+        </p:spPr>
+      </p:sp>
+      <p:sp>
+        <p:nvSpPr>
+          <p:cNvPr id="14" name="Shape 12">
+            <a:extLst>
+              <a:ext uri="{FF2B5EF4-FFF2-40B4-BE49-F238E27FC236}">
+                <a16:creationId xmlns:a16="http://schemas.microsoft.com/office/drawing/2014/main" id="{7FC150C7-BF63-89A6-2E26-54BE0A9A80E9}"/>
+              </a:ext>
+            </a:extLst>
+          </p:cNvPr>
+          <p:cNvSpPr/>
+          <p:nvPr/>
+        </p:nvSpPr>
+        <p:spPr>
+          <a:xfrm>
+            <a:off x="11274552" y="228600"/>
+            <a:ext cx="45720" cy="45720"/>
+          </a:xfrm>
+          <a:prstGeom prst="ellipse">
+            <a:avLst/>
+          </a:prstGeom>
+          <a:solidFill>
+            <a:srgbClr val="22D3EE">
+              <a:alpha val="25000"/>
+            </a:srgbClr>
+          </a:solidFill>
+          <a:ln/>
+        </p:spPr>
+      </p:sp>
+      <p:sp>
+        <p:nvSpPr>
+          <p:cNvPr id="15" name="Shape 13">
+            <a:extLst>
+              <a:ext uri="{FF2B5EF4-FFF2-40B4-BE49-F238E27FC236}">
+                <a16:creationId xmlns:a16="http://schemas.microsoft.com/office/drawing/2014/main" id="{59A73A21-7088-14D1-F69D-50444108DEAA}"/>
+              </a:ext>
+            </a:extLst>
+          </p:cNvPr>
+          <p:cNvSpPr/>
+          <p:nvPr/>
+        </p:nvSpPr>
+        <p:spPr>
+          <a:xfrm>
+            <a:off x="11274552" y="502920"/>
+            <a:ext cx="45720" cy="45720"/>
+          </a:xfrm>
+          <a:prstGeom prst="ellipse">
+            <a:avLst/>
+          </a:prstGeom>
+          <a:solidFill>
+            <a:srgbClr val="22D3EE">
+              <a:alpha val="25000"/>
+            </a:srgbClr>
+          </a:solidFill>
+          <a:ln/>
+        </p:spPr>
+      </p:sp>
+      <p:sp>
+        <p:nvSpPr>
+          <p:cNvPr id="16" name="Shape 14">
+            <a:extLst>
+              <a:ext uri="{FF2B5EF4-FFF2-40B4-BE49-F238E27FC236}">
+                <a16:creationId xmlns:a16="http://schemas.microsoft.com/office/drawing/2014/main" id="{753A84D3-AECB-1529-36C6-02932B6246D8}"/>
+              </a:ext>
+            </a:extLst>
+          </p:cNvPr>
+          <p:cNvSpPr/>
+          <p:nvPr/>
+        </p:nvSpPr>
+        <p:spPr>
+          <a:xfrm>
+            <a:off x="11274552" y="777240"/>
+            <a:ext cx="45720" cy="45720"/>
+          </a:xfrm>
+          <a:prstGeom prst="ellipse">
+            <a:avLst/>
+          </a:prstGeom>
+          <a:solidFill>
+            <a:srgbClr val="22D3EE">
+              <a:alpha val="25000"/>
+            </a:srgbClr>
+          </a:solidFill>
+          <a:ln/>
+        </p:spPr>
+      </p:sp>
+      <p:sp>
+        <p:nvSpPr>
+          <p:cNvPr id="17" name="Shape 15">
+            <a:extLst>
+              <a:ext uri="{FF2B5EF4-FFF2-40B4-BE49-F238E27FC236}">
+                <a16:creationId xmlns:a16="http://schemas.microsoft.com/office/drawing/2014/main" id="{8EF3D586-FBF5-ED5F-02C5-E296A4AA71DB}"/>
+              </a:ext>
+            </a:extLst>
+          </p:cNvPr>
+          <p:cNvSpPr/>
+          <p:nvPr/>
+        </p:nvSpPr>
+        <p:spPr>
+          <a:xfrm>
+            <a:off x="11274552" y="1051560"/>
+            <a:ext cx="45720" cy="45720"/>
+          </a:xfrm>
+          <a:prstGeom prst="ellipse">
+            <a:avLst/>
+          </a:prstGeom>
+          <a:solidFill>
+            <a:srgbClr val="22D3EE">
+              <a:alpha val="25000"/>
+            </a:srgbClr>
+          </a:solidFill>
+          <a:ln/>
+        </p:spPr>
+      </p:sp>
+      <p:sp>
+        <p:nvSpPr>
+          <p:cNvPr id="18" name="Shape 16">
+            <a:extLst>
+              <a:ext uri="{FF2B5EF4-FFF2-40B4-BE49-F238E27FC236}">
+                <a16:creationId xmlns:a16="http://schemas.microsoft.com/office/drawing/2014/main" id="{4AFEFD09-F8E9-03E9-E24B-BD8CA2AA58E1}"/>
+              </a:ext>
+            </a:extLst>
+          </p:cNvPr>
+          <p:cNvSpPr/>
+          <p:nvPr/>
+        </p:nvSpPr>
+        <p:spPr>
+          <a:xfrm>
+            <a:off x="11548872" y="228600"/>
+            <a:ext cx="45720" cy="45720"/>
+          </a:xfrm>
+          <a:prstGeom prst="ellipse">
+            <a:avLst/>
+          </a:prstGeom>
+          <a:solidFill>
+            <a:srgbClr val="22D3EE">
+              <a:alpha val="25000"/>
+            </a:srgbClr>
+          </a:solidFill>
+          <a:ln/>
+        </p:spPr>
+      </p:sp>
+      <p:sp>
+        <p:nvSpPr>
+          <p:cNvPr id="19" name="Shape 17">
+            <a:extLst>
+              <a:ext uri="{FF2B5EF4-FFF2-40B4-BE49-F238E27FC236}">
+                <a16:creationId xmlns:a16="http://schemas.microsoft.com/office/drawing/2014/main" id="{6C741F92-1921-A0D2-736D-2507DD980EAB}"/>
+              </a:ext>
+            </a:extLst>
+          </p:cNvPr>
+          <p:cNvSpPr/>
+          <p:nvPr/>
+        </p:nvSpPr>
+        <p:spPr>
+          <a:xfrm>
+            <a:off x="11548872" y="502920"/>
+            <a:ext cx="45720" cy="45720"/>
+          </a:xfrm>
+          <a:prstGeom prst="ellipse">
+            <a:avLst/>
+          </a:prstGeom>
+          <a:solidFill>
+            <a:srgbClr val="22D3EE">
+              <a:alpha val="25000"/>
+            </a:srgbClr>
+          </a:solidFill>
+          <a:ln/>
+        </p:spPr>
+      </p:sp>
+      <p:sp>
+        <p:nvSpPr>
+          <p:cNvPr id="20" name="Shape 18">
+            <a:extLst>
+              <a:ext uri="{FF2B5EF4-FFF2-40B4-BE49-F238E27FC236}">
+                <a16:creationId xmlns:a16="http://schemas.microsoft.com/office/drawing/2014/main" id="{0142E4EE-B202-64A1-38C9-F07838A06ED3}"/>
+              </a:ext>
+            </a:extLst>
+          </p:cNvPr>
+          <p:cNvSpPr/>
+          <p:nvPr/>
+        </p:nvSpPr>
+        <p:spPr>
+          <a:xfrm>
+            <a:off x="11548872" y="777240"/>
+            <a:ext cx="45720" cy="45720"/>
+          </a:xfrm>
+          <a:prstGeom prst="ellipse">
+            <a:avLst/>
+          </a:prstGeom>
+          <a:solidFill>
+            <a:srgbClr val="22D3EE">
+              <a:alpha val="25000"/>
+            </a:srgbClr>
+          </a:solidFill>
+          <a:ln/>
+        </p:spPr>
+      </p:sp>
+      <p:sp>
+        <p:nvSpPr>
+          <p:cNvPr id="21" name="Shape 19">
+            <a:extLst>
+              <a:ext uri="{FF2B5EF4-FFF2-40B4-BE49-F238E27FC236}">
+                <a16:creationId xmlns:a16="http://schemas.microsoft.com/office/drawing/2014/main" id="{B53C49E9-0963-DAB0-35C4-70BBFB4CAA1C}"/>
+              </a:ext>
+            </a:extLst>
+          </p:cNvPr>
+          <p:cNvSpPr/>
+          <p:nvPr/>
+        </p:nvSpPr>
+        <p:spPr>
+          <a:xfrm>
+            <a:off x="11548872" y="1051560"/>
+            <a:ext cx="45720" cy="45720"/>
+          </a:xfrm>
+          <a:prstGeom prst="ellipse">
+            <a:avLst/>
+          </a:prstGeom>
+          <a:solidFill>
+            <a:srgbClr val="22D3EE">
+              <a:alpha val="25000"/>
+            </a:srgbClr>
+          </a:solidFill>
+          <a:ln/>
+        </p:spPr>
+      </p:sp>
+      <p:sp>
+        <p:nvSpPr>
+          <p:cNvPr id="22" name="Shape 20">
+            <a:extLst>
+              <a:ext uri="{FF2B5EF4-FFF2-40B4-BE49-F238E27FC236}">
+                <a16:creationId xmlns:a16="http://schemas.microsoft.com/office/drawing/2014/main" id="{52D5660F-48AB-A7A2-C30A-455997B97C21}"/>
+              </a:ext>
+            </a:extLst>
+          </p:cNvPr>
+          <p:cNvSpPr/>
+          <p:nvPr/>
+        </p:nvSpPr>
+        <p:spPr>
+          <a:xfrm>
+            <a:off x="11823192" y="228600"/>
+            <a:ext cx="45720" cy="45720"/>
+          </a:xfrm>
+          <a:prstGeom prst="ellipse">
+            <a:avLst/>
+          </a:prstGeom>
+          <a:solidFill>
+            <a:srgbClr val="22D3EE">
+              <a:alpha val="25000"/>
+            </a:srgbClr>
+          </a:solidFill>
+          <a:ln/>
+        </p:spPr>
+      </p:sp>
+      <p:sp>
+        <p:nvSpPr>
+          <p:cNvPr id="23" name="Shape 21">
+            <a:extLst>
+              <a:ext uri="{FF2B5EF4-FFF2-40B4-BE49-F238E27FC236}">
+                <a16:creationId xmlns:a16="http://schemas.microsoft.com/office/drawing/2014/main" id="{950F59B6-4EF0-B900-B50D-8CA3D8899EDF}"/>
+              </a:ext>
+            </a:extLst>
+          </p:cNvPr>
+          <p:cNvSpPr/>
+          <p:nvPr/>
+        </p:nvSpPr>
+        <p:spPr>
+          <a:xfrm>
+            <a:off x="11823192" y="502920"/>
+            <a:ext cx="45720" cy="45720"/>
+          </a:xfrm>
+          <a:prstGeom prst="ellipse">
+            <a:avLst/>
+          </a:prstGeom>
+          <a:solidFill>
+            <a:srgbClr val="22D3EE">
+              <a:alpha val="25000"/>
+            </a:srgbClr>
+          </a:solidFill>
+          <a:ln/>
+        </p:spPr>
+      </p:sp>
+      <p:sp>
+        <p:nvSpPr>
+          <p:cNvPr id="24" name="Shape 22">
+            <a:extLst>
+              <a:ext uri="{FF2B5EF4-FFF2-40B4-BE49-F238E27FC236}">
+                <a16:creationId xmlns:a16="http://schemas.microsoft.com/office/drawing/2014/main" id="{9C2E0A55-BD44-9C96-C302-C73C937B6682}"/>
+              </a:ext>
+            </a:extLst>
+          </p:cNvPr>
+          <p:cNvSpPr/>
+          <p:nvPr/>
+        </p:nvSpPr>
+        <p:spPr>
+          <a:xfrm>
+            <a:off x="11823192" y="777240"/>
+            <a:ext cx="45720" cy="45720"/>
+          </a:xfrm>
+          <a:prstGeom prst="ellipse">
+            <a:avLst/>
+          </a:prstGeom>
+          <a:solidFill>
+            <a:srgbClr val="22D3EE">
+              <a:alpha val="25000"/>
+            </a:srgbClr>
+          </a:solidFill>
+          <a:ln/>
+        </p:spPr>
+      </p:sp>
+      <p:sp>
+        <p:nvSpPr>
+          <p:cNvPr id="25" name="Shape 23">
+            <a:extLst>
+              <a:ext uri="{FF2B5EF4-FFF2-40B4-BE49-F238E27FC236}">
+                <a16:creationId xmlns:a16="http://schemas.microsoft.com/office/drawing/2014/main" id="{5356DB56-C041-D51F-E905-5FAA239603EA}"/>
+              </a:ext>
+            </a:extLst>
+          </p:cNvPr>
+          <p:cNvSpPr/>
+          <p:nvPr/>
+        </p:nvSpPr>
+        <p:spPr>
+          <a:xfrm>
+            <a:off x="11823192" y="1051560"/>
+            <a:ext cx="45720" cy="45720"/>
+          </a:xfrm>
+          <a:prstGeom prst="ellipse">
+            <a:avLst/>
+          </a:prstGeom>
+          <a:solidFill>
+            <a:srgbClr val="22D3EE">
+              <a:alpha val="25000"/>
+            </a:srgbClr>
+          </a:solidFill>
+          <a:ln/>
+        </p:spPr>
+      </p:sp>
+      <p:sp>
+        <p:nvSpPr>
+          <p:cNvPr id="26" name="Text 24">
+            <a:extLst>
+              <a:ext uri="{FF2B5EF4-FFF2-40B4-BE49-F238E27FC236}">
+                <a16:creationId xmlns:a16="http://schemas.microsoft.com/office/drawing/2014/main" id="{BD74CD3F-BA82-D839-A024-88D9823ADC3C}"/>
+              </a:ext>
+            </a:extLst>
+          </p:cNvPr>
+          <p:cNvSpPr/>
+          <p:nvPr/>
+        </p:nvSpPr>
+        <p:spPr>
+          <a:xfrm>
+            <a:off x="640080" y="411480"/>
+            <a:ext cx="7315200" cy="365760"/>
+          </a:xfrm>
+          <a:prstGeom prst="rect">
+            <a:avLst/>
+          </a:prstGeom>
+          <a:noFill/>
+          <a:ln/>
+        </p:spPr>
+        <p:txBody>
+          <a:bodyPr wrap="square" lIns="0" tIns="0" rIns="0" bIns="0" rtlCol="0" anchor="ctr"/>
+          <a:lstStyle/>
+          <a:p>
+            <a:pPr marL="0" indent="0">
+              <a:buNone/>
+            </a:pPr>
+            <a:r>
+              <a:rPr lang="en-US" sz="1300" b="1" kern="0" spc="300" dirty="0">
+                <a:solidFill>
+                  <a:srgbClr val="22D3EE"/>
+                </a:solidFill>
+                <a:latin typeface="Courier New" pitchFamily="34" charset="0"/>
+                <a:ea typeface="Courier New" pitchFamily="34" charset="-122"/>
+                <a:cs typeface="Courier New" pitchFamily="34" charset="-120"/>
+              </a:rPr>
+              <a:t>Explore //</a:t>
+            </a:r>
+            <a:r>
+              <a:rPr lang="th-TH" sz="1300" b="1" kern="0" spc="300" dirty="0">
+                <a:solidFill>
+                  <a:srgbClr val="22D3EE"/>
+                </a:solidFill>
+                <a:latin typeface="Courier New" pitchFamily="34" charset="0"/>
+                <a:ea typeface="Courier New" pitchFamily="34" charset="-122"/>
+                <a:cs typeface="Courier New" pitchFamily="34" charset="-120"/>
+              </a:rPr>
+              <a:t> 15 </a:t>
+            </a:r>
+            <a:r>
+              <a:rPr lang="en-US" sz="1300" b="1" kern="0" spc="300" dirty="0">
+                <a:solidFill>
+                  <a:srgbClr val="22D3EE"/>
+                </a:solidFill>
+                <a:latin typeface="Courier New" pitchFamily="34" charset="0"/>
+                <a:ea typeface="Courier New" pitchFamily="34" charset="-122"/>
+                <a:cs typeface="Courier New" pitchFamily="34" charset="-120"/>
+              </a:rPr>
+              <a:t>MIN</a:t>
+            </a:r>
+            <a:endParaRPr lang="en-US" sz="1300" dirty="0"/>
+          </a:p>
+        </p:txBody>
+      </p:sp>
+      <p:sp>
+        <p:nvSpPr>
+          <p:cNvPr id="28" name="Shape 26">
+            <a:extLst>
+              <a:ext uri="{FF2B5EF4-FFF2-40B4-BE49-F238E27FC236}">
+                <a16:creationId xmlns:a16="http://schemas.microsoft.com/office/drawing/2014/main" id="{2B8F4C28-55A9-22E6-D2FD-D035769DD177}"/>
+              </a:ext>
+            </a:extLst>
+          </p:cNvPr>
+          <p:cNvSpPr/>
+          <p:nvPr/>
+        </p:nvSpPr>
+        <p:spPr>
+          <a:xfrm>
+            <a:off x="640080" y="4709160"/>
+            <a:ext cx="10908792" cy="1737360"/>
+          </a:xfrm>
+          <a:prstGeom prst="roundRect">
+            <a:avLst>
+              <a:gd name="adj" fmla="val 4737"/>
+            </a:avLst>
+          </a:prstGeom>
+          <a:solidFill>
+            <a:srgbClr val="141C33"/>
+          </a:solidFill>
+          <a:ln w="12700">
+            <a:solidFill>
+              <a:srgbClr val="2A3550"/>
+            </a:solidFill>
+            <a:prstDash val="solid"/>
+          </a:ln>
+          <a:effectLst>
+            <a:outerShdw blurRad="127000" dist="38100" dir="5400000" algn="bl" rotWithShape="0">
+              <a:srgbClr val="000000">
+                <a:alpha val="35000"/>
+              </a:srgbClr>
+            </a:outerShdw>
+          </a:effectLst>
+        </p:spPr>
+      </p:sp>
+      <p:sp>
+        <p:nvSpPr>
+          <p:cNvPr id="29" name="Text 27">
+            <a:extLst>
+              <a:ext uri="{FF2B5EF4-FFF2-40B4-BE49-F238E27FC236}">
+                <a16:creationId xmlns:a16="http://schemas.microsoft.com/office/drawing/2014/main" id="{1FA2B979-EEFD-82C9-AEA2-B23FAB371519}"/>
+              </a:ext>
+            </a:extLst>
+          </p:cNvPr>
+          <p:cNvSpPr/>
+          <p:nvPr/>
+        </p:nvSpPr>
+        <p:spPr>
+          <a:xfrm>
+            <a:off x="1005840" y="4937760"/>
+            <a:ext cx="10177272" cy="1280160"/>
+          </a:xfrm>
+          <a:prstGeom prst="rect">
+            <a:avLst/>
+          </a:prstGeom>
+          <a:noFill/>
+          <a:ln/>
+        </p:spPr>
+        <p:txBody>
+          <a:bodyPr wrap="square" lIns="0" tIns="0" rIns="0" bIns="0" rtlCol="0" anchor="ctr"/>
+          <a:lstStyle/>
+          <a:p>
+            <a:pPr>
+              <a:lnSpc>
+                <a:spcPct val="105000"/>
+              </a:lnSpc>
+            </a:pPr>
+            <a:r>
+              <a:rPr lang="th-TH" sz="2700" dirty="0">
+                <a:solidFill>
+                  <a:srgbClr val="F1F5F9"/>
+                </a:solidFill>
+                <a:latin typeface="TH Sarabun New" pitchFamily="34" charset="0"/>
+                <a:ea typeface="TH Sarabun New" pitchFamily="34" charset="-122"/>
+                <a:cs typeface="TH Sarabun New" pitchFamily="34" charset="-120"/>
+              </a:rPr>
+              <a:t>นักเรียนเข้าสู่ระบบ </a:t>
+            </a:r>
+            <a:r>
+              <a:rPr lang="en-US" sz="2700" dirty="0" err="1">
+                <a:solidFill>
+                  <a:srgbClr val="F1F5F9"/>
+                </a:solidFill>
+                <a:latin typeface="TH Sarabun New" pitchFamily="34" charset="0"/>
+                <a:ea typeface="TH Sarabun New" pitchFamily="34" charset="-122"/>
+                <a:cs typeface="TH Sarabun New" pitchFamily="34" charset="-120"/>
+              </a:rPr>
+              <a:t>FlowQuest</a:t>
+            </a:r>
+            <a:r>
+              <a:rPr lang="en-US" sz="2700" dirty="0">
+                <a:solidFill>
+                  <a:srgbClr val="F1F5F9"/>
+                </a:solidFill>
+                <a:latin typeface="TH Sarabun New" pitchFamily="34" charset="0"/>
+                <a:ea typeface="TH Sarabun New" pitchFamily="34" charset="-122"/>
+                <a:cs typeface="TH Sarabun New" pitchFamily="34" charset="-120"/>
+              </a:rPr>
+              <a:t> </a:t>
+            </a:r>
+            <a:r>
+              <a:rPr lang="th-TH" sz="2700" dirty="0">
+                <a:solidFill>
+                  <a:srgbClr val="F1F5F9"/>
+                </a:solidFill>
+                <a:latin typeface="TH Sarabun New" pitchFamily="34" charset="0"/>
+                <a:ea typeface="TH Sarabun New" pitchFamily="34" charset="-122"/>
+                <a:cs typeface="TH Sarabun New" pitchFamily="34" charset="-120"/>
+              </a:rPr>
+              <a:t>โดยใช้เครื่องคอมพิวเตอร์เป็นรายบุคคล (คนละ 1 เครื่อง) เข้าทำภารกิจ ด่าน</a:t>
+            </a:r>
+            <a:r>
+              <a:rPr lang="th-TH" sz="2700" dirty="0" err="1">
+                <a:solidFill>
+                  <a:srgbClr val="F1F5F9"/>
+                </a:solidFill>
+                <a:latin typeface="TH Sarabun New" pitchFamily="34" charset="0"/>
+                <a:ea typeface="TH Sarabun New" pitchFamily="34" charset="-122"/>
+                <a:cs typeface="TH Sarabun New" pitchFamily="34" charset="-120"/>
+              </a:rPr>
+              <a:t>ซูโ</a:t>
+            </a:r>
+            <a:r>
+              <a:rPr lang="th-TH" sz="2700" dirty="0">
+                <a:solidFill>
+                  <a:srgbClr val="F1F5F9"/>
+                </a:solidFill>
+                <a:latin typeface="TH Sarabun New" pitchFamily="34" charset="0"/>
+                <a:ea typeface="TH Sarabun New" pitchFamily="34" charset="-122"/>
+                <a:cs typeface="TH Sarabun New" pitchFamily="34" charset="-120"/>
+              </a:rPr>
+              <a:t>ดก</a:t>
+            </a:r>
+            <a:r>
+              <a:rPr lang="th-TH" sz="2700" dirty="0" err="1">
+                <a:solidFill>
+                  <a:srgbClr val="F1F5F9"/>
+                </a:solidFill>
+                <a:latin typeface="TH Sarabun New" pitchFamily="34" charset="0"/>
+                <a:ea typeface="TH Sarabun New" pitchFamily="34" charset="-122"/>
+                <a:cs typeface="TH Sarabun New" pitchFamily="34" charset="-120"/>
+              </a:rPr>
+              <a:t>ุสัญ</a:t>
+            </a:r>
+            <a:r>
+              <a:rPr lang="th-TH" sz="2700" dirty="0">
+                <a:solidFill>
+                  <a:srgbClr val="F1F5F9"/>
+                </a:solidFill>
+                <a:latin typeface="TH Sarabun New" pitchFamily="34" charset="0"/>
+                <a:ea typeface="TH Sarabun New" pitchFamily="34" charset="-122"/>
+                <a:cs typeface="TH Sarabun New" pitchFamily="34" charset="-120"/>
+              </a:rPr>
+              <a:t>ลักษณ์ตาราง 4×4 ระดับเริ่มต้น แล้วทดลองเติมสัญลักษณ์ (วงกลม สี่เหลี่ยม สามเหลี่ยม ดาว) ด้วยตนเอง</a:t>
+            </a:r>
+            <a:endParaRPr lang="en-US" sz="2700" dirty="0"/>
+          </a:p>
+        </p:txBody>
+      </p:sp>
+      <p:pic>
+        <p:nvPicPr>
+          <p:cNvPr id="41" name="Picture 40">
+            <a:extLst>
+              <a:ext uri="{FF2B5EF4-FFF2-40B4-BE49-F238E27FC236}">
+                <a16:creationId xmlns:a16="http://schemas.microsoft.com/office/drawing/2014/main" id="{F36E0428-94AA-66FF-B952-BCA0AA5AF141}"/>
+              </a:ext>
+            </a:extLst>
+          </p:cNvPr>
+          <p:cNvPicPr>
+            <a:picLocks noChangeAspect="1"/>
+          </p:cNvPicPr>
+          <p:nvPr/>
+        </p:nvPicPr>
+        <p:blipFill>
+          <a:blip r:embed="rId3"/>
+          <a:stretch>
+            <a:fillRect/>
+          </a:stretch>
+        </p:blipFill>
+        <p:spPr>
+          <a:xfrm>
+            <a:off x="597408" y="1005840"/>
+            <a:ext cx="2032000" cy="698500"/>
+          </a:xfrm>
+          <a:prstGeom prst="rect">
+            <a:avLst/>
+          </a:prstGeom>
+        </p:spPr>
+      </p:pic>
+      <p:pic>
+        <p:nvPicPr>
+          <p:cNvPr id="43" name="Picture 42">
+            <a:extLst>
+              <a:ext uri="{FF2B5EF4-FFF2-40B4-BE49-F238E27FC236}">
+                <a16:creationId xmlns:a16="http://schemas.microsoft.com/office/drawing/2014/main" id="{1FB5289F-0A1E-76BF-FDB8-73C538EF8523}"/>
+              </a:ext>
+            </a:extLst>
+          </p:cNvPr>
+          <p:cNvPicPr>
+            <a:picLocks noChangeAspect="1"/>
+          </p:cNvPicPr>
+          <p:nvPr/>
+        </p:nvPicPr>
+        <p:blipFill>
+          <a:blip r:embed="rId4"/>
+          <a:stretch>
+            <a:fillRect/>
+          </a:stretch>
+        </p:blipFill>
+        <p:spPr>
+          <a:xfrm>
+            <a:off x="3546656" y="1413691"/>
+            <a:ext cx="4408624" cy="3066869"/>
+          </a:xfrm>
+          <a:prstGeom prst="rect">
+            <a:avLst/>
+          </a:prstGeom>
+        </p:spPr>
+      </p:pic>
+    </p:spTree>
+    <p:extLst>
+      <p:ext uri="{BB962C8B-B14F-4D97-AF65-F5344CB8AC3E}">
+        <p14:creationId xmlns:p14="http://schemas.microsoft.com/office/powerpoint/2010/main" val="2240542505"/>
+      </p:ext>
+    </p:extLst>
+  </p:cSld>
+  <p:clrMapOvr>
+    <a:masterClrMapping/>
+  </p:clrMapOvr>
+  <mc:AlternateContent xmlns:mc="http://schemas.openxmlformats.org/markup-compatibility/2006">
+    <mc:Choice xmlns:p159="http://schemas.microsoft.com/office/powerpoint/2015/09/main" Requires="p159">
+      <p:transition xmlns:p14="http://schemas.microsoft.com/office/powerpoint/2010/main" spd="slow" p14:dur="2000">
+        <p159:morph option="byObject"/>
+      </p:transition>
+    </mc:Choice>
+    <mc:Fallback>
+      <p:transition spd="slow">
+        <p:fade/>
+      </p:transition>
+    </mc:Fallback>
+  </mc:AlternateContent>
+</p:sld>
+</file>
+
+<file path=ppt/slides/slide6.xml><?xml version="1.0" encoding="utf-8"?>
 <p:sld xmlns:a="http://schemas.openxmlformats.org/drawingml/2006/main" xmlns:r="http://schemas.openxmlformats.org/officeDocument/2006/relationships" xmlns:p="http://schemas.openxmlformats.org/presentationml/2006/main">
   <p:cSld name="Slide 5">
     <p:bg>
@@ -7755,6 +12216,7 @@
         <a:solidFill>
           <a:srgbClr val="0B1020"/>
         </a:solidFill>
+        <a:effectLst/>
       </p:bgPr>
     </p:bg>
     <p:spTree>
@@ -8320,11 +12782,11 @@
           <a:bodyPr wrap="square" lIns="0" tIns="0" rIns="0" bIns="0" rtlCol="0" anchor="ctr"/>
           <a:lstStyle/>
           <a:p>
-            <a:pPr indent="0" marL="0">
+            <a:pPr marL="0" indent="0">
               <a:buNone/>
             </a:pPr>
             <a:r>
-              <a:rPr lang="en-US" sz="1300" b="1" spc="300" kern="0" dirty="0">
+              <a:rPr lang="en-US" sz="1300" b="1" kern="0" spc="300" dirty="0">
                 <a:solidFill>
                   <a:srgbClr val="22D3EE"/>
                 </a:solidFill>
@@ -8359,7 +12821,7 @@
           <a:bodyPr wrap="square" lIns="0" tIns="0" rIns="0" bIns="0" rtlCol="0" anchor="ctr"/>
           <a:lstStyle/>
           <a:p>
-            <a:pPr indent="0" marL="0">
+            <a:pPr marL="0" indent="0">
               <a:buNone/>
             </a:pPr>
             <a:r>
@@ -8403,7 +12865,7 @@
             <a:prstDash val="solid"/>
           </a:ln>
           <a:effectLst>
-            <a:outerShdw sx="100000" sy="100000" kx="0" ky="0" algn="bl" rotWithShape="0" blurRad="127000" dist="38100" dir="5400000">
+            <a:outerShdw blurRad="127000" dist="38100" dir="5400000" algn="bl" rotWithShape="0">
               <a:srgbClr val="000000">
                 <a:alpha val="35000"/>
               </a:srgbClr>
@@ -8976,7 +13438,7 @@
           </a:solidFill>
           <a:ln/>
           <a:effectLst>
-            <a:outerShdw sx="100000" sy="100000" kx="0" ky="0" algn="bl" rotWithShape="0" blurRad="177800" dist="50800" dir="16200000">
+            <a:outerShdw blurRad="177800" dist="50800" dir="16200000" algn="bl" rotWithShape="0">
               <a:srgbClr val="22D3EE">
                 <a:alpha val="50000"/>
               </a:srgbClr>
@@ -9005,7 +13467,7 @@
           <a:bodyPr wrap="square" lIns="0" tIns="0" rIns="0" bIns="0" rtlCol="0" anchor="ctr"/>
           <a:lstStyle/>
           <a:p>
-            <a:pPr algn="ctr" indent="0" marL="0">
+            <a:pPr marL="0" indent="0" algn="ctr">
               <a:buNone/>
             </a:pPr>
             <a:r>
@@ -9044,7 +13506,7 @@
           <a:bodyPr wrap="square" lIns="0" tIns="0" rIns="0" bIns="0" rtlCol="0" anchor="ctr"/>
           <a:lstStyle/>
           <a:p>
-            <a:pPr indent="0" marL="0">
+            <a:pPr marL="0" indent="0">
               <a:buNone/>
             </a:pPr>
             <a:r>
@@ -9088,7 +13550,7 @@
             <a:prstDash val="solid"/>
           </a:ln>
           <a:effectLst>
-            <a:outerShdw sx="100000" sy="100000" kx="0" ky="0" algn="bl" rotWithShape="0" blurRad="127000" dist="38100" dir="5400000">
+            <a:outerShdw blurRad="127000" dist="38100" dir="5400000" algn="bl" rotWithShape="0">
               <a:srgbClr val="000000">
                 <a:alpha val="35000"/>
               </a:srgbClr>
@@ -9661,7 +14123,7 @@
           </a:solidFill>
           <a:ln/>
           <a:effectLst>
-            <a:outerShdw sx="100000" sy="100000" kx="0" ky="0" algn="bl" rotWithShape="0" blurRad="177800" dist="50800" dir="16200000">
+            <a:outerShdw blurRad="177800" dist="50800" dir="16200000" algn="bl" rotWithShape="0">
               <a:srgbClr val="3B82F6">
                 <a:alpha val="50000"/>
               </a:srgbClr>
@@ -9690,7 +14152,7 @@
           <a:bodyPr wrap="square" lIns="0" tIns="0" rIns="0" bIns="0" rtlCol="0" anchor="ctr"/>
           <a:lstStyle/>
           <a:p>
-            <a:pPr algn="ctr" indent="0" marL="0">
+            <a:pPr marL="0" indent="0" algn="ctr">
               <a:buNone/>
             </a:pPr>
             <a:r>
@@ -9729,7 +14191,7 @@
           <a:bodyPr wrap="square" lIns="0" tIns="0" rIns="0" bIns="0" rtlCol="0" anchor="ctr"/>
           <a:lstStyle/>
           <a:p>
-            <a:pPr indent="0" marL="0">
+            <a:pPr marL="0" indent="0">
               <a:buNone/>
             </a:pPr>
             <a:r>
@@ -9773,7 +14235,7 @@
             <a:prstDash val="solid"/>
           </a:ln>
           <a:effectLst>
-            <a:outerShdw sx="100000" sy="100000" kx="0" ky="0" algn="bl" rotWithShape="0" blurRad="127000" dist="38100" dir="5400000">
+            <a:outerShdw blurRad="127000" dist="38100" dir="5400000" algn="bl" rotWithShape="0">
               <a:srgbClr val="000000">
                 <a:alpha val="35000"/>
               </a:srgbClr>
@@ -10346,7 +14808,7 @@
           </a:solidFill>
           <a:ln/>
           <a:effectLst>
-            <a:outerShdw sx="100000" sy="100000" kx="0" ky="0" algn="bl" rotWithShape="0" blurRad="177800" dist="50800" dir="16200000">
+            <a:outerShdw blurRad="177800" dist="50800" dir="16200000" algn="bl" rotWithShape="0">
               <a:srgbClr val="34D399">
                 <a:alpha val="50000"/>
               </a:srgbClr>
@@ -10375,7 +14837,7 @@
           <a:bodyPr wrap="square" lIns="0" tIns="0" rIns="0" bIns="0" rtlCol="0" anchor="ctr"/>
           <a:lstStyle/>
           <a:p>
-            <a:pPr algn="ctr" indent="0" marL="0">
+            <a:pPr marL="0" indent="0" algn="ctr">
               <a:buNone/>
             </a:pPr>
             <a:r>
@@ -10414,7 +14876,7 @@
           <a:bodyPr wrap="square" lIns="0" tIns="0" rIns="0" bIns="0" rtlCol="0" anchor="ctr"/>
           <a:lstStyle/>
           <a:p>
-            <a:pPr indent="0" marL="0">
+            <a:pPr marL="0" indent="0">
               <a:buNone/>
             </a:pPr>
             <a:r>
@@ -10437,10 +14899,22 @@
   <p:clrMapOvr>
     <a:masterClrMapping/>
   </p:clrMapOvr>
+  <mc:AlternateContent xmlns:mc="http://schemas.openxmlformats.org/markup-compatibility/2006">
+    <mc:Choice xmlns:p159="http://schemas.microsoft.com/office/powerpoint/2015/09/main" Requires="p159">
+      <p:transition xmlns:p14="http://schemas.microsoft.com/office/powerpoint/2010/main" spd="slow" p14:dur="2000">
+        <p159:morph option="byObject"/>
+      </p:transition>
+    </mc:Choice>
+    <mc:Fallback>
+      <p:transition spd="slow">
+        <p:fade/>
+      </p:transition>
+    </mc:Fallback>
+  </mc:AlternateContent>
 </p:sld>
 </file>
 
-<file path=ppt/slides/slide6.xml><?xml version="1.0" encoding="utf-8"?>
+<file path=ppt/slides/slide7.xml><?xml version="1.0" encoding="utf-8"?>
 <p:sld xmlns:a="http://schemas.openxmlformats.org/drawingml/2006/main" xmlns:r="http://schemas.openxmlformats.org/officeDocument/2006/relationships" xmlns:p="http://schemas.openxmlformats.org/presentationml/2006/main">
   <p:cSld name="Slide 6">
     <p:bg>
@@ -10448,6 +14922,7 @@
         <a:solidFill>
           <a:srgbClr val="0B1020"/>
         </a:solidFill>
+        <a:effectLst/>
       </p:bgPr>
     </p:bg>
     <p:spTree>
@@ -11013,11 +15488,11 @@
           <a:bodyPr wrap="square" lIns="0" tIns="0" rIns="0" bIns="0" rtlCol="0" anchor="ctr"/>
           <a:lstStyle/>
           <a:p>
-            <a:pPr indent="0" marL="0">
+            <a:pPr marL="0" indent="0">
               <a:buNone/>
             </a:pPr>
             <a:r>
-              <a:rPr lang="en-US" sz="1300" b="1" spc="300" kern="0" dirty="0">
+              <a:rPr lang="en-US" sz="1300" b="1" kern="0" spc="300" dirty="0">
                 <a:solidFill>
                   <a:srgbClr val="22D3EE"/>
                 </a:solidFill>
@@ -11052,7 +15527,7 @@
           <a:bodyPr wrap="square" lIns="0" tIns="0" rIns="0" bIns="0" rtlCol="0" anchor="ctr"/>
           <a:lstStyle/>
           <a:p>
-            <a:pPr indent="0" marL="0">
+            <a:pPr marL="0" indent="0">
               <a:buNone/>
             </a:pPr>
             <a:r>
@@ -11096,7 +15571,7 @@
             <a:prstDash val="solid"/>
           </a:ln>
           <a:effectLst>
-            <a:outerShdw sx="100000" sy="100000" kx="0" ky="0" algn="bl" rotWithShape="0" blurRad="127000" dist="38100" dir="5400000">
+            <a:outerShdw blurRad="127000" dist="38100" dir="5400000" algn="bl" rotWithShape="0">
               <a:srgbClr val="000000">
                 <a:alpha val="35000"/>
               </a:srgbClr>
@@ -11150,7 +15625,7 @@
           <a:bodyPr wrap="square" lIns="0" tIns="0" rIns="0" bIns="0" rtlCol="0" anchor="ctr"/>
           <a:lstStyle/>
           <a:p>
-            <a:pPr algn="ctr" indent="0" marL="0">
+            <a:pPr marL="0" indent="0" algn="ctr">
               <a:buNone/>
             </a:pPr>
             <a:r>
@@ -11214,7 +15689,7 @@
           <a:bodyPr wrap="square" lIns="0" tIns="0" rIns="0" bIns="0" rtlCol="0" anchor="ctr"/>
           <a:lstStyle/>
           <a:p>
-            <a:pPr algn="ctr" indent="0" marL="0">
+            <a:pPr marL="0" indent="0" algn="ctr">
               <a:buNone/>
             </a:pPr>
             <a:r>
@@ -11278,7 +15753,7 @@
           <a:bodyPr wrap="square" lIns="0" tIns="0" rIns="0" bIns="0" rtlCol="0" anchor="ctr"/>
           <a:lstStyle/>
           <a:p>
-            <a:pPr algn="ctr" indent="0" marL="0">
+            <a:pPr marL="0" indent="0" algn="ctr">
               <a:buNone/>
             </a:pPr>
             <a:r>
@@ -11394,7 +15869,7 @@
           <a:bodyPr wrap="square" lIns="0" tIns="0" rIns="0" bIns="0" rtlCol="0" anchor="ctr"/>
           <a:lstStyle/>
           <a:p>
-            <a:pPr algn="ctr" indent="0" marL="0">
+            <a:pPr marL="0" indent="0" algn="ctr">
               <a:buNone/>
             </a:pPr>
             <a:r>
@@ -11558,7 +16033,7 @@
           <a:bodyPr wrap="square" lIns="0" tIns="0" rIns="0" bIns="0" rtlCol="0" anchor="ctr"/>
           <a:lstStyle/>
           <a:p>
-            <a:pPr algn="ctr" indent="0" marL="0">
+            <a:pPr marL="0" indent="0" algn="ctr">
               <a:buNone/>
             </a:pPr>
             <a:r>
@@ -11647,7 +16122,7 @@
           <a:bodyPr wrap="square" lIns="0" tIns="0" rIns="0" bIns="0" rtlCol="0" anchor="ctr"/>
           <a:lstStyle/>
           <a:p>
-            <a:pPr algn="ctr" indent="0" marL="0">
+            <a:pPr marL="0" indent="0" algn="ctr">
               <a:buNone/>
             </a:pPr>
             <a:r>
@@ -11761,7 +16236,7 @@
           <a:bodyPr wrap="square" lIns="0" tIns="0" rIns="0" bIns="0" rtlCol="0" anchor="ctr"/>
           <a:lstStyle/>
           <a:p>
-            <a:pPr algn="ctr" indent="0" marL="0">
+            <a:pPr marL="0" indent="0" algn="ctr">
               <a:buNone/>
             </a:pPr>
             <a:r>
@@ -11938,7 +16413,7 @@
           <a:bodyPr wrap="square" lIns="0" tIns="0" rIns="0" bIns="0" rtlCol="0" anchor="ctr"/>
           <a:lstStyle/>
           <a:p>
-            <a:pPr algn="ctr" indent="0" marL="0">
+            <a:pPr marL="0" indent="0" algn="ctr">
               <a:buNone/>
             </a:pPr>
             <a:r>
@@ -11982,7 +16457,7 @@
             <a:prstDash val="solid"/>
           </a:ln>
           <a:effectLst>
-            <a:outerShdw sx="100000" sy="100000" kx="0" ky="0" algn="bl" rotWithShape="0" blurRad="127000" dist="38100" dir="5400000">
+            <a:outerShdw blurRad="127000" dist="38100" dir="5400000" algn="bl" rotWithShape="0">
               <a:srgbClr val="000000">
                 <a:alpha val="35000"/>
               </a:srgbClr>
@@ -12011,7 +16486,7 @@
           <a:bodyPr wrap="square" lIns="0" tIns="0" rIns="0" bIns="0" rtlCol="0" anchor="t"/>
           <a:lstStyle/>
           <a:p>
-            <a:pPr indent="0" marL="0">
+            <a:pPr marL="0" indent="0">
               <a:lnSpc>
                 <a:spcPct val="115000"/>
               </a:lnSpc>
@@ -12031,7 +16506,7 @@
             <a:endParaRPr lang="en-US" sz="2200" dirty="0"/>
           </a:p>
           <a:p>
-            <a:pPr indent="0" marL="0">
+            <a:pPr marL="0" indent="0">
               <a:lnSpc>
                 <a:spcPct val="115000"/>
               </a:lnSpc>
@@ -12040,7 +16515,7 @@
             <a:endParaRPr lang="en-US" sz="2200" dirty="0"/>
           </a:p>
           <a:p>
-            <a:pPr indent="0" marL="0">
+            <a:pPr marL="0" indent="0">
               <a:lnSpc>
                 <a:spcPct val="115000"/>
               </a:lnSpc>
@@ -12060,7 +16535,7 @@
             <a:endParaRPr lang="en-US" sz="2200" dirty="0"/>
           </a:p>
           <a:p>
-            <a:pPr indent="0" marL="0">
+            <a:pPr marL="0" indent="0">
               <a:lnSpc>
                 <a:spcPct val="115000"/>
               </a:lnSpc>
@@ -12102,7 +16577,7 @@
           <a:bodyPr wrap="square" lIns="0" tIns="0" rIns="0" bIns="0" rtlCol="0" anchor="ctr"/>
           <a:lstStyle/>
           <a:p>
-            <a:pPr indent="0" marL="0">
+            <a:pPr marL="0" indent="0">
               <a:buNone/>
             </a:pPr>
             <a:r>
@@ -12125,10 +16600,22 @@
   <p:clrMapOvr>
     <a:masterClrMapping/>
   </p:clrMapOvr>
+  <mc:AlternateContent xmlns:mc="http://schemas.openxmlformats.org/markup-compatibility/2006">
+    <mc:Choice xmlns:p159="http://schemas.microsoft.com/office/powerpoint/2015/09/main" Requires="p159">
+      <p:transition xmlns:p14="http://schemas.microsoft.com/office/powerpoint/2010/main" spd="slow" p14:dur="2000">
+        <p159:morph option="byObject"/>
+      </p:transition>
+    </mc:Choice>
+    <mc:Fallback>
+      <p:transition spd="slow">
+        <p:fade/>
+      </p:transition>
+    </mc:Fallback>
+  </mc:AlternateContent>
 </p:sld>
 </file>
 
-<file path=ppt/slides/slide7.xml><?xml version="1.0" encoding="utf-8"?>
+<file path=ppt/slides/slide8.xml><?xml version="1.0" encoding="utf-8"?>
 <p:sld xmlns:a="http://schemas.openxmlformats.org/drawingml/2006/main" xmlns:r="http://schemas.openxmlformats.org/officeDocument/2006/relationships" xmlns:p="http://schemas.openxmlformats.org/presentationml/2006/main">
   <p:cSld name="Slide 7">
     <p:bg>
@@ -12136,6 +16623,7 @@
         <a:solidFill>
           <a:srgbClr val="0B1020"/>
         </a:solidFill>
+        <a:effectLst/>
       </p:bgPr>
     </p:bg>
     <p:spTree>
@@ -12701,11 +17189,11 @@
           <a:bodyPr wrap="square" lIns="0" tIns="0" rIns="0" bIns="0" rtlCol="0" anchor="ctr"/>
           <a:lstStyle/>
           <a:p>
-            <a:pPr indent="0" marL="0">
+            <a:pPr marL="0" indent="0">
               <a:buNone/>
             </a:pPr>
             <a:r>
-              <a:rPr lang="en-US" sz="1300" b="1" spc="300" kern="0" dirty="0">
+              <a:rPr lang="en-US" sz="1300" b="1" kern="0" spc="300" dirty="0">
                 <a:solidFill>
                   <a:srgbClr val="22D3EE"/>
                 </a:solidFill>
@@ -12713,7 +17201,7 @@
                 <a:ea typeface="Courier New" pitchFamily="34" charset="-122"/>
                 <a:cs typeface="Courier New" pitchFamily="34" charset="-120"/>
               </a:rPr>
-              <a:t>EXPLORE // HANDS-ON</a:t>
+              <a:t>ELABORATE // HANDS-ON</a:t>
             </a:r>
             <a:endParaRPr lang="en-US" sz="1300" dirty="0"/>
           </a:p>
@@ -12740,7 +17228,7 @@
           <a:bodyPr wrap="square" lIns="0" tIns="0" rIns="0" bIns="0" rtlCol="0" anchor="ctr"/>
           <a:lstStyle/>
           <a:p>
-            <a:pPr indent="0" marL="0">
+            <a:pPr marL="0" indent="0">
               <a:buNone/>
             </a:pPr>
             <a:r>
@@ -12760,7 +17248,7 @@
       </p:sp>
       <p:sp>
         <p:nvSpPr>
-          <p:cNvPr id="28" name="Shape 26"/>
+          <p:cNvPr id="33" name="Shape 31"/>
           <p:cNvSpPr/>
           <p:nvPr/>
         </p:nvSpPr>
@@ -12775,7 +17263,7 @@
             </a:avLst>
           </a:prstGeom>
           <a:solidFill>
-            <a:srgbClr val="141C33"/>
+            <a:srgbClr val="1A2340"/>
           </a:solidFill>
           <a:ln w="12700">
             <a:solidFill>
@@ -12784,7 +17272,7 @@
             <a:prstDash val="solid"/>
           </a:ln>
           <a:effectLst>
-            <a:outerShdw sx="100000" sy="100000" kx="0" ky="0" algn="bl" rotWithShape="0" blurRad="127000" dist="38100" dir="5400000">
+            <a:outerShdw blurRad="127000" dist="38100" dir="5400000" algn="bl" rotWithShape="0">
               <a:srgbClr val="000000">
                 <a:alpha val="35000"/>
               </a:srgbClr>
@@ -12794,7 +17282,7 @@
       </p:sp>
       <p:sp>
         <p:nvSpPr>
-          <p:cNvPr id="29" name="Shape 27"/>
+          <p:cNvPr id="34" name="Shape 32"/>
           <p:cNvSpPr/>
           <p:nvPr/>
         </p:nvSpPr>
@@ -12811,7 +17299,7 @@
           </a:solidFill>
           <a:ln/>
           <a:effectLst>
-            <a:outerShdw sx="100000" sy="100000" kx="0" ky="0" algn="bl" rotWithShape="0" blurRad="177800" dist="50800" dir="16200000">
+            <a:outerShdw blurRad="177800" dist="50800" dir="16200000" algn="bl" rotWithShape="0">
               <a:srgbClr val="22D3EE">
                 <a:alpha val="50000"/>
               </a:srgbClr>
@@ -12821,7 +17309,7 @@
       </p:sp>
       <p:sp>
         <p:nvSpPr>
-          <p:cNvPr id="30" name="Text 28"/>
+          <p:cNvPr id="35" name="Text 33"/>
           <p:cNvSpPr/>
           <p:nvPr/>
         </p:nvSpPr>
@@ -12840,7 +17328,7 @@
           <a:bodyPr wrap="square" lIns="0" tIns="0" rIns="0" bIns="0" rtlCol="0" anchor="ctr"/>
           <a:lstStyle/>
           <a:p>
-            <a:pPr algn="ctr" indent="0" marL="0">
+            <a:pPr marL="0" indent="0" algn="ctr">
               <a:buNone/>
             </a:pPr>
             <a:r>
@@ -12860,7 +17348,7 @@
       </p:sp>
       <p:sp>
         <p:nvSpPr>
-          <p:cNvPr id="31" name="Text 29"/>
+          <p:cNvPr id="36" name="Text 34"/>
           <p:cNvSpPr/>
           <p:nvPr/>
         </p:nvSpPr>
@@ -12879,9 +17367,20 @@
           <a:bodyPr wrap="square" lIns="0" tIns="0" rIns="0" bIns="0" rtlCol="0" anchor="ctr"/>
           <a:lstStyle/>
           <a:p>
-            <a:pPr indent="0" marL="0">
+            <a:pPr marL="0" indent="0">
               <a:buNone/>
             </a:pPr>
+            <a:r>
+              <a:rPr lang="en-US" sz="2100" b="1" dirty="0" err="1">
+                <a:solidFill>
+                  <a:srgbClr val="F1F5F9"/>
+                </a:solidFill>
+                <a:latin typeface="TH Sarabun New" pitchFamily="34" charset="0"/>
+                <a:ea typeface="TH Sarabun New" pitchFamily="34" charset="-122"/>
+                <a:cs typeface="TH Sarabun New" pitchFamily="34" charset="-120"/>
+              </a:rPr>
+              <a:t>เลือกด่านซูโดกุ</a:t>
+            </a:r>
             <a:r>
               <a:rPr lang="en-US" sz="2100" b="1" dirty="0">
                 <a:solidFill>
@@ -12891,7 +17390,7 @@
                 <a:ea typeface="TH Sarabun New" pitchFamily="34" charset="-122"/>
                 <a:cs typeface="TH Sarabun New" pitchFamily="34" charset="-120"/>
               </a:rPr>
-              <a:t>เข้าสู่ระบบ</a:t>
+              <a:t> 6×6</a:t>
             </a:r>
             <a:endParaRPr lang="en-US" sz="2100" dirty="0"/>
           </a:p>
@@ -12899,7 +17398,7 @@
       </p:sp>
       <p:sp>
         <p:nvSpPr>
-          <p:cNvPr id="32" name="Text 30"/>
+          <p:cNvPr id="37" name="Text 35"/>
           <p:cNvSpPr/>
           <p:nvPr/>
         </p:nvSpPr>
@@ -12918,7 +17417,7 @@
           <a:bodyPr wrap="square" lIns="0" tIns="0" rIns="0" bIns="0" rtlCol="0" anchor="ctr"/>
           <a:lstStyle/>
           <a:p>
-            <a:pPr indent="0" marL="0">
+            <a:pPr marL="0" indent="0">
               <a:buNone/>
             </a:pPr>
             <a:r>
@@ -12930,7 +17429,7 @@
                 <a:ea typeface="TH Sarabun New" pitchFamily="34" charset="-122"/>
                 <a:cs typeface="TH Sarabun New" pitchFamily="34" charset="-120"/>
               </a:rPr>
-              <a:t>ด้วยรหัสของตนเอง (รายบุคคล คนละ 1 เครื่อง)</a:t>
+              <a:t>แล้วแตะช่อง → เลือกสัญลักษณ์เติม</a:t>
             </a:r>
             <a:endParaRPr lang="en-US" sz="1800" dirty="0"/>
           </a:p>
@@ -12938,7 +17437,7 @@
       </p:sp>
       <p:sp>
         <p:nvSpPr>
-          <p:cNvPr id="33" name="Shape 31"/>
+          <p:cNvPr id="38" name="Shape 36"/>
           <p:cNvSpPr/>
           <p:nvPr/>
         </p:nvSpPr>
@@ -12953,7 +17452,7 @@
             </a:avLst>
           </a:prstGeom>
           <a:solidFill>
-            <a:srgbClr val="1A2340"/>
+            <a:srgbClr val="141C33"/>
           </a:solidFill>
           <a:ln w="12700">
             <a:solidFill>
@@ -12962,7 +17461,7 @@
             <a:prstDash val="solid"/>
           </a:ln>
           <a:effectLst>
-            <a:outerShdw sx="100000" sy="100000" kx="0" ky="0" algn="bl" rotWithShape="0" blurRad="127000" dist="38100" dir="5400000">
+            <a:outerShdw blurRad="127000" dist="38100" dir="5400000" algn="bl" rotWithShape="0">
               <a:srgbClr val="000000">
                 <a:alpha val="35000"/>
               </a:srgbClr>
@@ -12972,7 +17471,7 @@
       </p:sp>
       <p:sp>
         <p:nvSpPr>
-          <p:cNvPr id="34" name="Shape 32"/>
+          <p:cNvPr id="39" name="Shape 37"/>
           <p:cNvSpPr/>
           <p:nvPr/>
         </p:nvSpPr>
@@ -12989,7 +17488,7 @@
           </a:solidFill>
           <a:ln/>
           <a:effectLst>
-            <a:outerShdw sx="100000" sy="100000" kx="0" ky="0" algn="bl" rotWithShape="0" blurRad="177800" dist="50800" dir="16200000">
+            <a:outerShdw blurRad="177800" dist="50800" dir="16200000" algn="bl" rotWithShape="0">
               <a:srgbClr val="22D3EE">
                 <a:alpha val="50000"/>
               </a:srgbClr>
@@ -12999,7 +17498,7 @@
       </p:sp>
       <p:sp>
         <p:nvSpPr>
-          <p:cNvPr id="35" name="Text 33"/>
+          <p:cNvPr id="40" name="Text 38"/>
           <p:cNvSpPr/>
           <p:nvPr/>
         </p:nvSpPr>
@@ -13018,7 +17517,7 @@
           <a:bodyPr wrap="square" lIns="0" tIns="0" rIns="0" bIns="0" rtlCol="0" anchor="ctr"/>
           <a:lstStyle/>
           <a:p>
-            <a:pPr algn="ctr" indent="0" marL="0">
+            <a:pPr marL="0" indent="0" algn="ctr">
               <a:buNone/>
             </a:pPr>
             <a:r>
@@ -13038,7 +17537,7 @@
       </p:sp>
       <p:sp>
         <p:nvSpPr>
-          <p:cNvPr id="36" name="Text 34"/>
+          <p:cNvPr id="41" name="Text 39"/>
           <p:cNvSpPr/>
           <p:nvPr/>
         </p:nvSpPr>
@@ -13057,7 +17556,7 @@
           <a:bodyPr wrap="square" lIns="0" tIns="0" rIns="0" bIns="0" rtlCol="0" anchor="ctr"/>
           <a:lstStyle/>
           <a:p>
-            <a:pPr indent="0" marL="0">
+            <a:pPr marL="0" indent="0">
               <a:buNone/>
             </a:pPr>
             <a:r>
@@ -13069,7 +17568,7 @@
                 <a:ea typeface="TH Sarabun New" pitchFamily="34" charset="-122"/>
                 <a:cs typeface="TH Sarabun New" pitchFamily="34" charset="-120"/>
               </a:rPr>
-              <a:t>เลือกด่านซูโดกุ 4×4</a:t>
+              <a:t>ระบบตรวจให้ทันที</a:t>
             </a:r>
             <a:endParaRPr lang="en-US" sz="2100" dirty="0"/>
           </a:p>
@@ -13077,7 +17576,7 @@
       </p:sp>
       <p:sp>
         <p:nvSpPr>
-          <p:cNvPr id="37" name="Text 35"/>
+          <p:cNvPr id="42" name="Text 40"/>
           <p:cNvSpPr/>
           <p:nvPr/>
         </p:nvSpPr>
@@ -13096,7 +17595,7 @@
           <a:bodyPr wrap="square" lIns="0" tIns="0" rIns="0" bIns="0" rtlCol="0" anchor="ctr"/>
           <a:lstStyle/>
           <a:p>
-            <a:pPr indent="0" marL="0">
+            <a:pPr marL="0" indent="0">
               <a:buNone/>
             </a:pPr>
             <a:r>
@@ -13108,7 +17607,7 @@
                 <a:ea typeface="TH Sarabun New" pitchFamily="34" charset="-122"/>
                 <a:cs typeface="TH Sarabun New" pitchFamily="34" charset="-120"/>
               </a:rPr>
-              <a:t>แล้วแตะช่อง → เลือกสัญลักษณ์เติม</a:t>
+              <a:t>แจ้งเตือน (แดง) เมื่อซ้ำแถวแนวนอน/แนวตั้ง/ตารางย่อย</a:t>
             </a:r>
             <a:endParaRPr lang="en-US" sz="1800" dirty="0"/>
           </a:p>
@@ -13116,7 +17615,7 @@
       </p:sp>
       <p:sp>
         <p:nvSpPr>
-          <p:cNvPr id="38" name="Shape 36"/>
+          <p:cNvPr id="43" name="Shape 41"/>
           <p:cNvSpPr/>
           <p:nvPr/>
         </p:nvSpPr>
@@ -13131,7 +17630,7 @@
             </a:avLst>
           </a:prstGeom>
           <a:solidFill>
-            <a:srgbClr val="141C33"/>
+            <a:srgbClr val="1A2340"/>
           </a:solidFill>
           <a:ln w="12700">
             <a:solidFill>
@@ -13140,7 +17639,7 @@
             <a:prstDash val="solid"/>
           </a:ln>
           <a:effectLst>
-            <a:outerShdw sx="100000" sy="100000" kx="0" ky="0" algn="bl" rotWithShape="0" blurRad="127000" dist="38100" dir="5400000">
+            <a:outerShdw blurRad="127000" dist="38100" dir="5400000" algn="bl" rotWithShape="0">
               <a:srgbClr val="000000">
                 <a:alpha val="35000"/>
               </a:srgbClr>
@@ -13150,7 +17649,7 @@
       </p:sp>
       <p:sp>
         <p:nvSpPr>
-          <p:cNvPr id="39" name="Shape 37"/>
+          <p:cNvPr id="44" name="Shape 42"/>
           <p:cNvSpPr/>
           <p:nvPr/>
         </p:nvSpPr>
@@ -13167,7 +17666,7 @@
           </a:solidFill>
           <a:ln/>
           <a:effectLst>
-            <a:outerShdw sx="100000" sy="100000" kx="0" ky="0" algn="bl" rotWithShape="0" blurRad="177800" dist="50800" dir="16200000">
+            <a:outerShdw blurRad="177800" dist="50800" dir="16200000" algn="bl" rotWithShape="0">
               <a:srgbClr val="22D3EE">
                 <a:alpha val="50000"/>
               </a:srgbClr>
@@ -13177,7 +17676,7 @@
       </p:sp>
       <p:sp>
         <p:nvSpPr>
-          <p:cNvPr id="40" name="Text 38"/>
+          <p:cNvPr id="45" name="Text 43"/>
           <p:cNvSpPr/>
           <p:nvPr/>
         </p:nvSpPr>
@@ -13196,7 +17695,7 @@
           <a:bodyPr wrap="square" lIns="0" tIns="0" rIns="0" bIns="0" rtlCol="0" anchor="ctr"/>
           <a:lstStyle/>
           <a:p>
-            <a:pPr algn="ctr" indent="0" marL="0">
+            <a:pPr marL="0" indent="0" algn="ctr">
               <a:buNone/>
             </a:pPr>
             <a:r>
@@ -13216,7 +17715,7 @@
       </p:sp>
       <p:sp>
         <p:nvSpPr>
-          <p:cNvPr id="41" name="Text 39"/>
+          <p:cNvPr id="46" name="Text 44"/>
           <p:cNvSpPr/>
           <p:nvPr/>
         </p:nvSpPr>
@@ -13235,185 +17734,7 @@
           <a:bodyPr wrap="square" lIns="0" tIns="0" rIns="0" bIns="0" rtlCol="0" anchor="ctr"/>
           <a:lstStyle/>
           <a:p>
-            <a:pPr indent="0" marL="0">
-              <a:buNone/>
-            </a:pPr>
-            <a:r>
-              <a:rPr lang="en-US" sz="2100" b="1" dirty="0">
-                <a:solidFill>
-                  <a:srgbClr val="F1F5F9"/>
-                </a:solidFill>
-                <a:latin typeface="TH Sarabun New" pitchFamily="34" charset="0"/>
-                <a:ea typeface="TH Sarabun New" pitchFamily="34" charset="-122"/>
-                <a:cs typeface="TH Sarabun New" pitchFamily="34" charset="-120"/>
-              </a:rPr>
-              <a:t>ระบบตรวจให้ทันที</a:t>
-            </a:r>
-            <a:endParaRPr lang="en-US" sz="2100" dirty="0"/>
-          </a:p>
-        </p:txBody>
-      </p:sp>
-      <p:sp>
-        <p:nvSpPr>
-          <p:cNvPr id="42" name="Text 40"/>
-          <p:cNvSpPr/>
-          <p:nvPr/>
-        </p:nvSpPr>
-        <p:spPr>
-          <a:xfrm>
-            <a:off x="5852160" y="4133088"/>
-            <a:ext cx="5486400" cy="822960"/>
-          </a:xfrm>
-          <a:prstGeom prst="rect">
-            <a:avLst/>
-          </a:prstGeom>
-          <a:noFill/>
-          <a:ln/>
-        </p:spPr>
-        <p:txBody>
-          <a:bodyPr wrap="square" lIns="0" tIns="0" rIns="0" bIns="0" rtlCol="0" anchor="ctr"/>
-          <a:lstStyle/>
-          <a:p>
-            <a:pPr indent="0" marL="0">
-              <a:buNone/>
-            </a:pPr>
-            <a:r>
-              <a:rPr lang="en-US" sz="1800" dirty="0">
-                <a:solidFill>
-                  <a:srgbClr val="94A3B8"/>
-                </a:solidFill>
-                <a:latin typeface="TH Sarabun New" pitchFamily="34" charset="0"/>
-                <a:ea typeface="TH Sarabun New" pitchFamily="34" charset="-122"/>
-                <a:cs typeface="TH Sarabun New" pitchFamily="34" charset="-120"/>
-              </a:rPr>
-              <a:t>แจ้งเตือน (แดง) เมื่อซ้ำแถวแนวนอน/แนวตั้ง/ตารางย่อย</a:t>
-            </a:r>
-            <a:endParaRPr lang="en-US" sz="1800" dirty="0"/>
-          </a:p>
-        </p:txBody>
-      </p:sp>
-      <p:sp>
-        <p:nvSpPr>
-          <p:cNvPr id="43" name="Shape 41"/>
-          <p:cNvSpPr/>
-          <p:nvPr/>
-        </p:nvSpPr>
-        <p:spPr>
-          <a:xfrm>
-            <a:off x="640080" y="5148072"/>
-            <a:ext cx="10908792" cy="914400"/>
-          </a:xfrm>
-          <a:prstGeom prst="roundRect">
-            <a:avLst>
-              <a:gd name="adj" fmla="val 9000"/>
-            </a:avLst>
-          </a:prstGeom>
-          <a:solidFill>
-            <a:srgbClr val="1A2340"/>
-          </a:solidFill>
-          <a:ln w="12700">
-            <a:solidFill>
-              <a:srgbClr val="2A3550"/>
-            </a:solidFill>
-            <a:prstDash val="solid"/>
-          </a:ln>
-          <a:effectLst>
-            <a:outerShdw sx="100000" sy="100000" kx="0" ky="0" algn="bl" rotWithShape="0" blurRad="127000" dist="38100" dir="5400000">
-              <a:srgbClr val="000000">
-                <a:alpha val="35000"/>
-              </a:srgbClr>
-            </a:outerShdw>
-          </a:effectLst>
-        </p:spPr>
-      </p:sp>
-      <p:sp>
-        <p:nvSpPr>
-          <p:cNvPr id="44" name="Shape 42"/>
-          <p:cNvSpPr/>
-          <p:nvPr/>
-        </p:nvSpPr>
-        <p:spPr>
-          <a:xfrm>
-            <a:off x="914400" y="5312664"/>
-            <a:ext cx="594360" cy="594360"/>
-          </a:xfrm>
-          <a:prstGeom prst="ellipse">
-            <a:avLst/>
-          </a:prstGeom>
-          <a:solidFill>
-            <a:srgbClr val="22D3EE"/>
-          </a:solidFill>
-          <a:ln/>
-          <a:effectLst>
-            <a:outerShdw sx="100000" sy="100000" kx="0" ky="0" algn="bl" rotWithShape="0" blurRad="177800" dist="50800" dir="16200000">
-              <a:srgbClr val="22D3EE">
-                <a:alpha val="50000"/>
-              </a:srgbClr>
-            </a:outerShdw>
-          </a:effectLst>
-        </p:spPr>
-      </p:sp>
-      <p:sp>
-        <p:nvSpPr>
-          <p:cNvPr id="45" name="Text 43"/>
-          <p:cNvSpPr/>
-          <p:nvPr/>
-        </p:nvSpPr>
-        <p:spPr>
-          <a:xfrm>
-            <a:off x="914400" y="5312664"/>
-            <a:ext cx="594360" cy="594360"/>
-          </a:xfrm>
-          <a:prstGeom prst="rect">
-            <a:avLst/>
-          </a:prstGeom>
-          <a:noFill/>
-          <a:ln/>
-        </p:spPr>
-        <p:txBody>
-          <a:bodyPr wrap="square" lIns="0" tIns="0" rIns="0" bIns="0" rtlCol="0" anchor="ctr"/>
-          <a:lstStyle/>
-          <a:p>
-            <a:pPr algn="ctr" indent="0" marL="0">
-              <a:buNone/>
-            </a:pPr>
-            <a:r>
-              <a:rPr lang="en-US" sz="2200" b="1" dirty="0">
-                <a:solidFill>
-                  <a:srgbClr val="0B1020"/>
-                </a:solidFill>
-                <a:latin typeface="TH Sarabun New" pitchFamily="34" charset="0"/>
-                <a:ea typeface="TH Sarabun New" pitchFamily="34" charset="-122"/>
-                <a:cs typeface="TH Sarabun New" pitchFamily="34" charset="-120"/>
-              </a:rPr>
-              <a:t>4</a:t>
-            </a:r>
-            <a:endParaRPr lang="en-US" sz="2200" dirty="0"/>
-          </a:p>
-        </p:txBody>
-      </p:sp>
-      <p:sp>
-        <p:nvSpPr>
-          <p:cNvPr id="46" name="Text 44"/>
-          <p:cNvSpPr/>
-          <p:nvPr/>
-        </p:nvSpPr>
-        <p:spPr>
-          <a:xfrm>
-            <a:off x="1783080" y="5193792"/>
-            <a:ext cx="4023360" cy="822960"/>
-          </a:xfrm>
-          <a:prstGeom prst="rect">
-            <a:avLst/>
-          </a:prstGeom>
-          <a:noFill/>
-          <a:ln/>
-        </p:spPr>
-        <p:txBody>
-          <a:bodyPr wrap="square" lIns="0" tIns="0" rIns="0" bIns="0" rtlCol="0" anchor="ctr"/>
-          <a:lstStyle/>
-          <a:p>
-            <a:pPr indent="0" marL="0">
+            <a:pPr marL="0" indent="0">
               <a:buNone/>
             </a:pPr>
             <a:r>
@@ -13439,7 +17760,7 @@
         </p:nvSpPr>
         <p:spPr>
           <a:xfrm>
-            <a:off x="5852160" y="5193792"/>
+            <a:off x="5852160" y="4133088"/>
             <a:ext cx="5486400" cy="822960"/>
           </a:xfrm>
           <a:prstGeom prst="rect">
@@ -13452,7 +17773,7 @@
           <a:bodyPr wrap="square" lIns="0" tIns="0" rIns="0" bIns="0" rtlCol="0" anchor="ctr"/>
           <a:lstStyle/>
           <a:p>
-            <a:pPr indent="0" marL="0">
+            <a:pPr marL="0" indent="0">
               <a:buNone/>
             </a:pPr>
             <a:r>
@@ -13475,10 +17796,22 @@
   <p:clrMapOvr>
     <a:masterClrMapping/>
   </p:clrMapOvr>
+  <mc:AlternateContent xmlns:mc="http://schemas.openxmlformats.org/markup-compatibility/2006">
+    <mc:Choice xmlns:p159="http://schemas.microsoft.com/office/powerpoint/2015/09/main" Requires="p159">
+      <p:transition xmlns:p14="http://schemas.microsoft.com/office/powerpoint/2010/main" spd="slow" p14:dur="2000">
+        <p159:morph option="byObject"/>
+      </p:transition>
+    </mc:Choice>
+    <mc:Fallback>
+      <p:transition spd="slow">
+        <p:fade/>
+      </p:transition>
+    </mc:Fallback>
+  </mc:AlternateContent>
 </p:sld>
 </file>
 
-<file path=ppt/slides/slide8.xml><?xml version="1.0" encoding="utf-8"?>
+<file path=ppt/slides/slide9.xml><?xml version="1.0" encoding="utf-8"?>
 <p:sld xmlns:a="http://schemas.openxmlformats.org/drawingml/2006/main" xmlns:r="http://schemas.openxmlformats.org/officeDocument/2006/relationships" xmlns:p="http://schemas.openxmlformats.org/presentationml/2006/main">
   <p:cSld name="Slide 8">
     <p:bg>
@@ -13486,6 +17819,7 @@
         <a:solidFill>
           <a:srgbClr val="0B1020"/>
         </a:solidFill>
+        <a:effectLst/>
       </p:bgPr>
     </p:bg>
     <p:spTree>
@@ -14051,11 +18385,11 @@
           <a:bodyPr wrap="square" lIns="0" tIns="0" rIns="0" bIns="0" rtlCol="0" anchor="ctr"/>
           <a:lstStyle/>
           <a:p>
-            <a:pPr indent="0" marL="0">
+            <a:pPr marL="0" indent="0">
               <a:buNone/>
             </a:pPr>
             <a:r>
-              <a:rPr lang="en-US" sz="1300" b="1" spc="300" kern="0" dirty="0">
+              <a:rPr lang="en-US" sz="1300" b="1" kern="0" spc="300" dirty="0">
                 <a:solidFill>
                   <a:srgbClr val="22D3EE"/>
                 </a:solidFill>
@@ -14090,7 +18424,7 @@
           <a:bodyPr wrap="square" lIns="0" tIns="0" rIns="0" bIns="0" rtlCol="0" anchor="ctr"/>
           <a:lstStyle/>
           <a:p>
-            <a:pPr indent="0" marL="0">
+            <a:pPr marL="0" indent="0">
               <a:buNone/>
             </a:pPr>
             <a:r>
@@ -14134,7 +18468,7 @@
             <a:prstDash val="solid"/>
           </a:ln>
           <a:effectLst>
-            <a:outerShdw sx="100000" sy="100000" kx="0" ky="0" algn="bl" rotWithShape="0" blurRad="127000" dist="38100" dir="5400000">
+            <a:outerShdw blurRad="127000" dist="38100" dir="5400000" algn="bl" rotWithShape="0">
               <a:srgbClr val="000000">
                 <a:alpha val="35000"/>
               </a:srgbClr>
@@ -14215,7 +18549,7 @@
           <a:bodyPr wrap="square" lIns="0" tIns="0" rIns="0" bIns="0" rtlCol="0" anchor="ctr"/>
           <a:lstStyle/>
           <a:p>
-            <a:pPr algn="ctr" indent="0" marL="0">
+            <a:pPr marL="0" indent="0" algn="ctr">
               <a:buNone/>
             </a:pPr>
             <a:r>
@@ -14454,7 +18788,7 @@
           <a:bodyPr wrap="square" lIns="0" tIns="0" rIns="0" bIns="0" rtlCol="0" anchor="ctr"/>
           <a:lstStyle/>
           <a:p>
-            <a:pPr algn="ctr" indent="0" marL="0">
+            <a:pPr marL="0" indent="0" algn="ctr">
               <a:buNone/>
             </a:pPr>
             <a:r>
@@ -14720,7 +19054,7 @@
           <a:bodyPr wrap="square" lIns="0" tIns="0" rIns="0" bIns="0" rtlCol="0" anchor="ctr"/>
           <a:lstStyle/>
           <a:p>
-            <a:pPr algn="ctr" indent="0" marL="0">
+            <a:pPr marL="0" indent="0" algn="ctr">
               <a:buNone/>
             </a:pPr>
             <a:r>
@@ -15009,7 +19343,7 @@
           <a:bodyPr wrap="square" lIns="0" tIns="0" rIns="0" bIns="0" rtlCol="0" anchor="ctr"/>
           <a:lstStyle/>
           <a:p>
-            <a:pPr algn="ctr" indent="0" marL="0">
+            <a:pPr marL="0" indent="0" algn="ctr">
               <a:buNone/>
             </a:pPr>
             <a:r>
@@ -15225,7 +19559,7 @@
           <a:bodyPr wrap="square" lIns="0" tIns="0" rIns="0" bIns="0" rtlCol="0" anchor="ctr"/>
           <a:lstStyle/>
           <a:p>
-            <a:pPr algn="ctr" indent="0" marL="0">
+            <a:pPr marL="0" indent="0" algn="ctr">
               <a:buNone/>
             </a:pPr>
             <a:r>
@@ -15430,7 +19764,7 @@
             <a:prstDash val="solid"/>
           </a:ln>
           <a:effectLst>
-            <a:outerShdw sx="100000" sy="100000" kx="0" ky="0" algn="bl" rotWithShape="0" blurRad="127000" dist="38100" dir="5400000">
+            <a:outerShdw blurRad="127000" dist="38100" dir="5400000" algn="bl" rotWithShape="0">
               <a:srgbClr val="000000">
                 <a:alpha val="35000"/>
               </a:srgbClr>
@@ -15549,1019 +19883,18 @@
   <p:clrMapOvr>
     <a:masterClrMapping/>
   </p:clrMapOvr>
-</p:sld>
-</file>
-
-<file path=ppt/slides/slide9.xml><?xml version="1.0" encoding="utf-8"?>
-<p:sld xmlns:a="http://schemas.openxmlformats.org/drawingml/2006/main" xmlns:r="http://schemas.openxmlformats.org/officeDocument/2006/relationships" xmlns:p="http://schemas.openxmlformats.org/presentationml/2006/main">
-  <p:cSld name="Slide 9">
-    <p:bg>
-      <p:bgPr>
-        <a:solidFill>
-          <a:srgbClr val="0B1020"/>
-        </a:solidFill>
-      </p:bgPr>
-    </p:bg>
-    <p:spTree>
-      <p:nvGrpSpPr>
-        <p:cNvPr id="1" name=""/>
-        <p:cNvGrpSpPr/>
-        <p:nvPr/>
-      </p:nvGrpSpPr>
-      <p:grpSpPr>
-        <a:xfrm>
-          <a:off x="0" y="0"/>
-          <a:ext cx="0" cy="0"/>
-          <a:chOff x="0" y="0"/>
-          <a:chExt cx="0" cy="0"/>
-        </a:xfrm>
-      </p:grpSpPr>
-      <p:sp>
-        <p:nvSpPr>
-          <p:cNvPr id="2" name="Shape 0"/>
-          <p:cNvSpPr/>
-          <p:nvPr/>
-        </p:nvSpPr>
-        <p:spPr>
-          <a:xfrm>
-            <a:off x="10451592" y="228600"/>
-            <a:ext cx="45720" cy="45720"/>
-          </a:xfrm>
-          <a:prstGeom prst="ellipse">
-            <a:avLst/>
-          </a:prstGeom>
-          <a:solidFill>
-            <a:srgbClr val="22D3EE">
-              <a:alpha val="25000"/>
-            </a:srgbClr>
-          </a:solidFill>
-          <a:ln/>
-        </p:spPr>
-      </p:sp>
-      <p:sp>
-        <p:nvSpPr>
-          <p:cNvPr id="3" name="Shape 1"/>
-          <p:cNvSpPr/>
-          <p:nvPr/>
-        </p:nvSpPr>
-        <p:spPr>
-          <a:xfrm>
-            <a:off x="10451592" y="502920"/>
-            <a:ext cx="45720" cy="45720"/>
-          </a:xfrm>
-          <a:prstGeom prst="ellipse">
-            <a:avLst/>
-          </a:prstGeom>
-          <a:solidFill>
-            <a:srgbClr val="22D3EE">
-              <a:alpha val="25000"/>
-            </a:srgbClr>
-          </a:solidFill>
-          <a:ln/>
-        </p:spPr>
-      </p:sp>
-      <p:sp>
-        <p:nvSpPr>
-          <p:cNvPr id="4" name="Shape 2"/>
-          <p:cNvSpPr/>
-          <p:nvPr/>
-        </p:nvSpPr>
-        <p:spPr>
-          <a:xfrm>
-            <a:off x="10451592" y="777240"/>
-            <a:ext cx="45720" cy="45720"/>
-          </a:xfrm>
-          <a:prstGeom prst="ellipse">
-            <a:avLst/>
-          </a:prstGeom>
-          <a:solidFill>
-            <a:srgbClr val="22D3EE">
-              <a:alpha val="25000"/>
-            </a:srgbClr>
-          </a:solidFill>
-          <a:ln/>
-        </p:spPr>
-      </p:sp>
-      <p:sp>
-        <p:nvSpPr>
-          <p:cNvPr id="5" name="Shape 3"/>
-          <p:cNvSpPr/>
-          <p:nvPr/>
-        </p:nvSpPr>
-        <p:spPr>
-          <a:xfrm>
-            <a:off x="10451592" y="1051560"/>
-            <a:ext cx="45720" cy="45720"/>
-          </a:xfrm>
-          <a:prstGeom prst="ellipse">
-            <a:avLst/>
-          </a:prstGeom>
-          <a:solidFill>
-            <a:srgbClr val="22D3EE">
-              <a:alpha val="25000"/>
-            </a:srgbClr>
-          </a:solidFill>
-          <a:ln/>
-        </p:spPr>
-      </p:sp>
-      <p:sp>
-        <p:nvSpPr>
-          <p:cNvPr id="6" name="Shape 4"/>
-          <p:cNvSpPr/>
-          <p:nvPr/>
-        </p:nvSpPr>
-        <p:spPr>
-          <a:xfrm>
-            <a:off x="10725912" y="228600"/>
-            <a:ext cx="45720" cy="45720"/>
-          </a:xfrm>
-          <a:prstGeom prst="ellipse">
-            <a:avLst/>
-          </a:prstGeom>
-          <a:solidFill>
-            <a:srgbClr val="22D3EE">
-              <a:alpha val="25000"/>
-            </a:srgbClr>
-          </a:solidFill>
-          <a:ln/>
-        </p:spPr>
-      </p:sp>
-      <p:sp>
-        <p:nvSpPr>
-          <p:cNvPr id="7" name="Shape 5"/>
-          <p:cNvSpPr/>
-          <p:nvPr/>
-        </p:nvSpPr>
-        <p:spPr>
-          <a:xfrm>
-            <a:off x="10725912" y="502920"/>
-            <a:ext cx="45720" cy="45720"/>
-          </a:xfrm>
-          <a:prstGeom prst="ellipse">
-            <a:avLst/>
-          </a:prstGeom>
-          <a:solidFill>
-            <a:srgbClr val="22D3EE">
-              <a:alpha val="25000"/>
-            </a:srgbClr>
-          </a:solidFill>
-          <a:ln/>
-        </p:spPr>
-      </p:sp>
-      <p:sp>
-        <p:nvSpPr>
-          <p:cNvPr id="8" name="Shape 6"/>
-          <p:cNvSpPr/>
-          <p:nvPr/>
-        </p:nvSpPr>
-        <p:spPr>
-          <a:xfrm>
-            <a:off x="10725912" y="777240"/>
-            <a:ext cx="45720" cy="45720"/>
-          </a:xfrm>
-          <a:prstGeom prst="ellipse">
-            <a:avLst/>
-          </a:prstGeom>
-          <a:solidFill>
-            <a:srgbClr val="22D3EE">
-              <a:alpha val="25000"/>
-            </a:srgbClr>
-          </a:solidFill>
-          <a:ln/>
-        </p:spPr>
-      </p:sp>
-      <p:sp>
-        <p:nvSpPr>
-          <p:cNvPr id="9" name="Shape 7"/>
-          <p:cNvSpPr/>
-          <p:nvPr/>
-        </p:nvSpPr>
-        <p:spPr>
-          <a:xfrm>
-            <a:off x="10725912" y="1051560"/>
-            <a:ext cx="45720" cy="45720"/>
-          </a:xfrm>
-          <a:prstGeom prst="ellipse">
-            <a:avLst/>
-          </a:prstGeom>
-          <a:solidFill>
-            <a:srgbClr val="22D3EE">
-              <a:alpha val="25000"/>
-            </a:srgbClr>
-          </a:solidFill>
-          <a:ln/>
-        </p:spPr>
-      </p:sp>
-      <p:sp>
-        <p:nvSpPr>
-          <p:cNvPr id="10" name="Shape 8"/>
-          <p:cNvSpPr/>
-          <p:nvPr/>
-        </p:nvSpPr>
-        <p:spPr>
-          <a:xfrm>
-            <a:off x="11000232" y="228600"/>
-            <a:ext cx="45720" cy="45720"/>
-          </a:xfrm>
-          <a:prstGeom prst="ellipse">
-            <a:avLst/>
-          </a:prstGeom>
-          <a:solidFill>
-            <a:srgbClr val="22D3EE">
-              <a:alpha val="25000"/>
-            </a:srgbClr>
-          </a:solidFill>
-          <a:ln/>
-        </p:spPr>
-      </p:sp>
-      <p:sp>
-        <p:nvSpPr>
-          <p:cNvPr id="11" name="Shape 9"/>
-          <p:cNvSpPr/>
-          <p:nvPr/>
-        </p:nvSpPr>
-        <p:spPr>
-          <a:xfrm>
-            <a:off x="11000232" y="502920"/>
-            <a:ext cx="45720" cy="45720"/>
-          </a:xfrm>
-          <a:prstGeom prst="ellipse">
-            <a:avLst/>
-          </a:prstGeom>
-          <a:solidFill>
-            <a:srgbClr val="22D3EE">
-              <a:alpha val="25000"/>
-            </a:srgbClr>
-          </a:solidFill>
-          <a:ln/>
-        </p:spPr>
-      </p:sp>
-      <p:sp>
-        <p:nvSpPr>
-          <p:cNvPr id="12" name="Shape 10"/>
-          <p:cNvSpPr/>
-          <p:nvPr/>
-        </p:nvSpPr>
-        <p:spPr>
-          <a:xfrm>
-            <a:off x="11000232" y="777240"/>
-            <a:ext cx="45720" cy="45720"/>
-          </a:xfrm>
-          <a:prstGeom prst="ellipse">
-            <a:avLst/>
-          </a:prstGeom>
-          <a:solidFill>
-            <a:srgbClr val="22D3EE">
-              <a:alpha val="25000"/>
-            </a:srgbClr>
-          </a:solidFill>
-          <a:ln/>
-        </p:spPr>
-      </p:sp>
-      <p:sp>
-        <p:nvSpPr>
-          <p:cNvPr id="13" name="Shape 11"/>
-          <p:cNvSpPr/>
-          <p:nvPr/>
-        </p:nvSpPr>
-        <p:spPr>
-          <a:xfrm>
-            <a:off x="11000232" y="1051560"/>
-            <a:ext cx="45720" cy="45720"/>
-          </a:xfrm>
-          <a:prstGeom prst="ellipse">
-            <a:avLst/>
-          </a:prstGeom>
-          <a:solidFill>
-            <a:srgbClr val="22D3EE">
-              <a:alpha val="25000"/>
-            </a:srgbClr>
-          </a:solidFill>
-          <a:ln/>
-        </p:spPr>
-      </p:sp>
-      <p:sp>
-        <p:nvSpPr>
-          <p:cNvPr id="14" name="Shape 12"/>
-          <p:cNvSpPr/>
-          <p:nvPr/>
-        </p:nvSpPr>
-        <p:spPr>
-          <a:xfrm>
-            <a:off x="11274552" y="228600"/>
-            <a:ext cx="45720" cy="45720"/>
-          </a:xfrm>
-          <a:prstGeom prst="ellipse">
-            <a:avLst/>
-          </a:prstGeom>
-          <a:solidFill>
-            <a:srgbClr val="22D3EE">
-              <a:alpha val="25000"/>
-            </a:srgbClr>
-          </a:solidFill>
-          <a:ln/>
-        </p:spPr>
-      </p:sp>
-      <p:sp>
-        <p:nvSpPr>
-          <p:cNvPr id="15" name="Shape 13"/>
-          <p:cNvSpPr/>
-          <p:nvPr/>
-        </p:nvSpPr>
-        <p:spPr>
-          <a:xfrm>
-            <a:off x="11274552" y="502920"/>
-            <a:ext cx="45720" cy="45720"/>
-          </a:xfrm>
-          <a:prstGeom prst="ellipse">
-            <a:avLst/>
-          </a:prstGeom>
-          <a:solidFill>
-            <a:srgbClr val="22D3EE">
-              <a:alpha val="25000"/>
-            </a:srgbClr>
-          </a:solidFill>
-          <a:ln/>
-        </p:spPr>
-      </p:sp>
-      <p:sp>
-        <p:nvSpPr>
-          <p:cNvPr id="16" name="Shape 14"/>
-          <p:cNvSpPr/>
-          <p:nvPr/>
-        </p:nvSpPr>
-        <p:spPr>
-          <a:xfrm>
-            <a:off x="11274552" y="777240"/>
-            <a:ext cx="45720" cy="45720"/>
-          </a:xfrm>
-          <a:prstGeom prst="ellipse">
-            <a:avLst/>
-          </a:prstGeom>
-          <a:solidFill>
-            <a:srgbClr val="22D3EE">
-              <a:alpha val="25000"/>
-            </a:srgbClr>
-          </a:solidFill>
-          <a:ln/>
-        </p:spPr>
-      </p:sp>
-      <p:sp>
-        <p:nvSpPr>
-          <p:cNvPr id="17" name="Shape 15"/>
-          <p:cNvSpPr/>
-          <p:nvPr/>
-        </p:nvSpPr>
-        <p:spPr>
-          <a:xfrm>
-            <a:off x="11274552" y="1051560"/>
-            <a:ext cx="45720" cy="45720"/>
-          </a:xfrm>
-          <a:prstGeom prst="ellipse">
-            <a:avLst/>
-          </a:prstGeom>
-          <a:solidFill>
-            <a:srgbClr val="22D3EE">
-              <a:alpha val="25000"/>
-            </a:srgbClr>
-          </a:solidFill>
-          <a:ln/>
-        </p:spPr>
-      </p:sp>
-      <p:sp>
-        <p:nvSpPr>
-          <p:cNvPr id="18" name="Shape 16"/>
-          <p:cNvSpPr/>
-          <p:nvPr/>
-        </p:nvSpPr>
-        <p:spPr>
-          <a:xfrm>
-            <a:off x="11548872" y="228600"/>
-            <a:ext cx="45720" cy="45720"/>
-          </a:xfrm>
-          <a:prstGeom prst="ellipse">
-            <a:avLst/>
-          </a:prstGeom>
-          <a:solidFill>
-            <a:srgbClr val="22D3EE">
-              <a:alpha val="25000"/>
-            </a:srgbClr>
-          </a:solidFill>
-          <a:ln/>
-        </p:spPr>
-      </p:sp>
-      <p:sp>
-        <p:nvSpPr>
-          <p:cNvPr id="19" name="Shape 17"/>
-          <p:cNvSpPr/>
-          <p:nvPr/>
-        </p:nvSpPr>
-        <p:spPr>
-          <a:xfrm>
-            <a:off x="11548872" y="502920"/>
-            <a:ext cx="45720" cy="45720"/>
-          </a:xfrm>
-          <a:prstGeom prst="ellipse">
-            <a:avLst/>
-          </a:prstGeom>
-          <a:solidFill>
-            <a:srgbClr val="22D3EE">
-              <a:alpha val="25000"/>
-            </a:srgbClr>
-          </a:solidFill>
-          <a:ln/>
-        </p:spPr>
-      </p:sp>
-      <p:sp>
-        <p:nvSpPr>
-          <p:cNvPr id="20" name="Shape 18"/>
-          <p:cNvSpPr/>
-          <p:nvPr/>
-        </p:nvSpPr>
-        <p:spPr>
-          <a:xfrm>
-            <a:off x="11548872" y="777240"/>
-            <a:ext cx="45720" cy="45720"/>
-          </a:xfrm>
-          <a:prstGeom prst="ellipse">
-            <a:avLst/>
-          </a:prstGeom>
-          <a:solidFill>
-            <a:srgbClr val="22D3EE">
-              <a:alpha val="25000"/>
-            </a:srgbClr>
-          </a:solidFill>
-          <a:ln/>
-        </p:spPr>
-      </p:sp>
-      <p:sp>
-        <p:nvSpPr>
-          <p:cNvPr id="21" name="Shape 19"/>
-          <p:cNvSpPr/>
-          <p:nvPr/>
-        </p:nvSpPr>
-        <p:spPr>
-          <a:xfrm>
-            <a:off x="11548872" y="1051560"/>
-            <a:ext cx="45720" cy="45720"/>
-          </a:xfrm>
-          <a:prstGeom prst="ellipse">
-            <a:avLst/>
-          </a:prstGeom>
-          <a:solidFill>
-            <a:srgbClr val="22D3EE">
-              <a:alpha val="25000"/>
-            </a:srgbClr>
-          </a:solidFill>
-          <a:ln/>
-        </p:spPr>
-      </p:sp>
-      <p:sp>
-        <p:nvSpPr>
-          <p:cNvPr id="22" name="Shape 20"/>
-          <p:cNvSpPr/>
-          <p:nvPr/>
-        </p:nvSpPr>
-        <p:spPr>
-          <a:xfrm>
-            <a:off x="11823192" y="228600"/>
-            <a:ext cx="45720" cy="45720"/>
-          </a:xfrm>
-          <a:prstGeom prst="ellipse">
-            <a:avLst/>
-          </a:prstGeom>
-          <a:solidFill>
-            <a:srgbClr val="22D3EE">
-              <a:alpha val="25000"/>
-            </a:srgbClr>
-          </a:solidFill>
-          <a:ln/>
-        </p:spPr>
-      </p:sp>
-      <p:sp>
-        <p:nvSpPr>
-          <p:cNvPr id="23" name="Shape 21"/>
-          <p:cNvSpPr/>
-          <p:nvPr/>
-        </p:nvSpPr>
-        <p:spPr>
-          <a:xfrm>
-            <a:off x="11823192" y="502920"/>
-            <a:ext cx="45720" cy="45720"/>
-          </a:xfrm>
-          <a:prstGeom prst="ellipse">
-            <a:avLst/>
-          </a:prstGeom>
-          <a:solidFill>
-            <a:srgbClr val="22D3EE">
-              <a:alpha val="25000"/>
-            </a:srgbClr>
-          </a:solidFill>
-          <a:ln/>
-        </p:spPr>
-      </p:sp>
-      <p:sp>
-        <p:nvSpPr>
-          <p:cNvPr id="24" name="Shape 22"/>
-          <p:cNvSpPr/>
-          <p:nvPr/>
-        </p:nvSpPr>
-        <p:spPr>
-          <a:xfrm>
-            <a:off x="11823192" y="777240"/>
-            <a:ext cx="45720" cy="45720"/>
-          </a:xfrm>
-          <a:prstGeom prst="ellipse">
-            <a:avLst/>
-          </a:prstGeom>
-          <a:solidFill>
-            <a:srgbClr val="22D3EE">
-              <a:alpha val="25000"/>
-            </a:srgbClr>
-          </a:solidFill>
-          <a:ln/>
-        </p:spPr>
-      </p:sp>
-      <p:sp>
-        <p:nvSpPr>
-          <p:cNvPr id="25" name="Shape 23"/>
-          <p:cNvSpPr/>
-          <p:nvPr/>
-        </p:nvSpPr>
-        <p:spPr>
-          <a:xfrm>
-            <a:off x="11823192" y="1051560"/>
-            <a:ext cx="45720" cy="45720"/>
-          </a:xfrm>
-          <a:prstGeom prst="ellipse">
-            <a:avLst/>
-          </a:prstGeom>
-          <a:solidFill>
-            <a:srgbClr val="22D3EE">
-              <a:alpha val="25000"/>
-            </a:srgbClr>
-          </a:solidFill>
-          <a:ln/>
-        </p:spPr>
-      </p:sp>
-      <p:sp>
-        <p:nvSpPr>
-          <p:cNvPr id="26" name="Text 24"/>
-          <p:cNvSpPr/>
-          <p:nvPr/>
-        </p:nvSpPr>
-        <p:spPr>
-          <a:xfrm>
-            <a:off x="640080" y="411480"/>
-            <a:ext cx="7315200" cy="365760"/>
-          </a:xfrm>
-          <a:prstGeom prst="rect">
-            <a:avLst/>
-          </a:prstGeom>
-          <a:noFill/>
-          <a:ln/>
-        </p:spPr>
-        <p:txBody>
-          <a:bodyPr wrap="square" lIns="0" tIns="0" rIns="0" bIns="0" rtlCol="0" anchor="ctr"/>
-          <a:lstStyle/>
-          <a:p>
-            <a:pPr indent="0" marL="0">
-              <a:buNone/>
-            </a:pPr>
-            <a:r>
-              <a:rPr lang="en-US" sz="1300" b="1" spc="300" kern="0" dirty="0">
-                <a:solidFill>
-                  <a:srgbClr val="22D3EE"/>
-                </a:solidFill>
-                <a:latin typeface="Courier New" pitchFamily="34" charset="0"/>
-                <a:ea typeface="Courier New" pitchFamily="34" charset="-122"/>
-                <a:cs typeface="Courier New" pitchFamily="34" charset="-120"/>
-              </a:rPr>
-              <a:t>EVALUATE // EXIT TICKET</a:t>
-            </a:r>
-            <a:endParaRPr lang="en-US" sz="1300" dirty="0"/>
-          </a:p>
-        </p:txBody>
-      </p:sp>
-      <p:sp>
-        <p:nvSpPr>
-          <p:cNvPr id="27" name="Text 25"/>
-          <p:cNvSpPr/>
-          <p:nvPr/>
-        </p:nvSpPr>
-        <p:spPr>
-          <a:xfrm>
-            <a:off x="640080" y="777240"/>
-            <a:ext cx="10908792" cy="822960"/>
-          </a:xfrm>
-          <a:prstGeom prst="rect">
-            <a:avLst/>
-          </a:prstGeom>
-          <a:noFill/>
-          <a:ln/>
-        </p:spPr>
-        <p:txBody>
-          <a:bodyPr wrap="square" lIns="0" tIns="0" rIns="0" bIns="0" rtlCol="0" anchor="ctr"/>
-          <a:lstStyle/>
-          <a:p>
-            <a:pPr indent="0" marL="0">
-              <a:buNone/>
-            </a:pPr>
-            <a:r>
-              <a:rPr lang="en-US" sz="3400" b="1" dirty="0">
-                <a:solidFill>
-                  <a:srgbClr val="F1F5F9"/>
-                </a:solidFill>
-                <a:latin typeface="TH Sarabun New" pitchFamily="34" charset="0"/>
-                <a:ea typeface="TH Sarabun New" pitchFamily="34" charset="-122"/>
-                <a:cs typeface="TH Sarabun New" pitchFamily="34" charset="-120"/>
-              </a:rPr>
-              <a:t>วัดความรู้รายบุคคล (กระดานระดมความคิด)</a:t>
-            </a:r>
-            <a:endParaRPr lang="en-US" sz="3400" dirty="0"/>
-          </a:p>
-        </p:txBody>
-      </p:sp>
-      <p:sp>
-        <p:nvSpPr>
-          <p:cNvPr id="28" name="Shape 26"/>
-          <p:cNvSpPr/>
-          <p:nvPr/>
-        </p:nvSpPr>
-        <p:spPr>
-          <a:xfrm>
-            <a:off x="640080" y="2103120"/>
-            <a:ext cx="3429000" cy="3291840"/>
-          </a:xfrm>
-          <a:prstGeom prst="roundRect">
-            <a:avLst>
-              <a:gd name="adj" fmla="val 2500"/>
-            </a:avLst>
-          </a:prstGeom>
-          <a:solidFill>
-            <a:srgbClr val="141C33"/>
-          </a:solidFill>
-          <a:ln w="12700">
-            <a:solidFill>
-              <a:srgbClr val="2A3550"/>
-            </a:solidFill>
-            <a:prstDash val="solid"/>
-          </a:ln>
-          <a:effectLst>
-            <a:outerShdw sx="100000" sy="100000" kx="0" ky="0" algn="bl" rotWithShape="0" blurRad="127000" dist="38100" dir="5400000">
-              <a:srgbClr val="000000">
-                <a:alpha val="35000"/>
-              </a:srgbClr>
-            </a:outerShdw>
-          </a:effectLst>
-        </p:spPr>
-      </p:sp>
-      <p:sp>
-        <p:nvSpPr>
-          <p:cNvPr id="29" name="Text 27"/>
-          <p:cNvSpPr/>
-          <p:nvPr/>
-        </p:nvSpPr>
-        <p:spPr>
-          <a:xfrm>
-            <a:off x="960120" y="2377440"/>
-            <a:ext cx="2743200" cy="640080"/>
-          </a:xfrm>
-          <a:prstGeom prst="rect">
-            <a:avLst/>
-          </a:prstGeom>
-          <a:noFill/>
-          <a:ln/>
-        </p:spPr>
-        <p:txBody>
-          <a:bodyPr wrap="square" lIns="0" tIns="0" rIns="0" bIns="0" rtlCol="0" anchor="ctr"/>
-          <a:lstStyle/>
-          <a:p>
-            <a:pPr indent="0" marL="0">
-              <a:buNone/>
-            </a:pPr>
-            <a:r>
-              <a:rPr lang="en-US" sz="3000" b="1" dirty="0">
-                <a:solidFill>
-                  <a:srgbClr val="22D3EE"/>
-                </a:solidFill>
-                <a:latin typeface="Courier New" pitchFamily="34" charset="0"/>
-                <a:ea typeface="Courier New" pitchFamily="34" charset="-122"/>
-                <a:cs typeface="Courier New" pitchFamily="34" charset="-120"/>
-              </a:rPr>
-              <a:t>Q1</a:t>
-            </a:r>
-            <a:endParaRPr lang="en-US" sz="3000" dirty="0"/>
-          </a:p>
-        </p:txBody>
-      </p:sp>
-      <p:sp>
-        <p:nvSpPr>
-          <p:cNvPr id="30" name="Text 28"/>
-          <p:cNvSpPr/>
-          <p:nvPr/>
-        </p:nvSpPr>
-        <p:spPr>
-          <a:xfrm>
-            <a:off x="960120" y="3200400"/>
-            <a:ext cx="2788920" cy="1828800"/>
-          </a:xfrm>
-          <a:prstGeom prst="rect">
-            <a:avLst/>
-          </a:prstGeom>
-          <a:noFill/>
-          <a:ln/>
-        </p:spPr>
-        <p:txBody>
-          <a:bodyPr wrap="square" lIns="0" tIns="0" rIns="0" bIns="0" rtlCol="0" anchor="t"/>
-          <a:lstStyle/>
-          <a:p>
-            <a:pPr indent="0" marL="0">
-              <a:buNone/>
-            </a:pPr>
-            <a:r>
-              <a:rPr lang="en-US" sz="2000" dirty="0">
-                <a:solidFill>
-                  <a:srgbClr val="F1F5F9"/>
-                </a:solidFill>
-                <a:latin typeface="TH Sarabun New" pitchFamily="34" charset="0"/>
-                <a:ea typeface="TH Sarabun New" pitchFamily="34" charset="-122"/>
-                <a:cs typeface="TH Sarabun New" pitchFamily="34" charset="-120"/>
-              </a:rPr>
-              <a:t>จากตารางนี้ ควรเริ่มเติมช่องใดก่อน เพราะเหตุใด</a:t>
-            </a:r>
-            <a:endParaRPr lang="en-US" sz="2000" dirty="0"/>
-          </a:p>
-        </p:txBody>
-      </p:sp>
-      <p:sp>
-        <p:nvSpPr>
-          <p:cNvPr id="31" name="Shape 29"/>
-          <p:cNvSpPr/>
-          <p:nvPr/>
-        </p:nvSpPr>
-        <p:spPr>
-          <a:xfrm>
-            <a:off x="4343400" y="2103120"/>
-            <a:ext cx="3429000" cy="3291840"/>
-          </a:xfrm>
-          <a:prstGeom prst="roundRect">
-            <a:avLst>
-              <a:gd name="adj" fmla="val 2500"/>
-            </a:avLst>
-          </a:prstGeom>
-          <a:solidFill>
-            <a:srgbClr val="141C33"/>
-          </a:solidFill>
-          <a:ln w="12700">
-            <a:solidFill>
-              <a:srgbClr val="2A3550"/>
-            </a:solidFill>
-            <a:prstDash val="solid"/>
-          </a:ln>
-          <a:effectLst>
-            <a:outerShdw sx="100000" sy="100000" kx="0" ky="0" algn="bl" rotWithShape="0" blurRad="127000" dist="38100" dir="5400000">
-              <a:srgbClr val="000000">
-                <a:alpha val="35000"/>
-              </a:srgbClr>
-            </a:outerShdw>
-          </a:effectLst>
-        </p:spPr>
-      </p:sp>
-      <p:sp>
-        <p:nvSpPr>
-          <p:cNvPr id="32" name="Text 30"/>
-          <p:cNvSpPr/>
-          <p:nvPr/>
-        </p:nvSpPr>
-        <p:spPr>
-          <a:xfrm>
-            <a:off x="4663440" y="2377440"/>
-            <a:ext cx="2743200" cy="640080"/>
-          </a:xfrm>
-          <a:prstGeom prst="rect">
-            <a:avLst/>
-          </a:prstGeom>
-          <a:noFill/>
-          <a:ln/>
-        </p:spPr>
-        <p:txBody>
-          <a:bodyPr wrap="square" lIns="0" tIns="0" rIns="0" bIns="0" rtlCol="0" anchor="ctr"/>
-          <a:lstStyle/>
-          <a:p>
-            <a:pPr indent="0" marL="0">
-              <a:buNone/>
-            </a:pPr>
-            <a:r>
-              <a:rPr lang="en-US" sz="3000" b="1" dirty="0">
-                <a:solidFill>
-                  <a:srgbClr val="22D3EE"/>
-                </a:solidFill>
-                <a:latin typeface="Courier New" pitchFamily="34" charset="0"/>
-                <a:ea typeface="Courier New" pitchFamily="34" charset="-122"/>
-                <a:cs typeface="Courier New" pitchFamily="34" charset="-120"/>
-              </a:rPr>
-              <a:t>Q2</a:t>
-            </a:r>
-            <a:endParaRPr lang="en-US" sz="3000" dirty="0"/>
-          </a:p>
-        </p:txBody>
-      </p:sp>
-      <p:sp>
-        <p:nvSpPr>
-          <p:cNvPr id="33" name="Text 31"/>
-          <p:cNvSpPr/>
-          <p:nvPr/>
-        </p:nvSpPr>
-        <p:spPr>
-          <a:xfrm>
-            <a:off x="4663440" y="3200400"/>
-            <a:ext cx="2788920" cy="1828800"/>
-          </a:xfrm>
-          <a:prstGeom prst="rect">
-            <a:avLst/>
-          </a:prstGeom>
-          <a:noFill/>
-          <a:ln/>
-        </p:spPr>
-        <p:txBody>
-          <a:bodyPr wrap="square" lIns="0" tIns="0" rIns="0" bIns="0" rtlCol="0" anchor="t"/>
-          <a:lstStyle/>
-          <a:p>
-            <a:pPr indent="0" marL="0">
-              <a:buNone/>
-            </a:pPr>
-            <a:r>
-              <a:rPr lang="en-US" sz="2000" dirty="0">
-                <a:solidFill>
-                  <a:srgbClr val="F1F5F9"/>
-                </a:solidFill>
-                <a:latin typeface="TH Sarabun New" pitchFamily="34" charset="0"/>
-                <a:ea typeface="TH Sarabun New" pitchFamily="34" charset="-122"/>
-                <a:cs typeface="TH Sarabun New" pitchFamily="34" charset="-120"/>
-              </a:rPr>
-              <a:t>อธิบายกติกาซูโดกุด้วยคำพูดของตนเอง</a:t>
-            </a:r>
-            <a:endParaRPr lang="en-US" sz="2000" dirty="0"/>
-          </a:p>
-        </p:txBody>
-      </p:sp>
-      <p:sp>
-        <p:nvSpPr>
-          <p:cNvPr id="34" name="Shape 32"/>
-          <p:cNvSpPr/>
-          <p:nvPr/>
-        </p:nvSpPr>
-        <p:spPr>
-          <a:xfrm>
-            <a:off x="8046720" y="2103120"/>
-            <a:ext cx="3429000" cy="3291840"/>
-          </a:xfrm>
-          <a:prstGeom prst="roundRect">
-            <a:avLst>
-              <a:gd name="adj" fmla="val 2500"/>
-            </a:avLst>
-          </a:prstGeom>
-          <a:solidFill>
-            <a:srgbClr val="141C33"/>
-          </a:solidFill>
-          <a:ln w="12700">
-            <a:solidFill>
-              <a:srgbClr val="2A3550"/>
-            </a:solidFill>
-            <a:prstDash val="solid"/>
-          </a:ln>
-          <a:effectLst>
-            <a:outerShdw sx="100000" sy="100000" kx="0" ky="0" algn="bl" rotWithShape="0" blurRad="127000" dist="38100" dir="5400000">
-              <a:srgbClr val="000000">
-                <a:alpha val="35000"/>
-              </a:srgbClr>
-            </a:outerShdw>
-          </a:effectLst>
-        </p:spPr>
-      </p:sp>
-      <p:sp>
-        <p:nvSpPr>
-          <p:cNvPr id="35" name="Text 33"/>
-          <p:cNvSpPr/>
-          <p:nvPr/>
-        </p:nvSpPr>
-        <p:spPr>
-          <a:xfrm>
-            <a:off x="8366760" y="2377440"/>
-            <a:ext cx="2743200" cy="640080"/>
-          </a:xfrm>
-          <a:prstGeom prst="rect">
-            <a:avLst/>
-          </a:prstGeom>
-          <a:noFill/>
-          <a:ln/>
-        </p:spPr>
-        <p:txBody>
-          <a:bodyPr wrap="square" lIns="0" tIns="0" rIns="0" bIns="0" rtlCol="0" anchor="ctr"/>
-          <a:lstStyle/>
-          <a:p>
-            <a:pPr indent="0" marL="0">
-              <a:buNone/>
-            </a:pPr>
-            <a:r>
-              <a:rPr lang="en-US" sz="3000" b="1" dirty="0">
-                <a:solidFill>
-                  <a:srgbClr val="22D3EE"/>
-                </a:solidFill>
-                <a:latin typeface="Courier New" pitchFamily="34" charset="0"/>
-                <a:ea typeface="Courier New" pitchFamily="34" charset="-122"/>
-                <a:cs typeface="Courier New" pitchFamily="34" charset="-120"/>
-              </a:rPr>
-              <a:t>Q3</a:t>
-            </a:r>
-            <a:endParaRPr lang="en-US" sz="3000" dirty="0"/>
-          </a:p>
-        </p:txBody>
-      </p:sp>
-      <p:sp>
-        <p:nvSpPr>
-          <p:cNvPr id="36" name="Text 34"/>
-          <p:cNvSpPr/>
-          <p:nvPr/>
-        </p:nvSpPr>
-        <p:spPr>
-          <a:xfrm>
-            <a:off x="8366760" y="3200400"/>
-            <a:ext cx="2788920" cy="1828800"/>
-          </a:xfrm>
-          <a:prstGeom prst="rect">
-            <a:avLst/>
-          </a:prstGeom>
-          <a:noFill/>
-          <a:ln/>
-        </p:spPr>
-        <p:txBody>
-          <a:bodyPr wrap="square" lIns="0" tIns="0" rIns="0" bIns="0" rtlCol="0" anchor="t"/>
-          <a:lstStyle/>
-          <a:p>
-            <a:pPr indent="0" marL="0">
-              <a:buNone/>
-            </a:pPr>
-            <a:r>
-              <a:rPr lang="en-US" sz="2000" dirty="0">
-                <a:solidFill>
-                  <a:srgbClr val="F1F5F9"/>
-                </a:solidFill>
-                <a:latin typeface="TH Sarabun New" pitchFamily="34" charset="0"/>
-                <a:ea typeface="TH Sarabun New" pitchFamily="34" charset="-122"/>
-                <a:cs typeface="TH Sarabun New" pitchFamily="34" charset="-120"/>
-              </a:rPr>
-              <a:t>ยกตัวอย่างการใช้เหตุผลเชิงตรรกะในชีวิตประจำวัน 1 สถานการณ์</a:t>
-            </a:r>
-            <a:endParaRPr lang="en-US" sz="2000" dirty="0"/>
-          </a:p>
-        </p:txBody>
-      </p:sp>
-      <p:sp>
-        <p:nvSpPr>
-          <p:cNvPr id="37" name="Text 35"/>
-          <p:cNvSpPr/>
-          <p:nvPr/>
-        </p:nvSpPr>
-        <p:spPr>
-          <a:xfrm>
-            <a:off x="640080" y="5669280"/>
-            <a:ext cx="10908792" cy="457200"/>
-          </a:xfrm>
-          <a:prstGeom prst="rect">
-            <a:avLst/>
-          </a:prstGeom>
-          <a:noFill/>
-          <a:ln/>
-        </p:spPr>
-        <p:txBody>
-          <a:bodyPr wrap="square" lIns="0" tIns="0" rIns="0" bIns="0" rtlCol="0" anchor="ctr"/>
-          <a:lstStyle/>
-          <a:p>
-            <a:pPr algn="ctr" indent="0" marL="0">
-              <a:buNone/>
-            </a:pPr>
-            <a:r>
-              <a:rPr lang="en-US" sz="1700" dirty="0">
-                <a:solidFill>
-                  <a:srgbClr val="94A3B8"/>
-                </a:solidFill>
-                <a:latin typeface="TH Sarabun New" pitchFamily="34" charset="0"/>
-                <a:ea typeface="TH Sarabun New" pitchFamily="34" charset="-122"/>
-                <a:cs typeface="TH Sarabun New" pitchFamily="34" charset="-120"/>
-              </a:rPr>
-              <a:t>ตั้งค่า “เห็นเฉพาะโพสต์ของตนเอง” — ตอบอิสระ ครูอ่านประเมินรายคน</a:t>
-            </a:r>
-            <a:endParaRPr lang="en-US" sz="1700" dirty="0"/>
-          </a:p>
-        </p:txBody>
-      </p:sp>
-    </p:spTree>
-  </p:cSld>
-  <p:clrMapOvr>
-    <a:masterClrMapping/>
-  </p:clrMapOvr>
+  <mc:AlternateContent xmlns:mc="http://schemas.openxmlformats.org/markup-compatibility/2006">
+    <mc:Choice xmlns:p159="http://schemas.microsoft.com/office/powerpoint/2015/09/main" Requires="p159">
+      <p:transition xmlns:p14="http://schemas.microsoft.com/office/powerpoint/2010/main" spd="slow" p14:dur="2000">
+        <p159:morph option="byObject"/>
+      </p:transition>
+    </mc:Choice>
+    <mc:Fallback>
+      <p:transition spd="slow">
+        <p:fade/>
+      </p:transition>
+    </mc:Fallback>
+  </mc:AlternateContent>
 </p:sld>
 </file>
 
@@ -16858,4 +20191,299 @@
     </a:ext>
   </a:extLst>
 </a:theme>
+</file>
+
+<file path=ppt/theme/theme2.xml><?xml version="1.0" encoding="utf-8"?>
+<a:theme xmlns:a="http://schemas.openxmlformats.org/drawingml/2006/main" name="Office Theme">
+  <a:themeElements>
+    <a:clrScheme name="Office">
+      <a:dk1>
+        <a:sysClr val="windowText" lastClr="000000"/>
+      </a:dk1>
+      <a:lt1>
+        <a:sysClr val="window" lastClr="FFFFFF"/>
+      </a:lt1>
+      <a:dk2>
+        <a:srgbClr val="44546A"/>
+      </a:dk2>
+      <a:lt2>
+        <a:srgbClr val="E7E6E6"/>
+      </a:lt2>
+      <a:accent1>
+        <a:srgbClr val="4472C4"/>
+      </a:accent1>
+      <a:accent2>
+        <a:srgbClr val="ED7D31"/>
+      </a:accent2>
+      <a:accent3>
+        <a:srgbClr val="A5A5A5"/>
+      </a:accent3>
+      <a:accent4>
+        <a:srgbClr val="FFC000"/>
+      </a:accent4>
+      <a:accent5>
+        <a:srgbClr val="5B9BD5"/>
+      </a:accent5>
+      <a:accent6>
+        <a:srgbClr val="70AD47"/>
+      </a:accent6>
+      <a:hlink>
+        <a:srgbClr val="0563C1"/>
+      </a:hlink>
+      <a:folHlink>
+        <a:srgbClr val="954F72"/>
+      </a:folHlink>
+    </a:clrScheme>
+    <a:fontScheme name="Office">
+      <a:majorFont>
+        <a:latin typeface="Calibri Light" panose="020F0302020204030204"/>
+        <a:ea typeface=""/>
+        <a:cs typeface=""/>
+        <a:font script="Jpan" typeface="游ゴシック Light"/>
+        <a:font script="Hang" typeface="맑은 고딕"/>
+        <a:font script="Hans" typeface="等线 Light"/>
+        <a:font script="Hant" typeface="新細明體"/>
+        <a:font script="Arab" typeface="Times New Roman"/>
+        <a:font script="Hebr" typeface="Times New Roman"/>
+        <a:font script="Thai" typeface="Angsana New"/>
+        <a:font script="Ethi" typeface="Nyala"/>
+        <a:font script="Beng" typeface="Vrinda"/>
+        <a:font script="Gujr" typeface="Shruti"/>
+        <a:font script="Khmr" typeface="MoolBoran"/>
+        <a:font script="Knda" typeface="Tunga"/>
+        <a:font script="Guru" typeface="Raavi"/>
+        <a:font script="Cans" typeface="Euphemia"/>
+        <a:font script="Cher" typeface="Plantagenet Cherokee"/>
+        <a:font script="Yiii" typeface="Microsoft Yi Baiti"/>
+        <a:font script="Tibt" typeface="Microsoft Himalaya"/>
+        <a:font script="Thaa" typeface="MV Boli"/>
+        <a:font script="Deva" typeface="Mangal"/>
+        <a:font script="Telu" typeface="Gautami"/>
+        <a:font script="Taml" typeface="Latha"/>
+        <a:font script="Syrc" typeface="Estrangelo Edessa"/>
+        <a:font script="Orya" typeface="Kalinga"/>
+        <a:font script="Mlym" typeface="Kartika"/>
+        <a:font script="Laoo" typeface="DokChampa"/>
+        <a:font script="Sinh" typeface="Iskoola Pota"/>
+        <a:font script="Mong" typeface="Mongolian Baiti"/>
+        <a:font script="Viet" typeface="Times New Roman"/>
+        <a:font script="Uigh" typeface="Microsoft Uighur"/>
+        <a:font script="Geor" typeface="Sylfaen"/>
+        <a:font script="Armn" typeface="Arial"/>
+        <a:font script="Bugi" typeface="Leelawadee UI"/>
+        <a:font script="Bopo" typeface="Microsoft JhengHei"/>
+        <a:font script="Java" typeface="Javanese Text"/>
+        <a:font script="Lisu" typeface="Segoe UI"/>
+        <a:font script="Mymr" typeface="Myanmar Text"/>
+        <a:font script="Nkoo" typeface="Ebrima"/>
+        <a:font script="Olck" typeface="Nirmala UI"/>
+        <a:font script="Osma" typeface="Ebrima"/>
+        <a:font script="Phag" typeface="Phagspa"/>
+        <a:font script="Syrn" typeface="Estrangelo Edessa"/>
+        <a:font script="Syrj" typeface="Estrangelo Edessa"/>
+        <a:font script="Syre" typeface="Estrangelo Edessa"/>
+        <a:font script="Sora" typeface="Nirmala UI"/>
+        <a:font script="Tale" typeface="Microsoft Tai Le"/>
+        <a:font script="Talu" typeface="Microsoft New Tai Lue"/>
+        <a:font script="Tfng" typeface="Ebrima"/>
+      </a:majorFont>
+      <a:minorFont>
+        <a:latin typeface="Calibri" panose="020F0502020204030204"/>
+        <a:ea typeface=""/>
+        <a:cs typeface=""/>
+        <a:font script="Jpan" typeface="游ゴシック"/>
+        <a:font script="Hang" typeface="맑은 고딕"/>
+        <a:font script="Hans" typeface="等线"/>
+        <a:font script="Hant" typeface="新細明體"/>
+        <a:font script="Arab" typeface="Arial"/>
+        <a:font script="Hebr" typeface="Arial"/>
+        <a:font script="Thai" typeface="Cordia New"/>
+        <a:font script="Ethi" typeface="Nyala"/>
+        <a:font script="Beng" typeface="Vrinda"/>
+        <a:font script="Gujr" typeface="Shruti"/>
+        <a:font script="Khmr" typeface="DaunPenh"/>
+        <a:font script="Knda" typeface="Tunga"/>
+        <a:font script="Guru" typeface="Raavi"/>
+        <a:font script="Cans" typeface="Euphemia"/>
+        <a:font script="Cher" typeface="Plantagenet Cherokee"/>
+        <a:font script="Yiii" typeface="Microsoft Yi Baiti"/>
+        <a:font script="Tibt" typeface="Microsoft Himalaya"/>
+        <a:font script="Thaa" typeface="MV Boli"/>
+        <a:font script="Deva" typeface="Mangal"/>
+        <a:font script="Telu" typeface="Gautami"/>
+        <a:font script="Taml" typeface="Latha"/>
+        <a:font script="Syrc" typeface="Estrangelo Edessa"/>
+        <a:font script="Orya" typeface="Kalinga"/>
+        <a:font script="Mlym" typeface="Kartika"/>
+        <a:font script="Laoo" typeface="DokChampa"/>
+        <a:font script="Sinh" typeface="Iskoola Pota"/>
+        <a:font script="Mong" typeface="Mongolian Baiti"/>
+        <a:font script="Viet" typeface="Arial"/>
+        <a:font script="Uigh" typeface="Microsoft Uighur"/>
+        <a:font script="Geor" typeface="Sylfaen"/>
+        <a:font script="Armn" typeface="Arial"/>
+        <a:font script="Bugi" typeface="Leelawadee UI"/>
+        <a:font script="Bopo" typeface="Microsoft JhengHei"/>
+        <a:font script="Java" typeface="Javanese Text"/>
+        <a:font script="Lisu" typeface="Segoe UI"/>
+        <a:font script="Mymr" typeface="Myanmar Text"/>
+        <a:font script="Nkoo" typeface="Ebrima"/>
+        <a:font script="Olck" typeface="Nirmala UI"/>
+        <a:font script="Osma" typeface="Ebrima"/>
+        <a:font script="Phag" typeface="Phagspa"/>
+        <a:font script="Syrn" typeface="Estrangelo Edessa"/>
+        <a:font script="Syrj" typeface="Estrangelo Edessa"/>
+        <a:font script="Syre" typeface="Estrangelo Edessa"/>
+        <a:font script="Sora" typeface="Nirmala UI"/>
+        <a:font script="Tale" typeface="Microsoft Tai Le"/>
+        <a:font script="Talu" typeface="Microsoft New Tai Lue"/>
+        <a:font script="Tfng" typeface="Ebrima"/>
+      </a:minorFont>
+    </a:fontScheme>
+    <a:fmtScheme name="Office">
+      <a:fillStyleLst>
+        <a:solidFill>
+          <a:schemeClr val="phClr"/>
+        </a:solidFill>
+        <a:gradFill rotWithShape="1">
+          <a:gsLst>
+            <a:gs pos="0">
+              <a:schemeClr val="phClr">
+                <a:lumMod val="110000"/>
+                <a:satMod val="105000"/>
+                <a:tint val="67000"/>
+              </a:schemeClr>
+            </a:gs>
+            <a:gs pos="50000">
+              <a:schemeClr val="phClr">
+                <a:lumMod val="105000"/>
+                <a:satMod val="103000"/>
+                <a:tint val="73000"/>
+              </a:schemeClr>
+            </a:gs>
+            <a:gs pos="100000">
+              <a:schemeClr val="phClr">
+                <a:lumMod val="105000"/>
+                <a:satMod val="109000"/>
+                <a:tint val="81000"/>
+              </a:schemeClr>
+            </a:gs>
+          </a:gsLst>
+          <a:lin ang="5400000" scaled="0"/>
+        </a:gradFill>
+        <a:gradFill rotWithShape="1">
+          <a:gsLst>
+            <a:gs pos="0">
+              <a:schemeClr val="phClr">
+                <a:satMod val="103000"/>
+                <a:lumMod val="102000"/>
+                <a:tint val="94000"/>
+              </a:schemeClr>
+            </a:gs>
+            <a:gs pos="50000">
+              <a:schemeClr val="phClr">
+                <a:satMod val="110000"/>
+                <a:lumMod val="100000"/>
+                <a:shade val="100000"/>
+              </a:schemeClr>
+            </a:gs>
+            <a:gs pos="100000">
+              <a:schemeClr val="phClr">
+                <a:lumMod val="99000"/>
+                <a:satMod val="120000"/>
+                <a:shade val="78000"/>
+              </a:schemeClr>
+            </a:gs>
+          </a:gsLst>
+          <a:lin ang="5400000" scaled="0"/>
+        </a:gradFill>
+      </a:fillStyleLst>
+      <a:lnStyleLst>
+        <a:ln w="6350" cap="flat" cmpd="sng" algn="ctr">
+          <a:solidFill>
+            <a:schemeClr val="phClr"/>
+          </a:solidFill>
+          <a:prstDash val="solid"/>
+          <a:miter lim="800000"/>
+        </a:ln>
+        <a:ln w="12700" cap="flat" cmpd="sng" algn="ctr">
+          <a:solidFill>
+            <a:schemeClr val="phClr"/>
+          </a:solidFill>
+          <a:prstDash val="solid"/>
+          <a:miter lim="800000"/>
+        </a:ln>
+        <a:ln w="19050" cap="flat" cmpd="sng" algn="ctr">
+          <a:solidFill>
+            <a:schemeClr val="phClr"/>
+          </a:solidFill>
+          <a:prstDash val="solid"/>
+          <a:miter lim="800000"/>
+        </a:ln>
+      </a:lnStyleLst>
+      <a:effectStyleLst>
+        <a:effectStyle>
+          <a:effectLst/>
+        </a:effectStyle>
+        <a:effectStyle>
+          <a:effectLst/>
+        </a:effectStyle>
+        <a:effectStyle>
+          <a:effectLst>
+            <a:outerShdw blurRad="57150" dist="19050" dir="5400000" algn="ctr" rotWithShape="0">
+              <a:srgbClr val="000000">
+                <a:alpha val="63000"/>
+              </a:srgbClr>
+            </a:outerShdw>
+          </a:effectLst>
+        </a:effectStyle>
+      </a:effectStyleLst>
+      <a:bgFillStyleLst>
+        <a:solidFill>
+          <a:schemeClr val="phClr"/>
+        </a:solidFill>
+        <a:solidFill>
+          <a:schemeClr val="phClr">
+            <a:tint val="95000"/>
+            <a:satMod val="170000"/>
+          </a:schemeClr>
+        </a:solidFill>
+        <a:gradFill rotWithShape="1">
+          <a:gsLst>
+            <a:gs pos="0">
+              <a:schemeClr val="phClr">
+                <a:tint val="93000"/>
+                <a:satMod val="150000"/>
+                <a:shade val="98000"/>
+                <a:lumMod val="102000"/>
+              </a:schemeClr>
+            </a:gs>
+            <a:gs pos="50000">
+              <a:schemeClr val="phClr">
+                <a:tint val="98000"/>
+                <a:satMod val="130000"/>
+                <a:shade val="90000"/>
+                <a:lumMod val="103000"/>
+              </a:schemeClr>
+            </a:gs>
+            <a:gs pos="100000">
+              <a:schemeClr val="phClr">
+                <a:shade val="63000"/>
+                <a:satMod val="120000"/>
+              </a:schemeClr>
+            </a:gs>
+          </a:gsLst>
+          <a:lin ang="5400000" scaled="0"/>
+        </a:gradFill>
+      </a:bgFillStyleLst>
+    </a:fmtScheme>
+  </a:themeElements>
+  <a:objectDefaults/>
+  <a:extraClrSchemeLst/>
+  <a:extLst>
+    <a:ext uri="{05A4C25C-085E-4340-85A3-A5531E510DB2}">
+      <thm15:themeFamily xmlns:thm15="http://schemas.microsoft.com/office/thememl/2012/main" name="Office Theme" id="{62F939B6-93AF-4DB8-9C6B-D6C7DFDC589F}" vid="{4A3C46E8-61CC-4603-A589-7422A47A8E4A}"/>
+    </a:ext>
+  </a:extLst>
+</a:theme>
 </file>